--- a/p/parhikuni-via/Presentación VIA.pptx
+++ b/p/parhikuni-via/Presentación VIA.pptx
@@ -2,19 +2,19 @@
 <file path=ppt/presentation.xml><?xml version="1.0" encoding="utf-8"?>
 <p:presentation xmlns:a="http://schemas.openxmlformats.org/drawingml/2006/main" xmlns:r="http://schemas.openxmlformats.org/officeDocument/2006/relationships" xmlns:p="http://schemas.openxmlformats.org/presentationml/2006/main" autoCompressPictures="0">
   <p:sldMasterIdLst>
-    <p:sldMasterId id="2147483728" r:id="rId1"/>
+    <p:sldMasterId id="2147483648" r:id="rId1"/>
   </p:sldMasterIdLst>
   <p:sldIdLst>
-    <p:sldId id="256" r:id="rId2"/>
-    <p:sldId id="257" r:id="rId3"/>
-    <p:sldId id="258" r:id="rId4"/>
-    <p:sldId id="262" r:id="rId5"/>
-    <p:sldId id="259" r:id="rId6"/>
-    <p:sldId id="260" r:id="rId7"/>
-    <p:sldId id="263" r:id="rId8"/>
-    <p:sldId id="261" r:id="rId9"/>
-    <p:sldId id="264" r:id="rId10"/>
-    <p:sldId id="265" r:id="rId11"/>
+    <p:sldId id="256" r:id="rId3"/>
+    <p:sldId id="257" r:id="rId4"/>
+    <p:sldId id="258" r:id="rId5"/>
+    <p:sldId id="262" r:id="rId6"/>
+    <p:sldId id="259" r:id="rId7"/>
+    <p:sldId id="260" r:id="rId8"/>
+    <p:sldId id="263" r:id="rId9"/>
+    <p:sldId id="261" r:id="rId10"/>
+    <p:sldId id="264" r:id="rId11"/>
+    <p:sldId id="265" r:id="rId12"/>
   </p:sldIdLst>
   <p:sldSz cx="12192000" cy="6858000"/>
   <p:notesSz cx="6858000" cy="9144000"/>
@@ -113,1433 +113,11 @@
       </a:defRPr>
     </a:lvl9pPr>
   </p:defaultTextStyle>
-  <p:extLst>
-    <p:ext uri="{EFAFB233-063F-42B5-8137-9DF3F51BA10A}">
-      <p15:sldGuideLst xmlns:p15="http://schemas.microsoft.com/office/powerpoint/2012/main"/>
-    </p:ext>
-  </p:extLst>
 </p:presentation>
 </file>
 
-<file path=ppt/revisionInfo.xml><?xml version="1.0" encoding="utf-8"?>
-<p1510:revInfo xmlns:a="http://schemas.openxmlformats.org/drawingml/2006/main" xmlns:r="http://schemas.openxmlformats.org/officeDocument/2006/relationships" xmlns:p1510="http://schemas.microsoft.com/office/powerpoint/2015/10/main">
-  <p1510:revLst>
-    <p1510:client id="{440B7887-0E84-5C85-BFF5-3E2CED3207EA}" v="3" dt="2024-02-26T17:27:36.198"/>
-    <p1510:client id="{A1832EF2-65A0-D3E3-DB20-9875CFAED47F}" v="46" dt="2024-02-26T15:18:51.735"/>
-  </p1510:revLst>
-</p1510:revInfo>
-</file>
-
-<file path=ppt/changesInfos/changesInfo1.xml><?xml version="1.0" encoding="utf-8"?>
-<pc:chgInfo xmlns:a="http://schemas.openxmlformats.org/drawingml/2006/main" xmlns:r="http://schemas.openxmlformats.org/officeDocument/2006/relationships" xmlns:ac="http://schemas.microsoft.com/office/drawing/2013/main/command" xmlns:pc="http://schemas.microsoft.com/office/powerpoint/2013/main/command">
-  <pc:docChgLst>
-    <pc:chgData name="Aaron Aguilera" userId="S::aaron.aguilera@parhikuni.mx::f212d21a-67cd-4488-80e3-53ea1560e30f" providerId="AD" clId="Web-{FD1847D1-7EDC-49DD-A1AC-F4FC49AD85C3}"/>
-    <pc:docChg chg="addSld delSld modSld sldOrd addMainMaster delMainMaster">
-      <pc:chgData name="Aaron Aguilera" userId="S::aaron.aguilera@parhikuni.mx::f212d21a-67cd-4488-80e3-53ea1560e30f" providerId="AD" clId="Web-{FD1847D1-7EDC-49DD-A1AC-F4FC49AD85C3}" dt="2020-11-27T19:12:08.892" v="1842" actId="20577"/>
-      <pc:docMkLst>
-        <pc:docMk/>
-      </pc:docMkLst>
-      <pc:sldChg chg="addSp delSp modSp mod setBg modClrScheme delDesignElem chgLayout">
-        <pc:chgData name="Aaron Aguilera" userId="S::aaron.aguilera@parhikuni.mx::f212d21a-67cd-4488-80e3-53ea1560e30f" providerId="AD" clId="Web-{FD1847D1-7EDC-49DD-A1AC-F4FC49AD85C3}" dt="2020-11-27T19:07:26.592" v="1798"/>
-        <pc:sldMkLst>
-          <pc:docMk/>
-          <pc:sldMk cId="356326839" sldId="256"/>
-        </pc:sldMkLst>
-        <pc:spChg chg="mod ord">
-          <ac:chgData name="Aaron Aguilera" userId="S::aaron.aguilera@parhikuni.mx::f212d21a-67cd-4488-80e3-53ea1560e30f" providerId="AD" clId="Web-{FD1847D1-7EDC-49DD-A1AC-F4FC49AD85C3}" dt="2020-11-27T19:07:26.592" v="1798"/>
-          <ac:spMkLst>
-            <pc:docMk/>
-            <pc:sldMk cId="356326839" sldId="256"/>
-            <ac:spMk id="2" creationId="{00000000-0000-0000-0000-000000000000}"/>
-          </ac:spMkLst>
-        </pc:spChg>
-        <pc:spChg chg="mod ord">
-          <ac:chgData name="Aaron Aguilera" userId="S::aaron.aguilera@parhikuni.mx::f212d21a-67cd-4488-80e3-53ea1560e30f" providerId="AD" clId="Web-{FD1847D1-7EDC-49DD-A1AC-F4FC49AD85C3}" dt="2020-11-27T19:07:26.592" v="1798"/>
-          <ac:spMkLst>
-            <pc:docMk/>
-            <pc:sldMk cId="356326839" sldId="256"/>
-            <ac:spMk id="3" creationId="{00000000-0000-0000-0000-000000000000}"/>
-          </ac:spMkLst>
-        </pc:spChg>
-        <pc:spChg chg="add del">
-          <ac:chgData name="Aaron Aguilera" userId="S::aaron.aguilera@parhikuni.mx::f212d21a-67cd-4488-80e3-53ea1560e30f" providerId="AD" clId="Web-{FD1847D1-7EDC-49DD-A1AC-F4FC49AD85C3}" dt="2020-11-27T19:07:19.779" v="1797"/>
-          <ac:spMkLst>
-            <pc:docMk/>
-            <pc:sldMk cId="356326839" sldId="256"/>
-            <ac:spMk id="8" creationId="{33474BD5-5CDD-4624-B265-461D5D2FAB8D}"/>
-          </ac:spMkLst>
-        </pc:spChg>
-        <pc:spChg chg="add del">
-          <ac:chgData name="Aaron Aguilera" userId="S::aaron.aguilera@parhikuni.mx::f212d21a-67cd-4488-80e3-53ea1560e30f" providerId="AD" clId="Web-{FD1847D1-7EDC-49DD-A1AC-F4FC49AD85C3}" dt="2020-11-27T19:07:19.779" v="1797"/>
-          <ac:spMkLst>
-            <pc:docMk/>
-            <pc:sldMk cId="356326839" sldId="256"/>
-            <ac:spMk id="21" creationId="{9E382A3D-2F90-475C-8DF2-F666FEA3425B}"/>
-          </ac:spMkLst>
-        </pc:spChg>
-        <pc:grpChg chg="add del">
-          <ac:chgData name="Aaron Aguilera" userId="S::aaron.aguilera@parhikuni.mx::f212d21a-67cd-4488-80e3-53ea1560e30f" providerId="AD" clId="Web-{FD1847D1-7EDC-49DD-A1AC-F4FC49AD85C3}" dt="2020-11-27T19:07:19.779" v="1797"/>
-          <ac:grpSpMkLst>
-            <pc:docMk/>
-            <pc:sldMk cId="356326839" sldId="256"/>
-            <ac:grpSpMk id="10" creationId="{97541F74-7AB4-44F5-B299-DC46587E96D6}"/>
-          </ac:grpSpMkLst>
-        </pc:grpChg>
-      </pc:sldChg>
-      <pc:sldChg chg="modSp new mod modClrScheme chgLayout">
-        <pc:chgData name="Aaron Aguilera" userId="S::aaron.aguilera@parhikuni.mx::f212d21a-67cd-4488-80e3-53ea1560e30f" providerId="AD" clId="Web-{FD1847D1-7EDC-49DD-A1AC-F4FC49AD85C3}" dt="2020-11-27T19:07:26.592" v="1798"/>
-        <pc:sldMkLst>
-          <pc:docMk/>
-          <pc:sldMk cId="3441195643" sldId="257"/>
-        </pc:sldMkLst>
-        <pc:spChg chg="mod ord">
-          <ac:chgData name="Aaron Aguilera" userId="S::aaron.aguilera@parhikuni.mx::f212d21a-67cd-4488-80e3-53ea1560e30f" providerId="AD" clId="Web-{FD1847D1-7EDC-49DD-A1AC-F4FC49AD85C3}" dt="2020-11-27T19:07:26.592" v="1798"/>
-          <ac:spMkLst>
-            <pc:docMk/>
-            <pc:sldMk cId="3441195643" sldId="257"/>
-            <ac:spMk id="2" creationId="{527AB972-F014-4443-AAD4-9125A9B9A7B7}"/>
-          </ac:spMkLst>
-        </pc:spChg>
-        <pc:spChg chg="mod ord">
-          <ac:chgData name="Aaron Aguilera" userId="S::aaron.aguilera@parhikuni.mx::f212d21a-67cd-4488-80e3-53ea1560e30f" providerId="AD" clId="Web-{FD1847D1-7EDC-49DD-A1AC-F4FC49AD85C3}" dt="2020-11-27T19:07:26.592" v="1798"/>
-          <ac:spMkLst>
-            <pc:docMk/>
-            <pc:sldMk cId="3441195643" sldId="257"/>
-            <ac:spMk id="3" creationId="{DB50855E-B059-4F66-B5FD-E366D44CD63F}"/>
-          </ac:spMkLst>
-        </pc:spChg>
-      </pc:sldChg>
-      <pc:sldChg chg="modSp new mod modClrScheme chgLayout">
-        <pc:chgData name="Aaron Aguilera" userId="S::aaron.aguilera@parhikuni.mx::f212d21a-67cd-4488-80e3-53ea1560e30f" providerId="AD" clId="Web-{FD1847D1-7EDC-49DD-A1AC-F4FC49AD85C3}" dt="2020-11-27T19:07:26.592" v="1798"/>
-        <pc:sldMkLst>
-          <pc:docMk/>
-          <pc:sldMk cId="1320597448" sldId="258"/>
-        </pc:sldMkLst>
-        <pc:spChg chg="mod ord">
-          <ac:chgData name="Aaron Aguilera" userId="S::aaron.aguilera@parhikuni.mx::f212d21a-67cd-4488-80e3-53ea1560e30f" providerId="AD" clId="Web-{FD1847D1-7EDC-49DD-A1AC-F4FC49AD85C3}" dt="2020-11-27T19:07:26.592" v="1798"/>
-          <ac:spMkLst>
-            <pc:docMk/>
-            <pc:sldMk cId="1320597448" sldId="258"/>
-            <ac:spMk id="2" creationId="{B34BF297-5025-4B62-B082-733724A41D19}"/>
-          </ac:spMkLst>
-        </pc:spChg>
-        <pc:spChg chg="mod ord">
-          <ac:chgData name="Aaron Aguilera" userId="S::aaron.aguilera@parhikuni.mx::f212d21a-67cd-4488-80e3-53ea1560e30f" providerId="AD" clId="Web-{FD1847D1-7EDC-49DD-A1AC-F4FC49AD85C3}" dt="2020-11-27T19:07:26.592" v="1798"/>
-          <ac:spMkLst>
-            <pc:docMk/>
-            <pc:sldMk cId="1320597448" sldId="258"/>
-            <ac:spMk id="3" creationId="{E8D393E4-8CC7-46A9-9296-2C838278ADAC}"/>
-          </ac:spMkLst>
-        </pc:spChg>
-      </pc:sldChg>
-      <pc:sldChg chg="modSp new mod modClrScheme chgLayout">
-        <pc:chgData name="Aaron Aguilera" userId="S::aaron.aguilera@parhikuni.mx::f212d21a-67cd-4488-80e3-53ea1560e30f" providerId="AD" clId="Web-{FD1847D1-7EDC-49DD-A1AC-F4FC49AD85C3}" dt="2020-11-27T19:07:26.592" v="1798"/>
-        <pc:sldMkLst>
-          <pc:docMk/>
-          <pc:sldMk cId="2526847329" sldId="259"/>
-        </pc:sldMkLst>
-        <pc:spChg chg="mod ord">
-          <ac:chgData name="Aaron Aguilera" userId="S::aaron.aguilera@parhikuni.mx::f212d21a-67cd-4488-80e3-53ea1560e30f" providerId="AD" clId="Web-{FD1847D1-7EDC-49DD-A1AC-F4FC49AD85C3}" dt="2020-11-27T19:07:26.592" v="1798"/>
-          <ac:spMkLst>
-            <pc:docMk/>
-            <pc:sldMk cId="2526847329" sldId="259"/>
-            <ac:spMk id="2" creationId="{5CF97DC1-BA96-498A-9AD5-E80C11E512FE}"/>
-          </ac:spMkLst>
-        </pc:spChg>
-        <pc:spChg chg="mod ord">
-          <ac:chgData name="Aaron Aguilera" userId="S::aaron.aguilera@parhikuni.mx::f212d21a-67cd-4488-80e3-53ea1560e30f" providerId="AD" clId="Web-{FD1847D1-7EDC-49DD-A1AC-F4FC49AD85C3}" dt="2020-11-27T19:07:26.592" v="1798"/>
-          <ac:spMkLst>
-            <pc:docMk/>
-            <pc:sldMk cId="2526847329" sldId="259"/>
-            <ac:spMk id="3" creationId="{51906DBC-0CFA-44C8-B8D1-933F5C0650D1}"/>
-          </ac:spMkLst>
-        </pc:spChg>
-      </pc:sldChg>
-      <pc:sldChg chg="modSp new mod modClrScheme chgLayout">
-        <pc:chgData name="Aaron Aguilera" userId="S::aaron.aguilera@parhikuni.mx::f212d21a-67cd-4488-80e3-53ea1560e30f" providerId="AD" clId="Web-{FD1847D1-7EDC-49DD-A1AC-F4FC49AD85C3}" dt="2020-11-27T19:07:26.592" v="1798"/>
-        <pc:sldMkLst>
-          <pc:docMk/>
-          <pc:sldMk cId="3548563040" sldId="260"/>
-        </pc:sldMkLst>
-        <pc:spChg chg="mod ord">
-          <ac:chgData name="Aaron Aguilera" userId="S::aaron.aguilera@parhikuni.mx::f212d21a-67cd-4488-80e3-53ea1560e30f" providerId="AD" clId="Web-{FD1847D1-7EDC-49DD-A1AC-F4FC49AD85C3}" dt="2020-11-27T19:07:26.592" v="1798"/>
-          <ac:spMkLst>
-            <pc:docMk/>
-            <pc:sldMk cId="3548563040" sldId="260"/>
-            <ac:spMk id="2" creationId="{785E63F7-9FD8-4911-97B7-8127A22E2FCB}"/>
-          </ac:spMkLst>
-        </pc:spChg>
-        <pc:spChg chg="mod ord">
-          <ac:chgData name="Aaron Aguilera" userId="S::aaron.aguilera@parhikuni.mx::f212d21a-67cd-4488-80e3-53ea1560e30f" providerId="AD" clId="Web-{FD1847D1-7EDC-49DD-A1AC-F4FC49AD85C3}" dt="2020-11-27T19:07:26.592" v="1798"/>
-          <ac:spMkLst>
-            <pc:docMk/>
-            <pc:sldMk cId="3548563040" sldId="260"/>
-            <ac:spMk id="3" creationId="{EF23D928-0060-4D3D-A304-6C5BF0CB7B6B}"/>
-          </ac:spMkLst>
-        </pc:spChg>
-      </pc:sldChg>
-      <pc:sldChg chg="modSp new mod modClrScheme chgLayout">
-        <pc:chgData name="Aaron Aguilera" userId="S::aaron.aguilera@parhikuni.mx::f212d21a-67cd-4488-80e3-53ea1560e30f" providerId="AD" clId="Web-{FD1847D1-7EDC-49DD-A1AC-F4FC49AD85C3}" dt="2020-11-27T19:07:26.592" v="1798"/>
-        <pc:sldMkLst>
-          <pc:docMk/>
-          <pc:sldMk cId="3471136250" sldId="261"/>
-        </pc:sldMkLst>
-        <pc:spChg chg="mod ord">
-          <ac:chgData name="Aaron Aguilera" userId="S::aaron.aguilera@parhikuni.mx::f212d21a-67cd-4488-80e3-53ea1560e30f" providerId="AD" clId="Web-{FD1847D1-7EDC-49DD-A1AC-F4FC49AD85C3}" dt="2020-11-27T19:07:26.592" v="1798"/>
-          <ac:spMkLst>
-            <pc:docMk/>
-            <pc:sldMk cId="3471136250" sldId="261"/>
-            <ac:spMk id="2" creationId="{F94C6B46-63AB-49CF-A525-B5920537714C}"/>
-          </ac:spMkLst>
-        </pc:spChg>
-        <pc:spChg chg="mod ord">
-          <ac:chgData name="Aaron Aguilera" userId="S::aaron.aguilera@parhikuni.mx::f212d21a-67cd-4488-80e3-53ea1560e30f" providerId="AD" clId="Web-{FD1847D1-7EDC-49DD-A1AC-F4FC49AD85C3}" dt="2020-11-27T19:07:26.592" v="1798"/>
-          <ac:spMkLst>
-            <pc:docMk/>
-            <pc:sldMk cId="3471136250" sldId="261"/>
-            <ac:spMk id="3" creationId="{C145D010-3502-44AC-BEAC-703DA6DD488D}"/>
-          </ac:spMkLst>
-        </pc:spChg>
-      </pc:sldChg>
-      <pc:sldChg chg="addSp delSp modSp new del">
-        <pc:chgData name="Aaron Aguilera" userId="S::aaron.aguilera@parhikuni.mx::f212d21a-67cd-4488-80e3-53ea1560e30f" providerId="AD" clId="Web-{FD1847D1-7EDC-49DD-A1AC-F4FC49AD85C3}" dt="2020-11-27T19:10:54.762" v="1821"/>
-        <pc:sldMkLst>
-          <pc:docMk/>
-          <pc:sldMk cId="3403283913" sldId="262"/>
-        </pc:sldMkLst>
-        <pc:spChg chg="del">
-          <ac:chgData name="Aaron Aguilera" userId="S::aaron.aguilera@parhikuni.mx::f212d21a-67cd-4488-80e3-53ea1560e30f" providerId="AD" clId="Web-{FD1847D1-7EDC-49DD-A1AC-F4FC49AD85C3}" dt="2020-11-27T19:08:54.379" v="1811"/>
-          <ac:spMkLst>
-            <pc:docMk/>
-            <pc:sldMk cId="3403283913" sldId="262"/>
-            <ac:spMk id="2" creationId="{78290EAF-7D88-4F93-820B-85A2850A00C8}"/>
-          </ac:spMkLst>
-        </pc:spChg>
-        <pc:spChg chg="del">
-          <ac:chgData name="Aaron Aguilera" userId="S::aaron.aguilera@parhikuni.mx::f212d21a-67cd-4488-80e3-53ea1560e30f" providerId="AD" clId="Web-{FD1847D1-7EDC-49DD-A1AC-F4FC49AD85C3}" dt="2020-11-27T19:09:11.411" v="1816"/>
-          <ac:spMkLst>
-            <pc:docMk/>
-            <pc:sldMk cId="3403283913" sldId="262"/>
-            <ac:spMk id="3" creationId="{01A8A0A7-AAA4-475E-BE82-80459E6015BA}"/>
-          </ac:spMkLst>
-        </pc:spChg>
-        <pc:picChg chg="add mod">
-          <ac:chgData name="Aaron Aguilera" userId="S::aaron.aguilera@parhikuni.mx::f212d21a-67cd-4488-80e3-53ea1560e30f" providerId="AD" clId="Web-{FD1847D1-7EDC-49DD-A1AC-F4FC49AD85C3}" dt="2020-11-27T19:09:16.114" v="1817" actId="1076"/>
-          <ac:picMkLst>
-            <pc:docMk/>
-            <pc:sldMk cId="3403283913" sldId="262"/>
-            <ac:picMk id="4" creationId="{6A71267B-F846-42D4-AF75-436EDEA2EEB7}"/>
-          </ac:picMkLst>
-        </pc:picChg>
-        <pc:picChg chg="add mod">
-          <ac:chgData name="Aaron Aguilera" userId="S::aaron.aguilera@parhikuni.mx::f212d21a-67cd-4488-80e3-53ea1560e30f" providerId="AD" clId="Web-{FD1847D1-7EDC-49DD-A1AC-F4FC49AD85C3}" dt="2020-11-27T19:09:41.429" v="1820" actId="1076"/>
-          <ac:picMkLst>
-            <pc:docMk/>
-            <pc:sldMk cId="3403283913" sldId="262"/>
-            <ac:picMk id="5" creationId="{CDABB2BD-A4F9-4CCC-8615-31BBA09C0CFB}"/>
-          </ac:picMkLst>
-        </pc:picChg>
-      </pc:sldChg>
-      <pc:sldChg chg="addSp delSp modSp new ord">
-        <pc:chgData name="Aaron Aguilera" userId="S::aaron.aguilera@parhikuni.mx::f212d21a-67cd-4488-80e3-53ea1560e30f" providerId="AD" clId="Web-{FD1847D1-7EDC-49DD-A1AC-F4FC49AD85C3}" dt="2020-11-27T19:12:08.892" v="1842" actId="20577"/>
-        <pc:sldMkLst>
-          <pc:docMk/>
-          <pc:sldMk cId="3932652614" sldId="262"/>
-        </pc:sldMkLst>
-        <pc:spChg chg="mod">
-          <ac:chgData name="Aaron Aguilera" userId="S::aaron.aguilera@parhikuni.mx::f212d21a-67cd-4488-80e3-53ea1560e30f" providerId="AD" clId="Web-{FD1847D1-7EDC-49DD-A1AC-F4FC49AD85C3}" dt="2020-11-27T19:12:08.892" v="1842" actId="20577"/>
-          <ac:spMkLst>
-            <pc:docMk/>
-            <pc:sldMk cId="3932652614" sldId="262"/>
-            <ac:spMk id="2" creationId="{FB206CEA-7134-4718-95BE-C84733C8593E}"/>
-          </ac:spMkLst>
-        </pc:spChg>
-        <pc:spChg chg="del">
-          <ac:chgData name="Aaron Aguilera" userId="S::aaron.aguilera@parhikuni.mx::f212d21a-67cd-4488-80e3-53ea1560e30f" providerId="AD" clId="Web-{FD1847D1-7EDC-49DD-A1AC-F4FC49AD85C3}" dt="2020-11-27T19:11:15.232" v="1824"/>
-          <ac:spMkLst>
-            <pc:docMk/>
-            <pc:sldMk cId="3932652614" sldId="262"/>
-            <ac:spMk id="3" creationId="{B244EB41-ADF7-41FD-86B0-1498A9D92817}"/>
-          </ac:spMkLst>
-        </pc:spChg>
-        <pc:picChg chg="add mod ord">
-          <ac:chgData name="Aaron Aguilera" userId="S::aaron.aguilera@parhikuni.mx::f212d21a-67cd-4488-80e3-53ea1560e30f" providerId="AD" clId="Web-{FD1847D1-7EDC-49DD-A1AC-F4FC49AD85C3}" dt="2020-11-27T19:11:46.328" v="1832" actId="1076"/>
-          <ac:picMkLst>
-            <pc:docMk/>
-            <pc:sldMk cId="3932652614" sldId="262"/>
-            <ac:picMk id="4" creationId="{ABC473B9-0441-423F-A7F2-E308BCB094AC}"/>
-          </ac:picMkLst>
-        </pc:picChg>
-        <pc:picChg chg="add mod">
-          <ac:chgData name="Aaron Aguilera" userId="S::aaron.aguilera@parhikuni.mx::f212d21a-67cd-4488-80e3-53ea1560e30f" providerId="AD" clId="Web-{FD1847D1-7EDC-49DD-A1AC-F4FC49AD85C3}" dt="2020-11-27T19:11:58.250" v="1834" actId="1076"/>
-          <ac:picMkLst>
-            <pc:docMk/>
-            <pc:sldMk cId="3932652614" sldId="262"/>
-            <ac:picMk id="5" creationId="{B957269E-1D41-4758-8C08-FED9F8259437}"/>
-          </ac:picMkLst>
-        </pc:picChg>
-      </pc:sldChg>
-      <pc:sldChg chg="addSp delSp modSp new del">
-        <pc:chgData name="Aaron Aguilera" userId="S::aaron.aguilera@parhikuni.mx::f212d21a-67cd-4488-80e3-53ea1560e30f" providerId="AD" clId="Web-{FD1847D1-7EDC-49DD-A1AC-F4FC49AD85C3}" dt="2020-11-27T19:08:34.737" v="1808"/>
-        <pc:sldMkLst>
-          <pc:docMk/>
-          <pc:sldMk cId="4073495470" sldId="262"/>
-        </pc:sldMkLst>
-        <pc:picChg chg="add del mod">
-          <ac:chgData name="Aaron Aguilera" userId="S::aaron.aguilera@parhikuni.mx::f212d21a-67cd-4488-80e3-53ea1560e30f" providerId="AD" clId="Web-{FD1847D1-7EDC-49DD-A1AC-F4FC49AD85C3}" dt="2020-11-27T19:08:33.440" v="1807"/>
-          <ac:picMkLst>
-            <pc:docMk/>
-            <pc:sldMk cId="4073495470" sldId="262"/>
-            <ac:picMk id="3" creationId="{F5A604C7-D75B-400A-B2EB-A2AD287FA181}"/>
-          </ac:picMkLst>
-        </pc:picChg>
-      </pc:sldChg>
-      <pc:sldMasterChg chg="del delSldLayout">
-        <pc:chgData name="Aaron Aguilera" userId="S::aaron.aguilera@parhikuni.mx::f212d21a-67cd-4488-80e3-53ea1560e30f" providerId="AD" clId="Web-{FD1847D1-7EDC-49DD-A1AC-F4FC49AD85C3}" dt="2020-11-27T18:51:38.175" v="1794"/>
-        <pc:sldMasterMkLst>
-          <pc:docMk/>
-          <pc:sldMasterMk cId="0" sldId="2147483648"/>
-        </pc:sldMasterMkLst>
-        <pc:sldLayoutChg chg="del">
-          <pc:chgData name="Aaron Aguilera" userId="S::aaron.aguilera@parhikuni.mx::f212d21a-67cd-4488-80e3-53ea1560e30f" providerId="AD" clId="Web-{FD1847D1-7EDC-49DD-A1AC-F4FC49AD85C3}" dt="2020-11-27T18:51:38.175" v="1794"/>
-          <pc:sldLayoutMkLst>
-            <pc:docMk/>
-            <pc:sldMasterMk cId="0" sldId="2147483648"/>
-            <pc:sldLayoutMk cId="0" sldId="2147483649"/>
-          </pc:sldLayoutMkLst>
-        </pc:sldLayoutChg>
-        <pc:sldLayoutChg chg="del">
-          <pc:chgData name="Aaron Aguilera" userId="S::aaron.aguilera@parhikuni.mx::f212d21a-67cd-4488-80e3-53ea1560e30f" providerId="AD" clId="Web-{FD1847D1-7EDC-49DD-A1AC-F4FC49AD85C3}" dt="2020-11-27T18:51:38.175" v="1794"/>
-          <pc:sldLayoutMkLst>
-            <pc:docMk/>
-            <pc:sldMasterMk cId="0" sldId="2147483648"/>
-            <pc:sldLayoutMk cId="0" sldId="2147483650"/>
-          </pc:sldLayoutMkLst>
-        </pc:sldLayoutChg>
-        <pc:sldLayoutChg chg="del">
-          <pc:chgData name="Aaron Aguilera" userId="S::aaron.aguilera@parhikuni.mx::f212d21a-67cd-4488-80e3-53ea1560e30f" providerId="AD" clId="Web-{FD1847D1-7EDC-49DD-A1AC-F4FC49AD85C3}" dt="2020-11-27T18:51:38.175" v="1794"/>
-          <pc:sldLayoutMkLst>
-            <pc:docMk/>
-            <pc:sldMasterMk cId="0" sldId="2147483648"/>
-            <pc:sldLayoutMk cId="0" sldId="2147483652"/>
-          </pc:sldLayoutMkLst>
-        </pc:sldLayoutChg>
-        <pc:sldLayoutChg chg="del">
-          <pc:chgData name="Aaron Aguilera" userId="S::aaron.aguilera@parhikuni.mx::f212d21a-67cd-4488-80e3-53ea1560e30f" providerId="AD" clId="Web-{FD1847D1-7EDC-49DD-A1AC-F4FC49AD85C3}" dt="2020-11-27T18:51:38.175" v="1794"/>
-          <pc:sldLayoutMkLst>
-            <pc:docMk/>
-            <pc:sldMasterMk cId="0" sldId="2147483648"/>
-            <pc:sldLayoutMk cId="0" sldId="2147483653"/>
-          </pc:sldLayoutMkLst>
-        </pc:sldLayoutChg>
-        <pc:sldLayoutChg chg="del">
-          <pc:chgData name="Aaron Aguilera" userId="S::aaron.aguilera@parhikuni.mx::f212d21a-67cd-4488-80e3-53ea1560e30f" providerId="AD" clId="Web-{FD1847D1-7EDC-49DD-A1AC-F4FC49AD85C3}" dt="2020-11-27T18:51:38.175" v="1794"/>
-          <pc:sldLayoutMkLst>
-            <pc:docMk/>
-            <pc:sldMasterMk cId="0" sldId="2147483648"/>
-            <pc:sldLayoutMk cId="0" sldId="2147483654"/>
-          </pc:sldLayoutMkLst>
-        </pc:sldLayoutChg>
-        <pc:sldLayoutChg chg="del">
-          <pc:chgData name="Aaron Aguilera" userId="S::aaron.aguilera@parhikuni.mx::f212d21a-67cd-4488-80e3-53ea1560e30f" providerId="AD" clId="Web-{FD1847D1-7EDC-49DD-A1AC-F4FC49AD85C3}" dt="2020-11-27T18:51:38.175" v="1794"/>
-          <pc:sldLayoutMkLst>
-            <pc:docMk/>
-            <pc:sldMasterMk cId="0" sldId="2147483648"/>
-            <pc:sldLayoutMk cId="0" sldId="2147483655"/>
-          </pc:sldLayoutMkLst>
-        </pc:sldLayoutChg>
-        <pc:sldLayoutChg chg="del">
-          <pc:chgData name="Aaron Aguilera" userId="S::aaron.aguilera@parhikuni.mx::f212d21a-67cd-4488-80e3-53ea1560e30f" providerId="AD" clId="Web-{FD1847D1-7EDC-49DD-A1AC-F4FC49AD85C3}" dt="2020-11-27T18:51:38.175" v="1794"/>
-          <pc:sldLayoutMkLst>
-            <pc:docMk/>
-            <pc:sldMasterMk cId="0" sldId="2147483648"/>
-            <pc:sldLayoutMk cId="0" sldId="2147483656"/>
-          </pc:sldLayoutMkLst>
-        </pc:sldLayoutChg>
-        <pc:sldLayoutChg chg="del">
-          <pc:chgData name="Aaron Aguilera" userId="S::aaron.aguilera@parhikuni.mx::f212d21a-67cd-4488-80e3-53ea1560e30f" providerId="AD" clId="Web-{FD1847D1-7EDC-49DD-A1AC-F4FC49AD85C3}" dt="2020-11-27T18:51:38.175" v="1794"/>
-          <pc:sldLayoutMkLst>
-            <pc:docMk/>
-            <pc:sldMasterMk cId="0" sldId="2147483648"/>
-            <pc:sldLayoutMk cId="0" sldId="2147483658"/>
-          </pc:sldLayoutMkLst>
-        </pc:sldLayoutChg>
-        <pc:sldLayoutChg chg="del">
-          <pc:chgData name="Aaron Aguilera" userId="S::aaron.aguilera@parhikuni.mx::f212d21a-67cd-4488-80e3-53ea1560e30f" providerId="AD" clId="Web-{FD1847D1-7EDC-49DD-A1AC-F4FC49AD85C3}" dt="2020-11-27T18:51:38.175" v="1794"/>
-          <pc:sldLayoutMkLst>
-            <pc:docMk/>
-            <pc:sldMasterMk cId="0" sldId="2147483648"/>
-            <pc:sldLayoutMk cId="0" sldId="2147483659"/>
-          </pc:sldLayoutMkLst>
-        </pc:sldLayoutChg>
-        <pc:sldLayoutChg chg="del">
-          <pc:chgData name="Aaron Aguilera" userId="S::aaron.aguilera@parhikuni.mx::f212d21a-67cd-4488-80e3-53ea1560e30f" providerId="AD" clId="Web-{FD1847D1-7EDC-49DD-A1AC-F4FC49AD85C3}" dt="2020-11-27T18:51:38.175" v="1794"/>
-          <pc:sldLayoutMkLst>
-            <pc:docMk/>
-            <pc:sldMasterMk cId="0" sldId="2147483648"/>
-            <pc:sldLayoutMk cId="0" sldId="2147483661"/>
-          </pc:sldLayoutMkLst>
-        </pc:sldLayoutChg>
-        <pc:sldLayoutChg chg="del">
-          <pc:chgData name="Aaron Aguilera" userId="S::aaron.aguilera@parhikuni.mx::f212d21a-67cd-4488-80e3-53ea1560e30f" providerId="AD" clId="Web-{FD1847D1-7EDC-49DD-A1AC-F4FC49AD85C3}" dt="2020-11-27T18:51:38.175" v="1794"/>
-          <pc:sldLayoutMkLst>
-            <pc:docMk/>
-            <pc:sldMasterMk cId="0" sldId="2147483648"/>
-            <pc:sldLayoutMk cId="0" sldId="2147483662"/>
-          </pc:sldLayoutMkLst>
-        </pc:sldLayoutChg>
-        <pc:sldLayoutChg chg="del">
-          <pc:chgData name="Aaron Aguilera" userId="S::aaron.aguilera@parhikuni.mx::f212d21a-67cd-4488-80e3-53ea1560e30f" providerId="AD" clId="Web-{FD1847D1-7EDC-49DD-A1AC-F4FC49AD85C3}" dt="2020-11-27T18:51:38.175" v="1794"/>
-          <pc:sldLayoutMkLst>
-            <pc:docMk/>
-            <pc:sldMasterMk cId="0" sldId="2147483648"/>
-            <pc:sldLayoutMk cId="0" sldId="2147483667"/>
-          </pc:sldLayoutMkLst>
-        </pc:sldLayoutChg>
-        <pc:sldLayoutChg chg="del">
-          <pc:chgData name="Aaron Aguilera" userId="S::aaron.aguilera@parhikuni.mx::f212d21a-67cd-4488-80e3-53ea1560e30f" providerId="AD" clId="Web-{FD1847D1-7EDC-49DD-A1AC-F4FC49AD85C3}" dt="2020-11-27T18:51:38.175" v="1794"/>
-          <pc:sldLayoutMkLst>
-            <pc:docMk/>
-            <pc:sldMasterMk cId="0" sldId="2147483648"/>
-            <pc:sldLayoutMk cId="0" sldId="2147483668"/>
-          </pc:sldLayoutMkLst>
-        </pc:sldLayoutChg>
-        <pc:sldLayoutChg chg="del">
-          <pc:chgData name="Aaron Aguilera" userId="S::aaron.aguilera@parhikuni.mx::f212d21a-67cd-4488-80e3-53ea1560e30f" providerId="AD" clId="Web-{FD1847D1-7EDC-49DD-A1AC-F4FC49AD85C3}" dt="2020-11-27T18:51:38.175" v="1794"/>
-          <pc:sldLayoutMkLst>
-            <pc:docMk/>
-            <pc:sldMasterMk cId="0" sldId="2147483648"/>
-            <pc:sldLayoutMk cId="0" sldId="2147483669"/>
-          </pc:sldLayoutMkLst>
-        </pc:sldLayoutChg>
-        <pc:sldLayoutChg chg="del">
-          <pc:chgData name="Aaron Aguilera" userId="S::aaron.aguilera@parhikuni.mx::f212d21a-67cd-4488-80e3-53ea1560e30f" providerId="AD" clId="Web-{FD1847D1-7EDC-49DD-A1AC-F4FC49AD85C3}" dt="2020-11-27T18:51:38.175" v="1794"/>
-          <pc:sldLayoutMkLst>
-            <pc:docMk/>
-            <pc:sldMasterMk cId="0" sldId="2147483648"/>
-            <pc:sldLayoutMk cId="0" sldId="2147483670"/>
-          </pc:sldLayoutMkLst>
-        </pc:sldLayoutChg>
-        <pc:sldLayoutChg chg="del">
-          <pc:chgData name="Aaron Aguilera" userId="S::aaron.aguilera@parhikuni.mx::f212d21a-67cd-4488-80e3-53ea1560e30f" providerId="AD" clId="Web-{FD1847D1-7EDC-49DD-A1AC-F4FC49AD85C3}" dt="2020-11-27T18:51:38.175" v="1794"/>
-          <pc:sldLayoutMkLst>
-            <pc:docMk/>
-            <pc:sldMasterMk cId="0" sldId="2147483648"/>
-            <pc:sldLayoutMk cId="0" sldId="2147483672"/>
-          </pc:sldLayoutMkLst>
-        </pc:sldLayoutChg>
-        <pc:sldLayoutChg chg="del">
-          <pc:chgData name="Aaron Aguilera" userId="S::aaron.aguilera@parhikuni.mx::f212d21a-67cd-4488-80e3-53ea1560e30f" providerId="AD" clId="Web-{FD1847D1-7EDC-49DD-A1AC-F4FC49AD85C3}" dt="2020-11-27T18:51:38.175" v="1794"/>
-          <pc:sldLayoutMkLst>
-            <pc:docMk/>
-            <pc:sldMasterMk cId="0" sldId="2147483648"/>
-            <pc:sldLayoutMk cId="0" sldId="2147483673"/>
-          </pc:sldLayoutMkLst>
-        </pc:sldLayoutChg>
-      </pc:sldMasterChg>
-      <pc:sldMasterChg chg="add del addSldLayout delSldLayout modSldLayout">
-        <pc:chgData name="Aaron Aguilera" userId="S::aaron.aguilera@parhikuni.mx::f212d21a-67cd-4488-80e3-53ea1560e30f" providerId="AD" clId="Web-{FD1847D1-7EDC-49DD-A1AC-F4FC49AD85C3}" dt="2020-11-27T18:51:42.175" v="1795"/>
-        <pc:sldMasterMkLst>
-          <pc:docMk/>
-          <pc:sldMasterMk cId="1427719824" sldId="2147483674"/>
-        </pc:sldMasterMkLst>
-        <pc:sldLayoutChg chg="add del mod replId">
-          <pc:chgData name="Aaron Aguilera" userId="S::aaron.aguilera@parhikuni.mx::f212d21a-67cd-4488-80e3-53ea1560e30f" providerId="AD" clId="Web-{FD1847D1-7EDC-49DD-A1AC-F4FC49AD85C3}" dt="2020-11-27T18:51:42.175" v="1795"/>
-          <pc:sldLayoutMkLst>
-            <pc:docMk/>
-            <pc:sldMasterMk cId="1427719824" sldId="2147483674"/>
-            <pc:sldLayoutMk cId="3731133593" sldId="2147483675"/>
-          </pc:sldLayoutMkLst>
-        </pc:sldLayoutChg>
-        <pc:sldLayoutChg chg="add del mod replId">
-          <pc:chgData name="Aaron Aguilera" userId="S::aaron.aguilera@parhikuni.mx::f212d21a-67cd-4488-80e3-53ea1560e30f" providerId="AD" clId="Web-{FD1847D1-7EDC-49DD-A1AC-F4FC49AD85C3}" dt="2020-11-27T18:51:42.175" v="1795"/>
-          <pc:sldLayoutMkLst>
-            <pc:docMk/>
-            <pc:sldMasterMk cId="1427719824" sldId="2147483674"/>
-            <pc:sldLayoutMk cId="680716258" sldId="2147483676"/>
-          </pc:sldLayoutMkLst>
-        </pc:sldLayoutChg>
-        <pc:sldLayoutChg chg="add del mod replId">
-          <pc:chgData name="Aaron Aguilera" userId="S::aaron.aguilera@parhikuni.mx::f212d21a-67cd-4488-80e3-53ea1560e30f" providerId="AD" clId="Web-{FD1847D1-7EDC-49DD-A1AC-F4FC49AD85C3}" dt="2020-11-27T18:51:42.175" v="1795"/>
-          <pc:sldLayoutMkLst>
-            <pc:docMk/>
-            <pc:sldMasterMk cId="1427719824" sldId="2147483674"/>
-            <pc:sldLayoutMk cId="1489041302" sldId="2147483677"/>
-          </pc:sldLayoutMkLst>
-        </pc:sldLayoutChg>
-        <pc:sldLayoutChg chg="add del mod replId">
-          <pc:chgData name="Aaron Aguilera" userId="S::aaron.aguilera@parhikuni.mx::f212d21a-67cd-4488-80e3-53ea1560e30f" providerId="AD" clId="Web-{FD1847D1-7EDC-49DD-A1AC-F4FC49AD85C3}" dt="2020-11-27T18:51:42.175" v="1795"/>
-          <pc:sldLayoutMkLst>
-            <pc:docMk/>
-            <pc:sldMasterMk cId="1427719824" sldId="2147483674"/>
-            <pc:sldLayoutMk cId="123157337" sldId="2147483678"/>
-          </pc:sldLayoutMkLst>
-        </pc:sldLayoutChg>
-        <pc:sldLayoutChg chg="add del mod replId">
-          <pc:chgData name="Aaron Aguilera" userId="S::aaron.aguilera@parhikuni.mx::f212d21a-67cd-4488-80e3-53ea1560e30f" providerId="AD" clId="Web-{FD1847D1-7EDC-49DD-A1AC-F4FC49AD85C3}" dt="2020-11-27T18:51:42.175" v="1795"/>
-          <pc:sldLayoutMkLst>
-            <pc:docMk/>
-            <pc:sldMasterMk cId="1427719824" sldId="2147483674"/>
-            <pc:sldLayoutMk cId="4291307204" sldId="2147483679"/>
-          </pc:sldLayoutMkLst>
-        </pc:sldLayoutChg>
-        <pc:sldLayoutChg chg="add del mod replId">
-          <pc:chgData name="Aaron Aguilera" userId="S::aaron.aguilera@parhikuni.mx::f212d21a-67cd-4488-80e3-53ea1560e30f" providerId="AD" clId="Web-{FD1847D1-7EDC-49DD-A1AC-F4FC49AD85C3}" dt="2020-11-27T18:51:42.175" v="1795"/>
-          <pc:sldLayoutMkLst>
-            <pc:docMk/>
-            <pc:sldMasterMk cId="1427719824" sldId="2147483674"/>
-            <pc:sldLayoutMk cId="3774341565" sldId="2147483680"/>
-          </pc:sldLayoutMkLst>
-        </pc:sldLayoutChg>
-        <pc:sldLayoutChg chg="add del mod replId">
-          <pc:chgData name="Aaron Aguilera" userId="S::aaron.aguilera@parhikuni.mx::f212d21a-67cd-4488-80e3-53ea1560e30f" providerId="AD" clId="Web-{FD1847D1-7EDC-49DD-A1AC-F4FC49AD85C3}" dt="2020-11-27T18:51:42.175" v="1795"/>
-          <pc:sldLayoutMkLst>
-            <pc:docMk/>
-            <pc:sldMasterMk cId="1427719824" sldId="2147483674"/>
-            <pc:sldLayoutMk cId="1707507364" sldId="2147483681"/>
-          </pc:sldLayoutMkLst>
-        </pc:sldLayoutChg>
-        <pc:sldLayoutChg chg="add del mod replId">
-          <pc:chgData name="Aaron Aguilera" userId="S::aaron.aguilera@parhikuni.mx::f212d21a-67cd-4488-80e3-53ea1560e30f" providerId="AD" clId="Web-{FD1847D1-7EDC-49DD-A1AC-F4FC49AD85C3}" dt="2020-11-27T18:51:42.175" v="1795"/>
-          <pc:sldLayoutMkLst>
-            <pc:docMk/>
-            <pc:sldMasterMk cId="1427719824" sldId="2147483674"/>
-            <pc:sldLayoutMk cId="1236713862" sldId="2147483682"/>
-          </pc:sldLayoutMkLst>
-        </pc:sldLayoutChg>
-        <pc:sldLayoutChg chg="add del mod replId">
-          <pc:chgData name="Aaron Aguilera" userId="S::aaron.aguilera@parhikuni.mx::f212d21a-67cd-4488-80e3-53ea1560e30f" providerId="AD" clId="Web-{FD1847D1-7EDC-49DD-A1AC-F4FC49AD85C3}" dt="2020-11-27T18:51:42.175" v="1795"/>
-          <pc:sldLayoutMkLst>
-            <pc:docMk/>
-            <pc:sldMasterMk cId="1427719824" sldId="2147483674"/>
-            <pc:sldLayoutMk cId="1403224789" sldId="2147483683"/>
-          </pc:sldLayoutMkLst>
-        </pc:sldLayoutChg>
-        <pc:sldLayoutChg chg="add del mod replId">
-          <pc:chgData name="Aaron Aguilera" userId="S::aaron.aguilera@parhikuni.mx::f212d21a-67cd-4488-80e3-53ea1560e30f" providerId="AD" clId="Web-{FD1847D1-7EDC-49DD-A1AC-F4FC49AD85C3}" dt="2020-11-27T18:51:42.175" v="1795"/>
-          <pc:sldLayoutMkLst>
-            <pc:docMk/>
-            <pc:sldMasterMk cId="1427719824" sldId="2147483674"/>
-            <pc:sldLayoutMk cId="1449565502" sldId="2147483684"/>
-          </pc:sldLayoutMkLst>
-        </pc:sldLayoutChg>
-        <pc:sldLayoutChg chg="add del mod replId">
-          <pc:chgData name="Aaron Aguilera" userId="S::aaron.aguilera@parhikuni.mx::f212d21a-67cd-4488-80e3-53ea1560e30f" providerId="AD" clId="Web-{FD1847D1-7EDC-49DD-A1AC-F4FC49AD85C3}" dt="2020-11-27T18:51:42.175" v="1795"/>
-          <pc:sldLayoutMkLst>
-            <pc:docMk/>
-            <pc:sldMasterMk cId="1427719824" sldId="2147483674"/>
-            <pc:sldLayoutMk cId="2621050306" sldId="2147483685"/>
-          </pc:sldLayoutMkLst>
-        </pc:sldLayoutChg>
-        <pc:sldLayoutChg chg="add del mod replId">
-          <pc:chgData name="Aaron Aguilera" userId="S::aaron.aguilera@parhikuni.mx::f212d21a-67cd-4488-80e3-53ea1560e30f" providerId="AD" clId="Web-{FD1847D1-7EDC-49DD-A1AC-F4FC49AD85C3}" dt="2020-11-27T18:51:42.175" v="1795"/>
-          <pc:sldLayoutMkLst>
-            <pc:docMk/>
-            <pc:sldMasterMk cId="1427719824" sldId="2147483674"/>
-            <pc:sldLayoutMk cId="2663023686" sldId="2147483686"/>
-          </pc:sldLayoutMkLst>
-        </pc:sldLayoutChg>
-        <pc:sldLayoutChg chg="add del mod replId">
-          <pc:chgData name="Aaron Aguilera" userId="S::aaron.aguilera@parhikuni.mx::f212d21a-67cd-4488-80e3-53ea1560e30f" providerId="AD" clId="Web-{FD1847D1-7EDC-49DD-A1AC-F4FC49AD85C3}" dt="2020-11-27T18:51:42.175" v="1795"/>
-          <pc:sldLayoutMkLst>
-            <pc:docMk/>
-            <pc:sldMasterMk cId="1427719824" sldId="2147483674"/>
-            <pc:sldLayoutMk cId="702674313" sldId="2147483687"/>
-          </pc:sldLayoutMkLst>
-        </pc:sldLayoutChg>
-        <pc:sldLayoutChg chg="add del mod replId">
-          <pc:chgData name="Aaron Aguilera" userId="S::aaron.aguilera@parhikuni.mx::f212d21a-67cd-4488-80e3-53ea1560e30f" providerId="AD" clId="Web-{FD1847D1-7EDC-49DD-A1AC-F4FC49AD85C3}" dt="2020-11-27T18:51:42.175" v="1795"/>
-          <pc:sldLayoutMkLst>
-            <pc:docMk/>
-            <pc:sldMasterMk cId="1427719824" sldId="2147483674"/>
-            <pc:sldLayoutMk cId="656935743" sldId="2147483688"/>
-          </pc:sldLayoutMkLst>
-        </pc:sldLayoutChg>
-        <pc:sldLayoutChg chg="add del mod replId">
-          <pc:chgData name="Aaron Aguilera" userId="S::aaron.aguilera@parhikuni.mx::f212d21a-67cd-4488-80e3-53ea1560e30f" providerId="AD" clId="Web-{FD1847D1-7EDC-49DD-A1AC-F4FC49AD85C3}" dt="2020-11-27T18:51:42.175" v="1795"/>
-          <pc:sldLayoutMkLst>
-            <pc:docMk/>
-            <pc:sldMasterMk cId="1427719824" sldId="2147483674"/>
-            <pc:sldLayoutMk cId="116870389" sldId="2147483689"/>
-          </pc:sldLayoutMkLst>
-        </pc:sldLayoutChg>
-        <pc:sldLayoutChg chg="add del mod replId">
-          <pc:chgData name="Aaron Aguilera" userId="S::aaron.aguilera@parhikuni.mx::f212d21a-67cd-4488-80e3-53ea1560e30f" providerId="AD" clId="Web-{FD1847D1-7EDC-49DD-A1AC-F4FC49AD85C3}" dt="2020-11-27T18:51:42.175" v="1795"/>
-          <pc:sldLayoutMkLst>
-            <pc:docMk/>
-            <pc:sldMasterMk cId="1427719824" sldId="2147483674"/>
-            <pc:sldLayoutMk cId="2688971338" sldId="2147483690"/>
-          </pc:sldLayoutMkLst>
-        </pc:sldLayoutChg>
-        <pc:sldLayoutChg chg="add del mod replId">
-          <pc:chgData name="Aaron Aguilera" userId="S::aaron.aguilera@parhikuni.mx::f212d21a-67cd-4488-80e3-53ea1560e30f" providerId="AD" clId="Web-{FD1847D1-7EDC-49DD-A1AC-F4FC49AD85C3}" dt="2020-11-27T18:51:42.175" v="1795"/>
-          <pc:sldLayoutMkLst>
-            <pc:docMk/>
-            <pc:sldMasterMk cId="1427719824" sldId="2147483674"/>
-            <pc:sldLayoutMk cId="1721646044" sldId="2147483691"/>
-          </pc:sldLayoutMkLst>
-        </pc:sldLayoutChg>
-      </pc:sldMasterChg>
-      <pc:sldMasterChg chg="add del addSldLayout delSldLayout modSldLayout">
-        <pc:chgData name="Aaron Aguilera" userId="S::aaron.aguilera@parhikuni.mx::f212d21a-67cd-4488-80e3-53ea1560e30f" providerId="AD" clId="Web-{FD1847D1-7EDC-49DD-A1AC-F4FC49AD85C3}" dt="2020-11-27T19:07:19.779" v="1797"/>
-        <pc:sldMasterMkLst>
-          <pc:docMk/>
-          <pc:sldMasterMk cId="1183446189" sldId="2147483692"/>
-        </pc:sldMasterMkLst>
-        <pc:sldLayoutChg chg="add del mod replId">
-          <pc:chgData name="Aaron Aguilera" userId="S::aaron.aguilera@parhikuni.mx::f212d21a-67cd-4488-80e3-53ea1560e30f" providerId="AD" clId="Web-{FD1847D1-7EDC-49DD-A1AC-F4FC49AD85C3}" dt="2020-11-27T19:07:19.779" v="1797"/>
-          <pc:sldLayoutMkLst>
-            <pc:docMk/>
-            <pc:sldMasterMk cId="1183446189" sldId="2147483692"/>
-            <pc:sldLayoutMk cId="2962022884" sldId="2147483693"/>
-          </pc:sldLayoutMkLst>
-        </pc:sldLayoutChg>
-        <pc:sldLayoutChg chg="add del mod replId">
-          <pc:chgData name="Aaron Aguilera" userId="S::aaron.aguilera@parhikuni.mx::f212d21a-67cd-4488-80e3-53ea1560e30f" providerId="AD" clId="Web-{FD1847D1-7EDC-49DD-A1AC-F4FC49AD85C3}" dt="2020-11-27T19:07:19.779" v="1797"/>
-          <pc:sldLayoutMkLst>
-            <pc:docMk/>
-            <pc:sldMasterMk cId="1183446189" sldId="2147483692"/>
-            <pc:sldLayoutMk cId="388122674" sldId="2147483694"/>
-          </pc:sldLayoutMkLst>
-        </pc:sldLayoutChg>
-        <pc:sldLayoutChg chg="add del mod replId">
-          <pc:chgData name="Aaron Aguilera" userId="S::aaron.aguilera@parhikuni.mx::f212d21a-67cd-4488-80e3-53ea1560e30f" providerId="AD" clId="Web-{FD1847D1-7EDC-49DD-A1AC-F4FC49AD85C3}" dt="2020-11-27T19:07:19.779" v="1797"/>
-          <pc:sldLayoutMkLst>
-            <pc:docMk/>
-            <pc:sldMasterMk cId="1183446189" sldId="2147483692"/>
-            <pc:sldLayoutMk cId="2696180261" sldId="2147483695"/>
-          </pc:sldLayoutMkLst>
-        </pc:sldLayoutChg>
-        <pc:sldLayoutChg chg="add del mod replId">
-          <pc:chgData name="Aaron Aguilera" userId="S::aaron.aguilera@parhikuni.mx::f212d21a-67cd-4488-80e3-53ea1560e30f" providerId="AD" clId="Web-{FD1847D1-7EDC-49DD-A1AC-F4FC49AD85C3}" dt="2020-11-27T19:07:19.779" v="1797"/>
-          <pc:sldLayoutMkLst>
-            <pc:docMk/>
-            <pc:sldMasterMk cId="1183446189" sldId="2147483692"/>
-            <pc:sldLayoutMk cId="4102464607" sldId="2147483696"/>
-          </pc:sldLayoutMkLst>
-        </pc:sldLayoutChg>
-        <pc:sldLayoutChg chg="add del mod replId">
-          <pc:chgData name="Aaron Aguilera" userId="S::aaron.aguilera@parhikuni.mx::f212d21a-67cd-4488-80e3-53ea1560e30f" providerId="AD" clId="Web-{FD1847D1-7EDC-49DD-A1AC-F4FC49AD85C3}" dt="2020-11-27T19:07:19.779" v="1797"/>
-          <pc:sldLayoutMkLst>
-            <pc:docMk/>
-            <pc:sldMasterMk cId="1183446189" sldId="2147483692"/>
-            <pc:sldLayoutMk cId="1354541641" sldId="2147483697"/>
-          </pc:sldLayoutMkLst>
-        </pc:sldLayoutChg>
-        <pc:sldLayoutChg chg="add del mod replId">
-          <pc:chgData name="Aaron Aguilera" userId="S::aaron.aguilera@parhikuni.mx::f212d21a-67cd-4488-80e3-53ea1560e30f" providerId="AD" clId="Web-{FD1847D1-7EDC-49DD-A1AC-F4FC49AD85C3}" dt="2020-11-27T19:07:19.779" v="1797"/>
-          <pc:sldLayoutMkLst>
-            <pc:docMk/>
-            <pc:sldMasterMk cId="1183446189" sldId="2147483692"/>
-            <pc:sldLayoutMk cId="1910238481" sldId="2147483698"/>
-          </pc:sldLayoutMkLst>
-        </pc:sldLayoutChg>
-        <pc:sldLayoutChg chg="add del mod replId">
-          <pc:chgData name="Aaron Aguilera" userId="S::aaron.aguilera@parhikuni.mx::f212d21a-67cd-4488-80e3-53ea1560e30f" providerId="AD" clId="Web-{FD1847D1-7EDC-49DD-A1AC-F4FC49AD85C3}" dt="2020-11-27T19:07:19.779" v="1797"/>
-          <pc:sldLayoutMkLst>
-            <pc:docMk/>
-            <pc:sldMasterMk cId="1183446189" sldId="2147483692"/>
-            <pc:sldLayoutMk cId="1190763065" sldId="2147483699"/>
-          </pc:sldLayoutMkLst>
-        </pc:sldLayoutChg>
-        <pc:sldLayoutChg chg="add del mod replId">
-          <pc:chgData name="Aaron Aguilera" userId="S::aaron.aguilera@parhikuni.mx::f212d21a-67cd-4488-80e3-53ea1560e30f" providerId="AD" clId="Web-{FD1847D1-7EDC-49DD-A1AC-F4FC49AD85C3}" dt="2020-11-27T19:07:19.779" v="1797"/>
-          <pc:sldLayoutMkLst>
-            <pc:docMk/>
-            <pc:sldMasterMk cId="1183446189" sldId="2147483692"/>
-            <pc:sldLayoutMk cId="709085517" sldId="2147483700"/>
-          </pc:sldLayoutMkLst>
-        </pc:sldLayoutChg>
-        <pc:sldLayoutChg chg="add del mod replId">
-          <pc:chgData name="Aaron Aguilera" userId="S::aaron.aguilera@parhikuni.mx::f212d21a-67cd-4488-80e3-53ea1560e30f" providerId="AD" clId="Web-{FD1847D1-7EDC-49DD-A1AC-F4FC49AD85C3}" dt="2020-11-27T19:07:19.779" v="1797"/>
-          <pc:sldLayoutMkLst>
-            <pc:docMk/>
-            <pc:sldMasterMk cId="1183446189" sldId="2147483692"/>
-            <pc:sldLayoutMk cId="14883725" sldId="2147483701"/>
-          </pc:sldLayoutMkLst>
-        </pc:sldLayoutChg>
-        <pc:sldLayoutChg chg="add del mod replId">
-          <pc:chgData name="Aaron Aguilera" userId="S::aaron.aguilera@parhikuni.mx::f212d21a-67cd-4488-80e3-53ea1560e30f" providerId="AD" clId="Web-{FD1847D1-7EDC-49DD-A1AC-F4FC49AD85C3}" dt="2020-11-27T19:07:19.779" v="1797"/>
-          <pc:sldLayoutMkLst>
-            <pc:docMk/>
-            <pc:sldMasterMk cId="1183446189" sldId="2147483692"/>
-            <pc:sldLayoutMk cId="4121901938" sldId="2147483702"/>
-          </pc:sldLayoutMkLst>
-        </pc:sldLayoutChg>
-        <pc:sldLayoutChg chg="add del mod replId">
-          <pc:chgData name="Aaron Aguilera" userId="S::aaron.aguilera@parhikuni.mx::f212d21a-67cd-4488-80e3-53ea1560e30f" providerId="AD" clId="Web-{FD1847D1-7EDC-49DD-A1AC-F4FC49AD85C3}" dt="2020-11-27T19:07:19.779" v="1797"/>
-          <pc:sldLayoutMkLst>
-            <pc:docMk/>
-            <pc:sldMasterMk cId="1183446189" sldId="2147483692"/>
-            <pc:sldLayoutMk cId="1063999498" sldId="2147483703"/>
-          </pc:sldLayoutMkLst>
-        </pc:sldLayoutChg>
-        <pc:sldLayoutChg chg="add del mod replId">
-          <pc:chgData name="Aaron Aguilera" userId="S::aaron.aguilera@parhikuni.mx::f212d21a-67cd-4488-80e3-53ea1560e30f" providerId="AD" clId="Web-{FD1847D1-7EDC-49DD-A1AC-F4FC49AD85C3}" dt="2020-11-27T19:07:19.779" v="1797"/>
-          <pc:sldLayoutMkLst>
-            <pc:docMk/>
-            <pc:sldMasterMk cId="1183446189" sldId="2147483692"/>
-            <pc:sldLayoutMk cId="2395047752" sldId="2147483704"/>
-          </pc:sldLayoutMkLst>
-        </pc:sldLayoutChg>
-        <pc:sldLayoutChg chg="add del mod replId">
-          <pc:chgData name="Aaron Aguilera" userId="S::aaron.aguilera@parhikuni.mx::f212d21a-67cd-4488-80e3-53ea1560e30f" providerId="AD" clId="Web-{FD1847D1-7EDC-49DD-A1AC-F4FC49AD85C3}" dt="2020-11-27T19:07:19.779" v="1797"/>
-          <pc:sldLayoutMkLst>
-            <pc:docMk/>
-            <pc:sldMasterMk cId="1183446189" sldId="2147483692"/>
-            <pc:sldLayoutMk cId="1749961770" sldId="2147483705"/>
-          </pc:sldLayoutMkLst>
-        </pc:sldLayoutChg>
-        <pc:sldLayoutChg chg="add del mod replId">
-          <pc:chgData name="Aaron Aguilera" userId="S::aaron.aguilera@parhikuni.mx::f212d21a-67cd-4488-80e3-53ea1560e30f" providerId="AD" clId="Web-{FD1847D1-7EDC-49DD-A1AC-F4FC49AD85C3}" dt="2020-11-27T19:07:19.779" v="1797"/>
-          <pc:sldLayoutMkLst>
-            <pc:docMk/>
-            <pc:sldMasterMk cId="1183446189" sldId="2147483692"/>
-            <pc:sldLayoutMk cId="3000167202" sldId="2147483706"/>
-          </pc:sldLayoutMkLst>
-        </pc:sldLayoutChg>
-        <pc:sldLayoutChg chg="add del mod replId">
-          <pc:chgData name="Aaron Aguilera" userId="S::aaron.aguilera@parhikuni.mx::f212d21a-67cd-4488-80e3-53ea1560e30f" providerId="AD" clId="Web-{FD1847D1-7EDC-49DD-A1AC-F4FC49AD85C3}" dt="2020-11-27T19:07:19.779" v="1797"/>
-          <pc:sldLayoutMkLst>
-            <pc:docMk/>
-            <pc:sldMasterMk cId="1183446189" sldId="2147483692"/>
-            <pc:sldLayoutMk cId="1092538268" sldId="2147483707"/>
-          </pc:sldLayoutMkLst>
-        </pc:sldLayoutChg>
-        <pc:sldLayoutChg chg="add del mod replId">
-          <pc:chgData name="Aaron Aguilera" userId="S::aaron.aguilera@parhikuni.mx::f212d21a-67cd-4488-80e3-53ea1560e30f" providerId="AD" clId="Web-{FD1847D1-7EDC-49DD-A1AC-F4FC49AD85C3}" dt="2020-11-27T19:07:19.779" v="1797"/>
-          <pc:sldLayoutMkLst>
-            <pc:docMk/>
-            <pc:sldMasterMk cId="1183446189" sldId="2147483692"/>
-            <pc:sldLayoutMk cId="595887293" sldId="2147483708"/>
-          </pc:sldLayoutMkLst>
-        </pc:sldLayoutChg>
-        <pc:sldLayoutChg chg="add del mod replId">
-          <pc:chgData name="Aaron Aguilera" userId="S::aaron.aguilera@parhikuni.mx::f212d21a-67cd-4488-80e3-53ea1560e30f" providerId="AD" clId="Web-{FD1847D1-7EDC-49DD-A1AC-F4FC49AD85C3}" dt="2020-11-27T19:07:19.779" v="1797"/>
-          <pc:sldLayoutMkLst>
-            <pc:docMk/>
-            <pc:sldMasterMk cId="1183446189" sldId="2147483692"/>
-            <pc:sldLayoutMk cId="1386073622" sldId="2147483709"/>
-          </pc:sldLayoutMkLst>
-        </pc:sldLayoutChg>
-      </pc:sldMasterChg>
-      <pc:sldMasterChg chg="add del addSldLayout delSldLayout modSldLayout">
-        <pc:chgData name="Aaron Aguilera" userId="S::aaron.aguilera@parhikuni.mx::f212d21a-67cd-4488-80e3-53ea1560e30f" providerId="AD" clId="Web-{FD1847D1-7EDC-49DD-A1AC-F4FC49AD85C3}" dt="2020-11-27T19:07:26.592" v="1798"/>
-        <pc:sldMasterMkLst>
-          <pc:docMk/>
-          <pc:sldMasterMk cId="3435986493" sldId="2147483710"/>
-        </pc:sldMasterMkLst>
-        <pc:sldLayoutChg chg="add del mod replId">
-          <pc:chgData name="Aaron Aguilera" userId="S::aaron.aguilera@parhikuni.mx::f212d21a-67cd-4488-80e3-53ea1560e30f" providerId="AD" clId="Web-{FD1847D1-7EDC-49DD-A1AC-F4FC49AD85C3}" dt="2020-11-27T19:07:26.592" v="1798"/>
-          <pc:sldLayoutMkLst>
-            <pc:docMk/>
-            <pc:sldMasterMk cId="3435986493" sldId="2147483710"/>
-            <pc:sldLayoutMk cId="2554831323" sldId="2147483711"/>
-          </pc:sldLayoutMkLst>
-        </pc:sldLayoutChg>
-        <pc:sldLayoutChg chg="add del mod replId">
-          <pc:chgData name="Aaron Aguilera" userId="S::aaron.aguilera@parhikuni.mx::f212d21a-67cd-4488-80e3-53ea1560e30f" providerId="AD" clId="Web-{FD1847D1-7EDC-49DD-A1AC-F4FC49AD85C3}" dt="2020-11-27T19:07:26.592" v="1798"/>
-          <pc:sldLayoutMkLst>
-            <pc:docMk/>
-            <pc:sldMasterMk cId="3435986493" sldId="2147483710"/>
-            <pc:sldLayoutMk cId="713685299" sldId="2147483712"/>
-          </pc:sldLayoutMkLst>
-        </pc:sldLayoutChg>
-        <pc:sldLayoutChg chg="add del mod replId">
-          <pc:chgData name="Aaron Aguilera" userId="S::aaron.aguilera@parhikuni.mx::f212d21a-67cd-4488-80e3-53ea1560e30f" providerId="AD" clId="Web-{FD1847D1-7EDC-49DD-A1AC-F4FC49AD85C3}" dt="2020-11-27T19:07:26.592" v="1798"/>
-          <pc:sldLayoutMkLst>
-            <pc:docMk/>
-            <pc:sldMasterMk cId="3435986493" sldId="2147483710"/>
-            <pc:sldLayoutMk cId="1611165573" sldId="2147483713"/>
-          </pc:sldLayoutMkLst>
-        </pc:sldLayoutChg>
-        <pc:sldLayoutChg chg="add del mod replId">
-          <pc:chgData name="Aaron Aguilera" userId="S::aaron.aguilera@parhikuni.mx::f212d21a-67cd-4488-80e3-53ea1560e30f" providerId="AD" clId="Web-{FD1847D1-7EDC-49DD-A1AC-F4FC49AD85C3}" dt="2020-11-27T19:07:26.592" v="1798"/>
-          <pc:sldLayoutMkLst>
-            <pc:docMk/>
-            <pc:sldMasterMk cId="3435986493" sldId="2147483710"/>
-            <pc:sldLayoutMk cId="3553666300" sldId="2147483714"/>
-          </pc:sldLayoutMkLst>
-        </pc:sldLayoutChg>
-        <pc:sldLayoutChg chg="add del mod replId">
-          <pc:chgData name="Aaron Aguilera" userId="S::aaron.aguilera@parhikuni.mx::f212d21a-67cd-4488-80e3-53ea1560e30f" providerId="AD" clId="Web-{FD1847D1-7EDC-49DD-A1AC-F4FC49AD85C3}" dt="2020-11-27T19:07:26.592" v="1798"/>
-          <pc:sldLayoutMkLst>
-            <pc:docMk/>
-            <pc:sldMasterMk cId="3435986493" sldId="2147483710"/>
-            <pc:sldLayoutMk cId="2137388431" sldId="2147483715"/>
-          </pc:sldLayoutMkLst>
-        </pc:sldLayoutChg>
-        <pc:sldLayoutChg chg="add del mod replId">
-          <pc:chgData name="Aaron Aguilera" userId="S::aaron.aguilera@parhikuni.mx::f212d21a-67cd-4488-80e3-53ea1560e30f" providerId="AD" clId="Web-{FD1847D1-7EDC-49DD-A1AC-F4FC49AD85C3}" dt="2020-11-27T19:07:26.592" v="1798"/>
-          <pc:sldLayoutMkLst>
-            <pc:docMk/>
-            <pc:sldMasterMk cId="3435986493" sldId="2147483710"/>
-            <pc:sldLayoutMk cId="2886552944" sldId="2147483716"/>
-          </pc:sldLayoutMkLst>
-        </pc:sldLayoutChg>
-        <pc:sldLayoutChg chg="add del mod replId">
-          <pc:chgData name="Aaron Aguilera" userId="S::aaron.aguilera@parhikuni.mx::f212d21a-67cd-4488-80e3-53ea1560e30f" providerId="AD" clId="Web-{FD1847D1-7EDC-49DD-A1AC-F4FC49AD85C3}" dt="2020-11-27T19:07:26.592" v="1798"/>
-          <pc:sldLayoutMkLst>
-            <pc:docMk/>
-            <pc:sldMasterMk cId="3435986493" sldId="2147483710"/>
-            <pc:sldLayoutMk cId="3979211925" sldId="2147483717"/>
-          </pc:sldLayoutMkLst>
-        </pc:sldLayoutChg>
-        <pc:sldLayoutChg chg="add del mod replId">
-          <pc:chgData name="Aaron Aguilera" userId="S::aaron.aguilera@parhikuni.mx::f212d21a-67cd-4488-80e3-53ea1560e30f" providerId="AD" clId="Web-{FD1847D1-7EDC-49DD-A1AC-F4FC49AD85C3}" dt="2020-11-27T19:07:26.592" v="1798"/>
-          <pc:sldLayoutMkLst>
-            <pc:docMk/>
-            <pc:sldMasterMk cId="3435986493" sldId="2147483710"/>
-            <pc:sldLayoutMk cId="3146165233" sldId="2147483718"/>
-          </pc:sldLayoutMkLst>
-        </pc:sldLayoutChg>
-        <pc:sldLayoutChg chg="add del mod replId">
-          <pc:chgData name="Aaron Aguilera" userId="S::aaron.aguilera@parhikuni.mx::f212d21a-67cd-4488-80e3-53ea1560e30f" providerId="AD" clId="Web-{FD1847D1-7EDC-49DD-A1AC-F4FC49AD85C3}" dt="2020-11-27T19:07:26.592" v="1798"/>
-          <pc:sldLayoutMkLst>
-            <pc:docMk/>
-            <pc:sldMasterMk cId="3435986493" sldId="2147483710"/>
-            <pc:sldLayoutMk cId="1235637135" sldId="2147483719"/>
-          </pc:sldLayoutMkLst>
-        </pc:sldLayoutChg>
-        <pc:sldLayoutChg chg="add del mod replId">
-          <pc:chgData name="Aaron Aguilera" userId="S::aaron.aguilera@parhikuni.mx::f212d21a-67cd-4488-80e3-53ea1560e30f" providerId="AD" clId="Web-{FD1847D1-7EDC-49DD-A1AC-F4FC49AD85C3}" dt="2020-11-27T19:07:26.592" v="1798"/>
-          <pc:sldLayoutMkLst>
-            <pc:docMk/>
-            <pc:sldMasterMk cId="3435986493" sldId="2147483710"/>
-            <pc:sldLayoutMk cId="2908763621" sldId="2147483720"/>
-          </pc:sldLayoutMkLst>
-        </pc:sldLayoutChg>
-        <pc:sldLayoutChg chg="add del mod replId">
-          <pc:chgData name="Aaron Aguilera" userId="S::aaron.aguilera@parhikuni.mx::f212d21a-67cd-4488-80e3-53ea1560e30f" providerId="AD" clId="Web-{FD1847D1-7EDC-49DD-A1AC-F4FC49AD85C3}" dt="2020-11-27T19:07:26.592" v="1798"/>
-          <pc:sldLayoutMkLst>
-            <pc:docMk/>
-            <pc:sldMasterMk cId="3435986493" sldId="2147483710"/>
-            <pc:sldLayoutMk cId="2622391217" sldId="2147483721"/>
-          </pc:sldLayoutMkLst>
-        </pc:sldLayoutChg>
-        <pc:sldLayoutChg chg="add del mod replId">
-          <pc:chgData name="Aaron Aguilera" userId="S::aaron.aguilera@parhikuni.mx::f212d21a-67cd-4488-80e3-53ea1560e30f" providerId="AD" clId="Web-{FD1847D1-7EDC-49DD-A1AC-F4FC49AD85C3}" dt="2020-11-27T19:07:26.592" v="1798"/>
-          <pc:sldLayoutMkLst>
-            <pc:docMk/>
-            <pc:sldMasterMk cId="3435986493" sldId="2147483710"/>
-            <pc:sldLayoutMk cId="2563586332" sldId="2147483722"/>
-          </pc:sldLayoutMkLst>
-        </pc:sldLayoutChg>
-        <pc:sldLayoutChg chg="add del mod replId">
-          <pc:chgData name="Aaron Aguilera" userId="S::aaron.aguilera@parhikuni.mx::f212d21a-67cd-4488-80e3-53ea1560e30f" providerId="AD" clId="Web-{FD1847D1-7EDC-49DD-A1AC-F4FC49AD85C3}" dt="2020-11-27T19:07:26.592" v="1798"/>
-          <pc:sldLayoutMkLst>
-            <pc:docMk/>
-            <pc:sldMasterMk cId="3435986493" sldId="2147483710"/>
-            <pc:sldLayoutMk cId="748594026" sldId="2147483723"/>
-          </pc:sldLayoutMkLst>
-        </pc:sldLayoutChg>
-        <pc:sldLayoutChg chg="add del mod replId">
-          <pc:chgData name="Aaron Aguilera" userId="S::aaron.aguilera@parhikuni.mx::f212d21a-67cd-4488-80e3-53ea1560e30f" providerId="AD" clId="Web-{FD1847D1-7EDC-49DD-A1AC-F4FC49AD85C3}" dt="2020-11-27T19:07:26.592" v="1798"/>
-          <pc:sldLayoutMkLst>
-            <pc:docMk/>
-            <pc:sldMasterMk cId="3435986493" sldId="2147483710"/>
-            <pc:sldLayoutMk cId="1040052672" sldId="2147483724"/>
-          </pc:sldLayoutMkLst>
-        </pc:sldLayoutChg>
-        <pc:sldLayoutChg chg="add del mod replId">
-          <pc:chgData name="Aaron Aguilera" userId="S::aaron.aguilera@parhikuni.mx::f212d21a-67cd-4488-80e3-53ea1560e30f" providerId="AD" clId="Web-{FD1847D1-7EDC-49DD-A1AC-F4FC49AD85C3}" dt="2020-11-27T19:07:26.592" v="1798"/>
-          <pc:sldLayoutMkLst>
-            <pc:docMk/>
-            <pc:sldMasterMk cId="3435986493" sldId="2147483710"/>
-            <pc:sldLayoutMk cId="3156156428" sldId="2147483725"/>
-          </pc:sldLayoutMkLst>
-        </pc:sldLayoutChg>
-        <pc:sldLayoutChg chg="add del mod replId">
-          <pc:chgData name="Aaron Aguilera" userId="S::aaron.aguilera@parhikuni.mx::f212d21a-67cd-4488-80e3-53ea1560e30f" providerId="AD" clId="Web-{FD1847D1-7EDC-49DD-A1AC-F4FC49AD85C3}" dt="2020-11-27T19:07:26.592" v="1798"/>
-          <pc:sldLayoutMkLst>
-            <pc:docMk/>
-            <pc:sldMasterMk cId="3435986493" sldId="2147483710"/>
-            <pc:sldLayoutMk cId="3356784572" sldId="2147483726"/>
-          </pc:sldLayoutMkLst>
-        </pc:sldLayoutChg>
-        <pc:sldLayoutChg chg="add del mod replId">
-          <pc:chgData name="Aaron Aguilera" userId="S::aaron.aguilera@parhikuni.mx::f212d21a-67cd-4488-80e3-53ea1560e30f" providerId="AD" clId="Web-{FD1847D1-7EDC-49DD-A1AC-F4FC49AD85C3}" dt="2020-11-27T19:07:26.592" v="1798"/>
-          <pc:sldLayoutMkLst>
-            <pc:docMk/>
-            <pc:sldMasterMk cId="3435986493" sldId="2147483710"/>
-            <pc:sldLayoutMk cId="3269495089" sldId="2147483727"/>
-          </pc:sldLayoutMkLst>
-        </pc:sldLayoutChg>
-      </pc:sldMasterChg>
-      <pc:sldMasterChg chg="add addSldLayout modSldLayout">
-        <pc:chgData name="Aaron Aguilera" userId="S::aaron.aguilera@parhikuni.mx::f212d21a-67cd-4488-80e3-53ea1560e30f" providerId="AD" clId="Web-{FD1847D1-7EDC-49DD-A1AC-F4FC49AD85C3}" dt="2020-11-27T19:07:26.592" v="1798"/>
-        <pc:sldMasterMkLst>
-          <pc:docMk/>
-          <pc:sldMasterMk cId="2637347305" sldId="2147483728"/>
-        </pc:sldMasterMkLst>
-        <pc:sldLayoutChg chg="add mod replId">
-          <pc:chgData name="Aaron Aguilera" userId="S::aaron.aguilera@parhikuni.mx::f212d21a-67cd-4488-80e3-53ea1560e30f" providerId="AD" clId="Web-{FD1847D1-7EDC-49DD-A1AC-F4FC49AD85C3}" dt="2020-11-27T19:07:26.592" v="1798"/>
-          <pc:sldLayoutMkLst>
-            <pc:docMk/>
-            <pc:sldMasterMk cId="2637347305" sldId="2147483728"/>
-            <pc:sldLayoutMk cId="2917642037" sldId="2147483729"/>
-          </pc:sldLayoutMkLst>
-        </pc:sldLayoutChg>
-        <pc:sldLayoutChg chg="add mod replId">
-          <pc:chgData name="Aaron Aguilera" userId="S::aaron.aguilera@parhikuni.mx::f212d21a-67cd-4488-80e3-53ea1560e30f" providerId="AD" clId="Web-{FD1847D1-7EDC-49DD-A1AC-F4FC49AD85C3}" dt="2020-11-27T19:07:26.592" v="1798"/>
-          <pc:sldLayoutMkLst>
-            <pc:docMk/>
-            <pc:sldMasterMk cId="2637347305" sldId="2147483728"/>
-            <pc:sldLayoutMk cId="1769237584" sldId="2147483730"/>
-          </pc:sldLayoutMkLst>
-        </pc:sldLayoutChg>
-        <pc:sldLayoutChg chg="add mod replId">
-          <pc:chgData name="Aaron Aguilera" userId="S::aaron.aguilera@parhikuni.mx::f212d21a-67cd-4488-80e3-53ea1560e30f" providerId="AD" clId="Web-{FD1847D1-7EDC-49DD-A1AC-F4FC49AD85C3}" dt="2020-11-27T19:07:26.592" v="1798"/>
-          <pc:sldLayoutMkLst>
-            <pc:docMk/>
-            <pc:sldMasterMk cId="2637347305" sldId="2147483728"/>
-            <pc:sldLayoutMk cId="3967885434" sldId="2147483731"/>
-          </pc:sldLayoutMkLst>
-        </pc:sldLayoutChg>
-        <pc:sldLayoutChg chg="add mod replId">
-          <pc:chgData name="Aaron Aguilera" userId="S::aaron.aguilera@parhikuni.mx::f212d21a-67cd-4488-80e3-53ea1560e30f" providerId="AD" clId="Web-{FD1847D1-7EDC-49DD-A1AC-F4FC49AD85C3}" dt="2020-11-27T19:07:26.592" v="1798"/>
-          <pc:sldLayoutMkLst>
-            <pc:docMk/>
-            <pc:sldMasterMk cId="2637347305" sldId="2147483728"/>
-            <pc:sldLayoutMk cId="1023526086" sldId="2147483732"/>
-          </pc:sldLayoutMkLst>
-        </pc:sldLayoutChg>
-        <pc:sldLayoutChg chg="add mod replId">
-          <pc:chgData name="Aaron Aguilera" userId="S::aaron.aguilera@parhikuni.mx::f212d21a-67cd-4488-80e3-53ea1560e30f" providerId="AD" clId="Web-{FD1847D1-7EDC-49DD-A1AC-F4FC49AD85C3}" dt="2020-11-27T19:07:26.592" v="1798"/>
-          <pc:sldLayoutMkLst>
-            <pc:docMk/>
-            <pc:sldMasterMk cId="2637347305" sldId="2147483728"/>
-            <pc:sldLayoutMk cId="1608711262" sldId="2147483733"/>
-          </pc:sldLayoutMkLst>
-        </pc:sldLayoutChg>
-        <pc:sldLayoutChg chg="add mod replId">
-          <pc:chgData name="Aaron Aguilera" userId="S::aaron.aguilera@parhikuni.mx::f212d21a-67cd-4488-80e3-53ea1560e30f" providerId="AD" clId="Web-{FD1847D1-7EDC-49DD-A1AC-F4FC49AD85C3}" dt="2020-11-27T19:07:26.592" v="1798"/>
-          <pc:sldLayoutMkLst>
-            <pc:docMk/>
-            <pc:sldMasterMk cId="2637347305" sldId="2147483728"/>
-            <pc:sldLayoutMk cId="327605847" sldId="2147483734"/>
-          </pc:sldLayoutMkLst>
-        </pc:sldLayoutChg>
-        <pc:sldLayoutChg chg="add mod replId">
-          <pc:chgData name="Aaron Aguilera" userId="S::aaron.aguilera@parhikuni.mx::f212d21a-67cd-4488-80e3-53ea1560e30f" providerId="AD" clId="Web-{FD1847D1-7EDC-49DD-A1AC-F4FC49AD85C3}" dt="2020-11-27T19:07:26.592" v="1798"/>
-          <pc:sldLayoutMkLst>
-            <pc:docMk/>
-            <pc:sldMasterMk cId="2637347305" sldId="2147483728"/>
-            <pc:sldLayoutMk cId="1340810071" sldId="2147483735"/>
-          </pc:sldLayoutMkLst>
-        </pc:sldLayoutChg>
-        <pc:sldLayoutChg chg="add mod replId">
-          <pc:chgData name="Aaron Aguilera" userId="S::aaron.aguilera@parhikuni.mx::f212d21a-67cd-4488-80e3-53ea1560e30f" providerId="AD" clId="Web-{FD1847D1-7EDC-49DD-A1AC-F4FC49AD85C3}" dt="2020-11-27T19:07:26.592" v="1798"/>
-          <pc:sldLayoutMkLst>
-            <pc:docMk/>
-            <pc:sldMasterMk cId="2637347305" sldId="2147483728"/>
-            <pc:sldLayoutMk cId="1454383100" sldId="2147483736"/>
-          </pc:sldLayoutMkLst>
-        </pc:sldLayoutChg>
-        <pc:sldLayoutChg chg="add mod replId">
-          <pc:chgData name="Aaron Aguilera" userId="S::aaron.aguilera@parhikuni.mx::f212d21a-67cd-4488-80e3-53ea1560e30f" providerId="AD" clId="Web-{FD1847D1-7EDC-49DD-A1AC-F4FC49AD85C3}" dt="2020-11-27T19:07:26.592" v="1798"/>
-          <pc:sldLayoutMkLst>
-            <pc:docMk/>
-            <pc:sldMasterMk cId="2637347305" sldId="2147483728"/>
-            <pc:sldLayoutMk cId="658385471" sldId="2147483737"/>
-          </pc:sldLayoutMkLst>
-        </pc:sldLayoutChg>
-        <pc:sldLayoutChg chg="add mod replId">
-          <pc:chgData name="Aaron Aguilera" userId="S::aaron.aguilera@parhikuni.mx::f212d21a-67cd-4488-80e3-53ea1560e30f" providerId="AD" clId="Web-{FD1847D1-7EDC-49DD-A1AC-F4FC49AD85C3}" dt="2020-11-27T19:07:26.592" v="1798"/>
-          <pc:sldLayoutMkLst>
-            <pc:docMk/>
-            <pc:sldMasterMk cId="2637347305" sldId="2147483728"/>
-            <pc:sldLayoutMk cId="1121134648" sldId="2147483738"/>
-          </pc:sldLayoutMkLst>
-        </pc:sldLayoutChg>
-        <pc:sldLayoutChg chg="add mod replId">
-          <pc:chgData name="Aaron Aguilera" userId="S::aaron.aguilera@parhikuni.mx::f212d21a-67cd-4488-80e3-53ea1560e30f" providerId="AD" clId="Web-{FD1847D1-7EDC-49DD-A1AC-F4FC49AD85C3}" dt="2020-11-27T19:07:26.592" v="1798"/>
-          <pc:sldLayoutMkLst>
-            <pc:docMk/>
-            <pc:sldMasterMk cId="2637347305" sldId="2147483728"/>
-            <pc:sldLayoutMk cId="3816484277" sldId="2147483739"/>
-          </pc:sldLayoutMkLst>
-        </pc:sldLayoutChg>
-        <pc:sldLayoutChg chg="add mod replId">
-          <pc:chgData name="Aaron Aguilera" userId="S::aaron.aguilera@parhikuni.mx::f212d21a-67cd-4488-80e3-53ea1560e30f" providerId="AD" clId="Web-{FD1847D1-7EDC-49DD-A1AC-F4FC49AD85C3}" dt="2020-11-27T19:07:26.592" v="1798"/>
-          <pc:sldLayoutMkLst>
-            <pc:docMk/>
-            <pc:sldMasterMk cId="2637347305" sldId="2147483728"/>
-            <pc:sldLayoutMk cId="240428917" sldId="2147483740"/>
-          </pc:sldLayoutMkLst>
-        </pc:sldLayoutChg>
-        <pc:sldLayoutChg chg="add mod replId">
-          <pc:chgData name="Aaron Aguilera" userId="S::aaron.aguilera@parhikuni.mx::f212d21a-67cd-4488-80e3-53ea1560e30f" providerId="AD" clId="Web-{FD1847D1-7EDC-49DD-A1AC-F4FC49AD85C3}" dt="2020-11-27T19:07:26.592" v="1798"/>
-          <pc:sldLayoutMkLst>
-            <pc:docMk/>
-            <pc:sldMasterMk cId="2637347305" sldId="2147483728"/>
-            <pc:sldLayoutMk cId="3384126117" sldId="2147483741"/>
-          </pc:sldLayoutMkLst>
-        </pc:sldLayoutChg>
-        <pc:sldLayoutChg chg="add mod replId">
-          <pc:chgData name="Aaron Aguilera" userId="S::aaron.aguilera@parhikuni.mx::f212d21a-67cd-4488-80e3-53ea1560e30f" providerId="AD" clId="Web-{FD1847D1-7EDC-49DD-A1AC-F4FC49AD85C3}" dt="2020-11-27T19:07:26.592" v="1798"/>
-          <pc:sldLayoutMkLst>
-            <pc:docMk/>
-            <pc:sldMasterMk cId="2637347305" sldId="2147483728"/>
-            <pc:sldLayoutMk cId="3350325124" sldId="2147483742"/>
-          </pc:sldLayoutMkLst>
-        </pc:sldLayoutChg>
-        <pc:sldLayoutChg chg="add mod replId">
-          <pc:chgData name="Aaron Aguilera" userId="S::aaron.aguilera@parhikuni.mx::f212d21a-67cd-4488-80e3-53ea1560e30f" providerId="AD" clId="Web-{FD1847D1-7EDC-49DD-A1AC-F4FC49AD85C3}" dt="2020-11-27T19:07:26.592" v="1798"/>
-          <pc:sldLayoutMkLst>
-            <pc:docMk/>
-            <pc:sldMasterMk cId="2637347305" sldId="2147483728"/>
-            <pc:sldLayoutMk cId="3687683171" sldId="2147483743"/>
-          </pc:sldLayoutMkLst>
-        </pc:sldLayoutChg>
-        <pc:sldLayoutChg chg="add mod replId">
-          <pc:chgData name="Aaron Aguilera" userId="S::aaron.aguilera@parhikuni.mx::f212d21a-67cd-4488-80e3-53ea1560e30f" providerId="AD" clId="Web-{FD1847D1-7EDC-49DD-A1AC-F4FC49AD85C3}" dt="2020-11-27T19:07:26.592" v="1798"/>
-          <pc:sldLayoutMkLst>
-            <pc:docMk/>
-            <pc:sldMasterMk cId="2637347305" sldId="2147483728"/>
-            <pc:sldLayoutMk cId="3986679929" sldId="2147483744"/>
-          </pc:sldLayoutMkLst>
-        </pc:sldLayoutChg>
-        <pc:sldLayoutChg chg="add mod replId">
-          <pc:chgData name="Aaron Aguilera" userId="S::aaron.aguilera@parhikuni.mx::f212d21a-67cd-4488-80e3-53ea1560e30f" providerId="AD" clId="Web-{FD1847D1-7EDC-49DD-A1AC-F4FC49AD85C3}" dt="2020-11-27T19:07:26.592" v="1798"/>
-          <pc:sldLayoutMkLst>
-            <pc:docMk/>
-            <pc:sldMasterMk cId="2637347305" sldId="2147483728"/>
-            <pc:sldLayoutMk cId="794537115" sldId="2147483745"/>
-          </pc:sldLayoutMkLst>
-        </pc:sldLayoutChg>
-      </pc:sldMasterChg>
-    </pc:docChg>
-  </pc:docChgLst>
-  <pc:docChgLst>
-    <pc:chgData name="Aaron Aguilera" userId="S::aaron.aguilera@parhikuni.mx::f212d21a-67cd-4488-80e3-53ea1560e30f" providerId="AD" clId="Web-{1E9EF759-D016-28FF-D7A5-BA911CFC74DF}"/>
-    <pc:docChg chg="addSld modSld sldOrd">
-      <pc:chgData name="Aaron Aguilera" userId="S::aaron.aguilera@parhikuni.mx::f212d21a-67cd-4488-80e3-53ea1560e30f" providerId="AD" clId="Web-{1E9EF759-D016-28FF-D7A5-BA911CFC74DF}" dt="2020-11-27T22:11:57.394" v="3166" actId="20577"/>
-      <pc:docMkLst>
-        <pc:docMk/>
-      </pc:docMkLst>
-      <pc:sldChg chg="modSp">
-        <pc:chgData name="Aaron Aguilera" userId="S::aaron.aguilera@parhikuni.mx::f212d21a-67cd-4488-80e3-53ea1560e30f" providerId="AD" clId="Web-{1E9EF759-D016-28FF-D7A5-BA911CFC74DF}" dt="2020-11-27T21:25:37.774" v="183" actId="20577"/>
-        <pc:sldMkLst>
-          <pc:docMk/>
-          <pc:sldMk cId="3441195643" sldId="257"/>
-        </pc:sldMkLst>
-        <pc:spChg chg="mod">
-          <ac:chgData name="Aaron Aguilera" userId="S::aaron.aguilera@parhikuni.mx::f212d21a-67cd-4488-80e3-53ea1560e30f" providerId="AD" clId="Web-{1E9EF759-D016-28FF-D7A5-BA911CFC74DF}" dt="2020-11-27T21:25:37.774" v="183" actId="20577"/>
-          <ac:spMkLst>
-            <pc:docMk/>
-            <pc:sldMk cId="3441195643" sldId="257"/>
-            <ac:spMk id="3" creationId="{DB50855E-B059-4F66-B5FD-E366D44CD63F}"/>
-          </ac:spMkLst>
-        </pc:spChg>
-      </pc:sldChg>
-      <pc:sldChg chg="modSp">
-        <pc:chgData name="Aaron Aguilera" userId="S::aaron.aguilera@parhikuni.mx::f212d21a-67cd-4488-80e3-53ea1560e30f" providerId="AD" clId="Web-{1E9EF759-D016-28FF-D7A5-BA911CFC74DF}" dt="2020-11-27T21:26:30.994" v="189" actId="20577"/>
-        <pc:sldMkLst>
-          <pc:docMk/>
-          <pc:sldMk cId="1320597448" sldId="258"/>
-        </pc:sldMkLst>
-        <pc:spChg chg="mod">
-          <ac:chgData name="Aaron Aguilera" userId="S::aaron.aguilera@parhikuni.mx::f212d21a-67cd-4488-80e3-53ea1560e30f" providerId="AD" clId="Web-{1E9EF759-D016-28FF-D7A5-BA911CFC74DF}" dt="2020-11-27T21:26:30.994" v="189" actId="20577"/>
-          <ac:spMkLst>
-            <pc:docMk/>
-            <pc:sldMk cId="1320597448" sldId="258"/>
-            <ac:spMk id="3" creationId="{E8D393E4-8CC7-46A9-9296-2C838278ADAC}"/>
-          </ac:spMkLst>
-        </pc:spChg>
-      </pc:sldChg>
-      <pc:sldChg chg="modSp">
-        <pc:chgData name="Aaron Aguilera" userId="S::aaron.aguilera@parhikuni.mx::f212d21a-67cd-4488-80e3-53ea1560e30f" providerId="AD" clId="Web-{1E9EF759-D016-28FF-D7A5-BA911CFC74DF}" dt="2020-11-27T21:38:17.559" v="729" actId="20577"/>
-        <pc:sldMkLst>
-          <pc:docMk/>
-          <pc:sldMk cId="2526847329" sldId="259"/>
-        </pc:sldMkLst>
-        <pc:spChg chg="mod">
-          <ac:chgData name="Aaron Aguilera" userId="S::aaron.aguilera@parhikuni.mx::f212d21a-67cd-4488-80e3-53ea1560e30f" providerId="AD" clId="Web-{1E9EF759-D016-28FF-D7A5-BA911CFC74DF}" dt="2020-11-27T21:38:17.559" v="729" actId="20577"/>
-          <ac:spMkLst>
-            <pc:docMk/>
-            <pc:sldMk cId="2526847329" sldId="259"/>
-            <ac:spMk id="3" creationId="{51906DBC-0CFA-44C8-B8D1-933F5C0650D1}"/>
-          </ac:spMkLst>
-        </pc:spChg>
-      </pc:sldChg>
-      <pc:sldChg chg="modSp ord">
-        <pc:chgData name="Aaron Aguilera" userId="S::aaron.aguilera@parhikuni.mx::f212d21a-67cd-4488-80e3-53ea1560e30f" providerId="AD" clId="Web-{1E9EF759-D016-28FF-D7A5-BA911CFC74DF}" dt="2020-11-27T22:02:12.144" v="2664" actId="20577"/>
-        <pc:sldMkLst>
-          <pc:docMk/>
-          <pc:sldMk cId="3548563040" sldId="260"/>
-        </pc:sldMkLst>
-        <pc:spChg chg="mod">
-          <ac:chgData name="Aaron Aguilera" userId="S::aaron.aguilera@parhikuni.mx::f212d21a-67cd-4488-80e3-53ea1560e30f" providerId="AD" clId="Web-{1E9EF759-D016-28FF-D7A5-BA911CFC74DF}" dt="2020-11-27T21:53:35.083" v="1727" actId="20577"/>
-          <ac:spMkLst>
-            <pc:docMk/>
-            <pc:sldMk cId="3548563040" sldId="260"/>
-            <ac:spMk id="2" creationId="{785E63F7-9FD8-4911-97B7-8127A22E2FCB}"/>
-          </ac:spMkLst>
-        </pc:spChg>
-        <pc:spChg chg="mod">
-          <ac:chgData name="Aaron Aguilera" userId="S::aaron.aguilera@parhikuni.mx::f212d21a-67cd-4488-80e3-53ea1560e30f" providerId="AD" clId="Web-{1E9EF759-D016-28FF-D7A5-BA911CFC74DF}" dt="2020-11-27T22:02:12.144" v="2664" actId="20577"/>
-          <ac:spMkLst>
-            <pc:docMk/>
-            <pc:sldMk cId="3548563040" sldId="260"/>
-            <ac:spMk id="3" creationId="{EF23D928-0060-4D3D-A304-6C5BF0CB7B6B}"/>
-          </ac:spMkLst>
-        </pc:spChg>
-      </pc:sldChg>
-      <pc:sldChg chg="modSp">
-        <pc:chgData name="Aaron Aguilera" userId="S::aaron.aguilera@parhikuni.mx::f212d21a-67cd-4488-80e3-53ea1560e30f" providerId="AD" clId="Web-{1E9EF759-D016-28FF-D7A5-BA911CFC74DF}" dt="2020-11-27T22:04:49.804" v="2798" actId="20577"/>
-        <pc:sldMkLst>
-          <pc:docMk/>
-          <pc:sldMk cId="3471136250" sldId="261"/>
-        </pc:sldMkLst>
-        <pc:spChg chg="mod">
-          <ac:chgData name="Aaron Aguilera" userId="S::aaron.aguilera@parhikuni.mx::f212d21a-67cd-4488-80e3-53ea1560e30f" providerId="AD" clId="Web-{1E9EF759-D016-28FF-D7A5-BA911CFC74DF}" dt="2020-11-27T21:56:58.495" v="1739" actId="20577"/>
-          <ac:spMkLst>
-            <pc:docMk/>
-            <pc:sldMk cId="3471136250" sldId="261"/>
-            <ac:spMk id="2" creationId="{F94C6B46-63AB-49CF-A525-B5920537714C}"/>
-          </ac:spMkLst>
-        </pc:spChg>
-        <pc:spChg chg="mod">
-          <ac:chgData name="Aaron Aguilera" userId="S::aaron.aguilera@parhikuni.mx::f212d21a-67cd-4488-80e3-53ea1560e30f" providerId="AD" clId="Web-{1E9EF759-D016-28FF-D7A5-BA911CFC74DF}" dt="2020-11-27T22:04:49.804" v="2798" actId="20577"/>
-          <ac:spMkLst>
-            <pc:docMk/>
-            <pc:sldMk cId="3471136250" sldId="261"/>
-            <ac:spMk id="3" creationId="{C145D010-3502-44AC-BEAC-703DA6DD488D}"/>
-          </ac:spMkLst>
-        </pc:spChg>
-      </pc:sldChg>
-      <pc:sldChg chg="modSp new">
-        <pc:chgData name="Aaron Aguilera" userId="S::aaron.aguilera@parhikuni.mx::f212d21a-67cd-4488-80e3-53ea1560e30f" providerId="AD" clId="Web-{1E9EF759-D016-28FF-D7A5-BA911CFC74DF}" dt="2020-11-27T22:05:47.931" v="2816" actId="20577"/>
-        <pc:sldMkLst>
-          <pc:docMk/>
-          <pc:sldMk cId="2328844233" sldId="263"/>
-        </pc:sldMkLst>
-        <pc:spChg chg="mod">
-          <ac:chgData name="Aaron Aguilera" userId="S::aaron.aguilera@parhikuni.mx::f212d21a-67cd-4488-80e3-53ea1560e30f" providerId="AD" clId="Web-{1E9EF759-D016-28FF-D7A5-BA911CFC74DF}" dt="2020-11-27T22:05:47.931" v="2816" actId="20577"/>
-          <ac:spMkLst>
-            <pc:docMk/>
-            <pc:sldMk cId="2328844233" sldId="263"/>
-            <ac:spMk id="2" creationId="{6699CD62-6C7A-4F5B-9E0C-1F20C86B5DE7}"/>
-          </ac:spMkLst>
-        </pc:spChg>
-        <pc:spChg chg="mod">
-          <ac:chgData name="Aaron Aguilera" userId="S::aaron.aguilera@parhikuni.mx::f212d21a-67cd-4488-80e3-53ea1560e30f" providerId="AD" clId="Web-{1E9EF759-D016-28FF-D7A5-BA911CFC74DF}" dt="2020-11-27T21:43:46.130" v="1010" actId="20577"/>
-          <ac:spMkLst>
-            <pc:docMk/>
-            <pc:sldMk cId="2328844233" sldId="263"/>
-            <ac:spMk id="3" creationId="{20AB9BF8-3D3D-457A-AD77-FEC84A5910C6}"/>
-          </ac:spMkLst>
-        </pc:spChg>
-      </pc:sldChg>
-      <pc:sldChg chg="modSp new">
-        <pc:chgData name="Aaron Aguilera" userId="S::aaron.aguilera@parhikuni.mx::f212d21a-67cd-4488-80e3-53ea1560e30f" providerId="AD" clId="Web-{1E9EF759-D016-28FF-D7A5-BA911CFC74DF}" dt="2020-11-27T22:08:39.982" v="3061" actId="20577"/>
-        <pc:sldMkLst>
-          <pc:docMk/>
-          <pc:sldMk cId="3605043281" sldId="264"/>
-        </pc:sldMkLst>
-        <pc:spChg chg="mod">
-          <ac:chgData name="Aaron Aguilera" userId="S::aaron.aguilera@parhikuni.mx::f212d21a-67cd-4488-80e3-53ea1560e30f" providerId="AD" clId="Web-{1E9EF759-D016-28FF-D7A5-BA911CFC74DF}" dt="2020-11-27T22:06:14.994" v="2827" actId="20577"/>
-          <ac:spMkLst>
-            <pc:docMk/>
-            <pc:sldMk cId="3605043281" sldId="264"/>
-            <ac:spMk id="2" creationId="{21BFF263-59E7-4205-86DA-FCF4CF09B960}"/>
-          </ac:spMkLst>
-        </pc:spChg>
-        <pc:spChg chg="mod">
-          <ac:chgData name="Aaron Aguilera" userId="S::aaron.aguilera@parhikuni.mx::f212d21a-67cd-4488-80e3-53ea1560e30f" providerId="AD" clId="Web-{1E9EF759-D016-28FF-D7A5-BA911CFC74DF}" dt="2020-11-27T22:08:39.982" v="3061" actId="20577"/>
-          <ac:spMkLst>
-            <pc:docMk/>
-            <pc:sldMk cId="3605043281" sldId="264"/>
-            <ac:spMk id="3" creationId="{AFE5EBA7-A210-4903-B104-8AE44FC810BC}"/>
-          </ac:spMkLst>
-        </pc:spChg>
-      </pc:sldChg>
-      <pc:sldChg chg="modSp new ord">
-        <pc:chgData name="Aaron Aguilera" userId="S::aaron.aguilera@parhikuni.mx::f212d21a-67cd-4488-80e3-53ea1560e30f" providerId="AD" clId="Web-{1E9EF759-D016-28FF-D7A5-BA911CFC74DF}" dt="2020-11-27T22:11:57.394" v="3165" actId="20577"/>
-        <pc:sldMkLst>
-          <pc:docMk/>
-          <pc:sldMk cId="3153387729" sldId="265"/>
-        </pc:sldMkLst>
-        <pc:spChg chg="mod">
-          <ac:chgData name="Aaron Aguilera" userId="S::aaron.aguilera@parhikuni.mx::f212d21a-67cd-4488-80e3-53ea1560e30f" providerId="AD" clId="Web-{1E9EF759-D016-28FF-D7A5-BA911CFC74DF}" dt="2020-11-27T22:11:57.394" v="3165" actId="20577"/>
-          <ac:spMkLst>
-            <pc:docMk/>
-            <pc:sldMk cId="3153387729" sldId="265"/>
-            <ac:spMk id="3" creationId="{A3288B78-9083-4EB0-B953-6B90C2A1446A}"/>
-          </ac:spMkLst>
-        </pc:spChg>
-      </pc:sldChg>
-    </pc:docChg>
-  </pc:docChgLst>
-  <pc:docChgLst>
-    <pc:chgData name="Aaron Aguilera" userId="S::aaron.aguilera@parhikuni.mx::f212d21a-67cd-4488-80e3-53ea1560e30f" providerId="AD" clId="Web-{E6102D75-933B-3F01-4304-2D3CD47F2358}"/>
-    <pc:docChg chg="sldOrd">
-      <pc:chgData name="Aaron Aguilera" userId="S::aaron.aguilera@parhikuni.mx::f212d21a-67cd-4488-80e3-53ea1560e30f" providerId="AD" clId="Web-{E6102D75-933B-3F01-4304-2D3CD47F2358}" dt="2024-02-21T16:01:28.798" v="1"/>
-      <pc:docMkLst>
-        <pc:docMk/>
-      </pc:docMkLst>
-      <pc:sldChg chg="ord">
-        <pc:chgData name="Aaron Aguilera" userId="S::aaron.aguilera@parhikuni.mx::f212d21a-67cd-4488-80e3-53ea1560e30f" providerId="AD" clId="Web-{E6102D75-933B-3F01-4304-2D3CD47F2358}" dt="2024-02-21T16:01:23.158" v="0"/>
-        <pc:sldMkLst>
-          <pc:docMk/>
-          <pc:sldMk cId="3605043281" sldId="264"/>
-        </pc:sldMkLst>
-      </pc:sldChg>
-      <pc:sldChg chg="ord">
-        <pc:chgData name="Aaron Aguilera" userId="S::aaron.aguilera@parhikuni.mx::f212d21a-67cd-4488-80e3-53ea1560e30f" providerId="AD" clId="Web-{E6102D75-933B-3F01-4304-2D3CD47F2358}" dt="2024-02-21T16:01:28.798" v="1"/>
-        <pc:sldMkLst>
-          <pc:docMk/>
-          <pc:sldMk cId="3153387729" sldId="265"/>
-        </pc:sldMkLst>
-      </pc:sldChg>
-    </pc:docChg>
-  </pc:docChgLst>
-  <pc:docChgLst>
-    <pc:chgData name="Aaron Aguilera" userId="S::aaron.aguilera@parhikuni.mx::f212d21a-67cd-4488-80e3-53ea1560e30f" providerId="AD" clId="Web-{A1832EF2-65A0-D3E3-DB20-9875CFAED47F}"/>
-    <pc:docChg chg="modSld">
-      <pc:chgData name="Aaron Aguilera" userId="S::aaron.aguilera@parhikuni.mx::f212d21a-67cd-4488-80e3-53ea1560e30f" providerId="AD" clId="Web-{A1832EF2-65A0-D3E3-DB20-9875CFAED47F}" dt="2024-02-26T15:18:51.735" v="48" actId="20577"/>
-      <pc:docMkLst>
-        <pc:docMk/>
-      </pc:docMkLst>
-      <pc:sldChg chg="modSp">
-        <pc:chgData name="Aaron Aguilera" userId="S::aaron.aguilera@parhikuni.mx::f212d21a-67cd-4488-80e3-53ea1560e30f" providerId="AD" clId="Web-{A1832EF2-65A0-D3E3-DB20-9875CFAED47F}" dt="2024-02-26T15:14:27.255" v="43" actId="20577"/>
-        <pc:sldMkLst>
-          <pc:docMk/>
-          <pc:sldMk cId="3548563040" sldId="260"/>
-        </pc:sldMkLst>
-        <pc:spChg chg="mod">
-          <ac:chgData name="Aaron Aguilera" userId="S::aaron.aguilera@parhikuni.mx::f212d21a-67cd-4488-80e3-53ea1560e30f" providerId="AD" clId="Web-{A1832EF2-65A0-D3E3-DB20-9875CFAED47F}" dt="2024-02-26T15:14:27.255" v="43" actId="20577"/>
-          <ac:spMkLst>
-            <pc:docMk/>
-            <pc:sldMk cId="3548563040" sldId="260"/>
-            <ac:spMk id="3" creationId="{EF23D928-0060-4D3D-A304-6C5BF0CB7B6B}"/>
-          </ac:spMkLst>
-        </pc:spChg>
-      </pc:sldChg>
-      <pc:sldChg chg="modSp">
-        <pc:chgData name="Aaron Aguilera" userId="S::aaron.aguilera@parhikuni.mx::f212d21a-67cd-4488-80e3-53ea1560e30f" providerId="AD" clId="Web-{A1832EF2-65A0-D3E3-DB20-9875CFAED47F}" dt="2024-02-26T15:18:51.735" v="48" actId="20577"/>
-        <pc:sldMkLst>
-          <pc:docMk/>
-          <pc:sldMk cId="3471136250" sldId="261"/>
-        </pc:sldMkLst>
-        <pc:spChg chg="mod">
-          <ac:chgData name="Aaron Aguilera" userId="S::aaron.aguilera@parhikuni.mx::f212d21a-67cd-4488-80e3-53ea1560e30f" providerId="AD" clId="Web-{A1832EF2-65A0-D3E3-DB20-9875CFAED47F}" dt="2024-02-26T15:18:51.735" v="48" actId="20577"/>
-          <ac:spMkLst>
-            <pc:docMk/>
-            <pc:sldMk cId="3471136250" sldId="261"/>
-            <ac:spMk id="3" creationId="{C145D010-3502-44AC-BEAC-703DA6DD488D}"/>
-          </ac:spMkLst>
-        </pc:spChg>
-      </pc:sldChg>
-      <pc:sldChg chg="modSp">
-        <pc:chgData name="Aaron Aguilera" userId="S::aaron.aguilera@parhikuni.mx::f212d21a-67cd-4488-80e3-53ea1560e30f" providerId="AD" clId="Web-{A1832EF2-65A0-D3E3-DB20-9875CFAED47F}" dt="2024-02-26T15:17:57.842" v="44" actId="20577"/>
-        <pc:sldMkLst>
-          <pc:docMk/>
-          <pc:sldMk cId="2328844233" sldId="263"/>
-        </pc:sldMkLst>
-        <pc:spChg chg="mod">
-          <ac:chgData name="Aaron Aguilera" userId="S::aaron.aguilera@parhikuni.mx::f212d21a-67cd-4488-80e3-53ea1560e30f" providerId="AD" clId="Web-{A1832EF2-65A0-D3E3-DB20-9875CFAED47F}" dt="2024-02-26T15:17:57.842" v="44" actId="20577"/>
-          <ac:spMkLst>
-            <pc:docMk/>
-            <pc:sldMk cId="2328844233" sldId="263"/>
-            <ac:spMk id="3" creationId="{20AB9BF8-3D3D-457A-AD77-FEC84A5910C6}"/>
-          </ac:spMkLst>
-        </pc:spChg>
-      </pc:sldChg>
-    </pc:docChg>
-  </pc:docChgLst>
-  <pc:docChgLst>
-    <pc:chgData name="Aaron Aguilera" userId="S::aaron.aguilera@parhikuni.mx::f212d21a-67cd-4488-80e3-53ea1560e30f" providerId="AD" clId="Web-{A68D934C-90E0-D3FA-C36E-71F078D15A3B}"/>
-    <pc:docChg chg="modSld">
-      <pc:chgData name="Aaron Aguilera" userId="S::aaron.aguilera@parhikuni.mx::f212d21a-67cd-4488-80e3-53ea1560e30f" providerId="AD" clId="Web-{A68D934C-90E0-D3FA-C36E-71F078D15A3B}" dt="2024-02-21T17:59:59.664" v="56" actId="20577"/>
-      <pc:docMkLst>
-        <pc:docMk/>
-      </pc:docMkLst>
-      <pc:sldChg chg="addSp delSp modSp">
-        <pc:chgData name="Aaron Aguilera" userId="S::aaron.aguilera@parhikuni.mx::f212d21a-67cd-4488-80e3-53ea1560e30f" providerId="AD" clId="Web-{A68D934C-90E0-D3FA-C36E-71F078D15A3B}" dt="2024-02-21T17:46:05.445" v="44"/>
-        <pc:sldMkLst>
-          <pc:docMk/>
-          <pc:sldMk cId="3441195643" sldId="257"/>
-        </pc:sldMkLst>
-        <pc:spChg chg="del">
-          <ac:chgData name="Aaron Aguilera" userId="S::aaron.aguilera@parhikuni.mx::f212d21a-67cd-4488-80e3-53ea1560e30f" providerId="AD" clId="Web-{A68D934C-90E0-D3FA-C36E-71F078D15A3B}" dt="2024-02-21T17:45:43.709" v="41"/>
-          <ac:spMkLst>
-            <pc:docMk/>
-            <pc:sldMk cId="3441195643" sldId="257"/>
-            <ac:spMk id="2" creationId="{527AB972-F014-4443-AAD4-9125A9B9A7B7}"/>
-          </ac:spMkLst>
-        </pc:spChg>
-        <pc:picChg chg="add del mod ord">
-          <ac:chgData name="Aaron Aguilera" userId="S::aaron.aguilera@parhikuni.mx::f212d21a-67cd-4488-80e3-53ea1560e30f" providerId="AD" clId="Web-{A68D934C-90E0-D3FA-C36E-71F078D15A3B}" dt="2024-02-21T17:46:05.445" v="44"/>
-          <ac:picMkLst>
-            <pc:docMk/>
-            <pc:sldMk cId="3441195643" sldId="257"/>
-            <ac:picMk id="4" creationId="{7908157F-B53C-1922-DE5E-DAA3F41AE321}"/>
-          </ac:picMkLst>
-        </pc:picChg>
-      </pc:sldChg>
-      <pc:sldChg chg="addSp modSp">
-        <pc:chgData name="Aaron Aguilera" userId="S::aaron.aguilera@parhikuni.mx::f212d21a-67cd-4488-80e3-53ea1560e30f" providerId="AD" clId="Web-{A68D934C-90E0-D3FA-C36E-71F078D15A3B}" dt="2024-02-21T17:51:37.361" v="53" actId="1076"/>
-        <pc:sldMkLst>
-          <pc:docMk/>
-          <pc:sldMk cId="1320597448" sldId="258"/>
-        </pc:sldMkLst>
-        <pc:spChg chg="mod">
-          <ac:chgData name="Aaron Aguilera" userId="S::aaron.aguilera@parhikuni.mx::f212d21a-67cd-4488-80e3-53ea1560e30f" providerId="AD" clId="Web-{A68D934C-90E0-D3FA-C36E-71F078D15A3B}" dt="2024-02-21T17:46:25.634" v="47" actId="20577"/>
-          <ac:spMkLst>
-            <pc:docMk/>
-            <pc:sldMk cId="1320597448" sldId="258"/>
-            <ac:spMk id="2" creationId="{B34BF297-5025-4B62-B082-733724A41D19}"/>
-          </ac:spMkLst>
-        </pc:spChg>
-        <pc:spChg chg="mod">
-          <ac:chgData name="Aaron Aguilera" userId="S::aaron.aguilera@parhikuni.mx::f212d21a-67cd-4488-80e3-53ea1560e30f" providerId="AD" clId="Web-{A68D934C-90E0-D3FA-C36E-71F078D15A3B}" dt="2024-02-21T17:51:37.361" v="53" actId="1076"/>
-          <ac:spMkLst>
-            <pc:docMk/>
-            <pc:sldMk cId="1320597448" sldId="258"/>
-            <ac:spMk id="3" creationId="{E8D393E4-8CC7-46A9-9296-2C838278ADAC}"/>
-          </ac:spMkLst>
-        </pc:spChg>
-        <pc:picChg chg="add mod ord">
-          <ac:chgData name="Aaron Aguilera" userId="S::aaron.aguilera@parhikuni.mx::f212d21a-67cd-4488-80e3-53ea1560e30f" providerId="AD" clId="Web-{A68D934C-90E0-D3FA-C36E-71F078D15A3B}" dt="2024-02-21T17:46:34.635" v="49" actId="14100"/>
-          <ac:picMkLst>
-            <pc:docMk/>
-            <pc:sldMk cId="1320597448" sldId="258"/>
-            <ac:picMk id="4" creationId="{F22849DD-52D6-5125-76D6-782B9B10C26C}"/>
-          </ac:picMkLst>
-        </pc:picChg>
-      </pc:sldChg>
-      <pc:sldChg chg="addSp modSp">
-        <pc:chgData name="Aaron Aguilera" userId="S::aaron.aguilera@parhikuni.mx::f212d21a-67cd-4488-80e3-53ea1560e30f" providerId="AD" clId="Web-{A68D934C-90E0-D3FA-C36E-71F078D15A3B}" dt="2024-02-21T17:53:28.010" v="54" actId="14100"/>
-        <pc:sldMkLst>
-          <pc:docMk/>
-          <pc:sldMk cId="2526847329" sldId="259"/>
-        </pc:sldMkLst>
-        <pc:spChg chg="mod">
-          <ac:chgData name="Aaron Aguilera" userId="S::aaron.aguilera@parhikuni.mx::f212d21a-67cd-4488-80e3-53ea1560e30f" providerId="AD" clId="Web-{A68D934C-90E0-D3FA-C36E-71F078D15A3B}" dt="2024-02-21T17:34:20.861" v="8" actId="14100"/>
-          <ac:spMkLst>
-            <pc:docMk/>
-            <pc:sldMk cId="2526847329" sldId="259"/>
-            <ac:spMk id="3" creationId="{51906DBC-0CFA-44C8-B8D1-933F5C0650D1}"/>
-          </ac:spMkLst>
-        </pc:spChg>
-        <pc:picChg chg="add mod">
-          <ac:chgData name="Aaron Aguilera" userId="S::aaron.aguilera@parhikuni.mx::f212d21a-67cd-4488-80e3-53ea1560e30f" providerId="AD" clId="Web-{A68D934C-90E0-D3FA-C36E-71F078D15A3B}" dt="2024-02-21T17:53:28.010" v="54" actId="14100"/>
-          <ac:picMkLst>
-            <pc:docMk/>
-            <pc:sldMk cId="2526847329" sldId="259"/>
-            <ac:picMk id="4" creationId="{C33C46D6-09DF-2AB5-0BBD-153B447EDED0}"/>
-          </ac:picMkLst>
-        </pc:picChg>
-      </pc:sldChg>
-      <pc:sldChg chg="addSp modSp">
-        <pc:chgData name="Aaron Aguilera" userId="S::aaron.aguilera@parhikuni.mx::f212d21a-67cd-4488-80e3-53ea1560e30f" providerId="AD" clId="Web-{A68D934C-90E0-D3FA-C36E-71F078D15A3B}" dt="2024-02-21T17:59:59.664" v="56" actId="20577"/>
-        <pc:sldMkLst>
-          <pc:docMk/>
-          <pc:sldMk cId="3548563040" sldId="260"/>
-        </pc:sldMkLst>
-        <pc:spChg chg="mod">
-          <ac:chgData name="Aaron Aguilera" userId="S::aaron.aguilera@parhikuni.mx::f212d21a-67cd-4488-80e3-53ea1560e30f" providerId="AD" clId="Web-{A68D934C-90E0-D3FA-C36E-71F078D15A3B}" dt="2024-02-21T17:59:59.664" v="56" actId="20577"/>
-          <ac:spMkLst>
-            <pc:docMk/>
-            <pc:sldMk cId="3548563040" sldId="260"/>
-            <ac:spMk id="3" creationId="{EF23D928-0060-4D3D-A304-6C5BF0CB7B6B}"/>
-          </ac:spMkLst>
-        </pc:spChg>
-        <pc:picChg chg="add mod">
-          <ac:chgData name="Aaron Aguilera" userId="S::aaron.aguilera@parhikuni.mx::f212d21a-67cd-4488-80e3-53ea1560e30f" providerId="AD" clId="Web-{A68D934C-90E0-D3FA-C36E-71F078D15A3B}" dt="2024-02-21T17:36:12.198" v="17" actId="1076"/>
-          <ac:picMkLst>
-            <pc:docMk/>
-            <pc:sldMk cId="3548563040" sldId="260"/>
-            <ac:picMk id="4" creationId="{C7EE4E84-FE5A-8999-48E3-37A9EEED35A7}"/>
-          </ac:picMkLst>
-        </pc:picChg>
-      </pc:sldChg>
-      <pc:sldChg chg="modSp">
-        <pc:chgData name="Aaron Aguilera" userId="S::aaron.aguilera@parhikuni.mx::f212d21a-67cd-4488-80e3-53ea1560e30f" providerId="AD" clId="Web-{A68D934C-90E0-D3FA-C36E-71F078D15A3B}" dt="2024-02-21T17:47:33.171" v="50" actId="14100"/>
-        <pc:sldMkLst>
-          <pc:docMk/>
-          <pc:sldMk cId="3932652614" sldId="262"/>
-        </pc:sldMkLst>
-        <pc:picChg chg="mod">
-          <ac:chgData name="Aaron Aguilera" userId="S::aaron.aguilera@parhikuni.mx::f212d21a-67cd-4488-80e3-53ea1560e30f" providerId="AD" clId="Web-{A68D934C-90E0-D3FA-C36E-71F078D15A3B}" dt="2024-02-21T17:47:33.171" v="50" actId="14100"/>
-          <ac:picMkLst>
-            <pc:docMk/>
-            <pc:sldMk cId="3932652614" sldId="262"/>
-            <ac:picMk id="4" creationId="{ABC473B9-0441-423F-A7F2-E308BCB094AC}"/>
-          </ac:picMkLst>
-        </pc:picChg>
-      </pc:sldChg>
-      <pc:sldChg chg="addSp modSp">
-        <pc:chgData name="Aaron Aguilera" userId="S::aaron.aguilera@parhikuni.mx::f212d21a-67cd-4488-80e3-53ea1560e30f" providerId="AD" clId="Web-{A68D934C-90E0-D3FA-C36E-71F078D15A3B}" dt="2024-02-21T17:39:51.511" v="28"/>
-        <pc:sldMkLst>
-          <pc:docMk/>
-          <pc:sldMk cId="2328844233" sldId="263"/>
-        </pc:sldMkLst>
-        <pc:picChg chg="add mod modCrop">
-          <ac:chgData name="Aaron Aguilera" userId="S::aaron.aguilera@parhikuni.mx::f212d21a-67cd-4488-80e3-53ea1560e30f" providerId="AD" clId="Web-{A68D934C-90E0-D3FA-C36E-71F078D15A3B}" dt="2024-02-21T17:39:51.511" v="28"/>
-          <ac:picMkLst>
-            <pc:docMk/>
-            <pc:sldMk cId="2328844233" sldId="263"/>
-            <ac:picMk id="4" creationId="{79039E11-D169-E0CF-47D9-B4E77DDC3AD3}"/>
-          </ac:picMkLst>
-        </pc:picChg>
-      </pc:sldChg>
-      <pc:sldChg chg="addSp modSp">
-        <pc:chgData name="Aaron Aguilera" userId="S::aaron.aguilera@parhikuni.mx::f212d21a-67cd-4488-80e3-53ea1560e30f" providerId="AD" clId="Web-{A68D934C-90E0-D3FA-C36E-71F078D15A3B}" dt="2024-02-21T17:41:30.940" v="35" actId="1076"/>
-        <pc:sldMkLst>
-          <pc:docMk/>
-          <pc:sldMk cId="3153387729" sldId="265"/>
-        </pc:sldMkLst>
-        <pc:spChg chg="mod">
-          <ac:chgData name="Aaron Aguilera" userId="S::aaron.aguilera@parhikuni.mx::f212d21a-67cd-4488-80e3-53ea1560e30f" providerId="AD" clId="Web-{A68D934C-90E0-D3FA-C36E-71F078D15A3B}" dt="2024-02-21T17:41:30.940" v="35" actId="1076"/>
-          <ac:spMkLst>
-            <pc:docMk/>
-            <pc:sldMk cId="3153387729" sldId="265"/>
-            <ac:spMk id="3" creationId="{A3288B78-9083-4EB0-B953-6B90C2A1446A}"/>
-          </ac:spMkLst>
-        </pc:spChg>
-        <pc:picChg chg="add mod ord">
-          <ac:chgData name="Aaron Aguilera" userId="S::aaron.aguilera@parhikuni.mx::f212d21a-67cd-4488-80e3-53ea1560e30f" providerId="AD" clId="Web-{A68D934C-90E0-D3FA-C36E-71F078D15A3B}" dt="2024-02-21T17:41:25.018" v="33"/>
-          <ac:picMkLst>
-            <pc:docMk/>
-            <pc:sldMk cId="3153387729" sldId="265"/>
-            <ac:picMk id="4" creationId="{3B510973-A11E-F6A3-713A-78AF5DECC448}"/>
-          </ac:picMkLst>
-        </pc:picChg>
-      </pc:sldChg>
-    </pc:docChg>
-  </pc:docChgLst>
-  <pc:docChgLst>
-    <pc:chgData name="Aaron Aguilera" userId="S::aaron.aguilera@parhikuni.mx::f212d21a-67cd-4488-80e3-53ea1560e30f" providerId="AD" clId="Web-{440B7887-0E84-5C85-BFF5-3E2CED3207EA}"/>
-    <pc:docChg chg="modSld">
-      <pc:chgData name="Aaron Aguilera" userId="S::aaron.aguilera@parhikuni.mx::f212d21a-67cd-4488-80e3-53ea1560e30f" providerId="AD" clId="Web-{440B7887-0E84-5C85-BFF5-3E2CED3207EA}" dt="2024-02-26T17:27:34.557" v="1" actId="20577"/>
-      <pc:docMkLst>
-        <pc:docMk/>
-      </pc:docMkLst>
-      <pc:sldChg chg="modSp">
-        <pc:chgData name="Aaron Aguilera" userId="S::aaron.aguilera@parhikuni.mx::f212d21a-67cd-4488-80e3-53ea1560e30f" providerId="AD" clId="Web-{440B7887-0E84-5C85-BFF5-3E2CED3207EA}" dt="2024-02-26T17:27:34.557" v="1" actId="20577"/>
-        <pc:sldMkLst>
-          <pc:docMk/>
-          <pc:sldMk cId="3605043281" sldId="264"/>
-        </pc:sldMkLst>
-        <pc:spChg chg="mod">
-          <ac:chgData name="Aaron Aguilera" userId="S::aaron.aguilera@parhikuni.mx::f212d21a-67cd-4488-80e3-53ea1560e30f" providerId="AD" clId="Web-{440B7887-0E84-5C85-BFF5-3E2CED3207EA}" dt="2024-02-26T17:27:34.557" v="1" actId="20577"/>
-          <ac:spMkLst>
-            <pc:docMk/>
-            <pc:sldMk cId="3605043281" sldId="264"/>
-            <ac:spMk id="2" creationId="{21BFF263-59E7-4205-86DA-FCF4CF09B960}"/>
-          </ac:spMkLst>
-        </pc:spChg>
-      </pc:sldChg>
-    </pc:docChg>
-  </pc:docChgLst>
-</pc:chgInfo>
-</file>
-
 <file path=ppt/slideLayouts/slideLayout1.xml><?xml version="1.0" encoding="utf-8"?>
-<p:sldLayout xmlns:a="http://schemas.openxmlformats.org/drawingml/2006/main" xmlns:r="http://schemas.openxmlformats.org/officeDocument/2006/relationships" xmlns:p="http://schemas.openxmlformats.org/presentationml/2006/main" showMasterSp="0" type="title" preserve="1">
+<p:sldLayout xmlns:a="http://schemas.openxmlformats.org/drawingml/2006/main" xmlns:r="http://schemas.openxmlformats.org/officeDocument/2006/relationships" xmlns:p="http://schemas.openxmlformats.org/presentationml/2006/main" type="title" preserve="1" showMasterSp="0">
   <p:cSld name="Title Slide">
     <p:spTree>
       <p:nvGrpSpPr>
@@ -2033,6 +611,7 @@
               <a:rPr lang="en-US" dirty="0"/>
               <a:t>Click to edit Master title style</a:t>
             </a:r>
+            <a:endParaRPr lang="en-US" dirty="0"/>
           </a:p>
         </p:txBody>
       </p:sp>
@@ -2149,6 +728,7 @@
               <a:rPr lang="en-US" dirty="0"/>
               <a:t>Click to edit Master subtitle style</a:t>
             </a:r>
+            <a:endParaRPr lang="en-US" dirty="0"/>
           </a:p>
         </p:txBody>
       </p:sp>
@@ -2182,8 +762,6 @@
           <a:p>
             <a:fld id="{1E700B27-DE4C-4B9E-BB11-B9027034A00F}" type="datetimeFigureOut">
               <a:rPr lang="en-US" dirty="0"/>
-              <a:pPr/>
-              <a:t>2/26/2024</a:t>
             </a:fld>
             <a:endParaRPr lang="en-US" dirty="0"/>
           </a:p>
@@ -2222,6 +800,7 @@
               <a:t>
               </a:t>
             </a:r>
+            <a:endParaRPr lang="en-US" dirty="0"/>
           </a:p>
         </p:txBody>
       </p:sp>
@@ -2289,19 +868,12 @@
           <a:p>
             <a:fld id="{D57F1E4F-1CFF-5643-939E-217C01CDF565}" type="slidenum">
               <a:rPr lang="en-US" dirty="0"/>
-              <a:pPr/>
-              <a:t>‹Nº›</a:t>
             </a:fld>
             <a:endParaRPr lang="en-US" dirty="0"/>
           </a:p>
         </p:txBody>
       </p:sp>
     </p:spTree>
-    <p:extLst>
-      <p:ext uri="{BB962C8B-B14F-4D97-AF65-F5344CB8AC3E}">
-        <p14:creationId xmlns:p14="http://schemas.microsoft.com/office/powerpoint/2010/main" val="2917642037"/>
-      </p:ext>
-    </p:extLst>
   </p:cSld>
   <p:clrMapOvr>
     <a:masterClrMapping/>
@@ -3137,6 +1709,7 @@
               <a:rPr lang="en-US" dirty="0"/>
               <a:t>Click to edit Master title style</a:t>
             </a:r>
+            <a:endParaRPr lang="en-US" dirty="0"/>
           </a:p>
         </p:txBody>
       </p:sp>
@@ -3283,6 +1856,7 @@
               <a:rPr lang="en-US" dirty="0"/>
               <a:t>Click to edit Master text styles</a:t>
             </a:r>
+            <a:endParaRPr lang="en-US" dirty="0"/>
           </a:p>
         </p:txBody>
       </p:sp>
@@ -3303,7 +1877,6 @@
           <a:p>
             <a:fld id="{C40F4739-9812-4A9F-890D-2AD6BA5F6EE8}" type="datetimeFigureOut">
               <a:rPr lang="en-US" dirty="0"/>
-              <a:t>2/26/2024</a:t>
             </a:fld>
             <a:endParaRPr lang="en-US" dirty="0"/>
           </a:p>
@@ -3329,6 +1902,7 @@
               <a:t>
               </a:t>
             </a:r>
+            <a:endParaRPr lang="en-US" dirty="0"/>
           </a:p>
         </p:txBody>
       </p:sp>
@@ -3385,19 +1959,12 @@
           <a:p>
             <a:fld id="{D57F1E4F-1CFF-5643-939E-217C01CDF565}" type="slidenum">
               <a:rPr lang="en-US" dirty="0"/>
-              <a:pPr/>
-              <a:t>‹Nº›</a:t>
             </a:fld>
             <a:endParaRPr lang="en-US" dirty="0"/>
           </a:p>
         </p:txBody>
       </p:sp>
     </p:spTree>
-    <p:extLst>
-      <p:ext uri="{BB962C8B-B14F-4D97-AF65-F5344CB8AC3E}">
-        <p14:creationId xmlns:p14="http://schemas.microsoft.com/office/powerpoint/2010/main" val="1121134648"/>
-      </p:ext>
-    </p:extLst>
   </p:cSld>
   <p:clrMapOvr>
     <a:masterClrMapping/>
@@ -3406,7 +1973,7 @@
 </file>
 
 <file path=ppt/slideLayouts/slideLayout11.xml><?xml version="1.0" encoding="utf-8"?>
-<p:sldLayout xmlns:a="http://schemas.openxmlformats.org/drawingml/2006/main" xmlns:r="http://schemas.openxmlformats.org/officeDocument/2006/relationships" xmlns:p="http://schemas.openxmlformats.org/presentationml/2006/main" showMasterSp="0" preserve="1">
+<p:sldLayout xmlns:a="http://schemas.openxmlformats.org/drawingml/2006/main" xmlns:r="http://schemas.openxmlformats.org/officeDocument/2006/relationships" xmlns:p="http://schemas.openxmlformats.org/presentationml/2006/main" preserve="1" showMasterSp="0">
   <p:cSld name="Title and Caption">
     <p:spTree>
       <p:nvGrpSpPr>
@@ -4231,6 +2798,7 @@
               <a:rPr lang="en-US" dirty="0"/>
               <a:t>Click to edit Master title style</a:t>
             </a:r>
+            <a:endParaRPr lang="en-US" dirty="0"/>
           </a:p>
         </p:txBody>
       </p:sp>
@@ -4298,6 +2866,7 @@
               <a:rPr lang="en-US" dirty="0"/>
               <a:t>Click to edit Master text styles</a:t>
             </a:r>
+            <a:endParaRPr lang="en-US" dirty="0"/>
           </a:p>
         </p:txBody>
       </p:sp>
@@ -4318,7 +2887,6 @@
           <a:p>
             <a:fld id="{18845AC5-A3F8-44AA-BA8F-596CDCC976D3}" type="datetimeFigureOut">
               <a:rPr lang="en-US" dirty="0"/>
-              <a:t>2/26/2024</a:t>
             </a:fld>
             <a:endParaRPr lang="en-US" dirty="0"/>
           </a:p>
@@ -4344,6 +2912,7 @@
               <a:t>
               </a:t>
             </a:r>
+            <a:endParaRPr lang="en-US" dirty="0"/>
           </a:p>
         </p:txBody>
       </p:sp>
@@ -4400,19 +2969,12 @@
           <a:p>
             <a:fld id="{D57F1E4F-1CFF-5643-939E-217C01CDF565}" type="slidenum">
               <a:rPr lang="en-US" dirty="0"/>
-              <a:pPr/>
-              <a:t>‹Nº›</a:t>
             </a:fld>
             <a:endParaRPr lang="en-US" dirty="0"/>
           </a:p>
         </p:txBody>
       </p:sp>
     </p:spTree>
-    <p:extLst>
-      <p:ext uri="{BB962C8B-B14F-4D97-AF65-F5344CB8AC3E}">
-        <p14:creationId xmlns:p14="http://schemas.microsoft.com/office/powerpoint/2010/main" val="3816484277"/>
-      </p:ext>
-    </p:extLst>
   </p:cSld>
   <p:clrMapOvr>
     <a:masterClrMapping/>
@@ -4421,7 +2983,7 @@
 </file>
 
 <file path=ppt/slideLayouts/slideLayout12.xml><?xml version="1.0" encoding="utf-8"?>
-<p:sldLayout xmlns:a="http://schemas.openxmlformats.org/drawingml/2006/main" xmlns:r="http://schemas.openxmlformats.org/officeDocument/2006/relationships" xmlns:p="http://schemas.openxmlformats.org/presentationml/2006/main" showMasterSp="0" preserve="1">
+<p:sldLayout xmlns:a="http://schemas.openxmlformats.org/drawingml/2006/main" xmlns:r="http://schemas.openxmlformats.org/officeDocument/2006/relationships" xmlns:p="http://schemas.openxmlformats.org/presentationml/2006/main" preserve="1" showMasterSp="0">
   <p:cSld name="Quote with Caption">
     <p:spTree>
       <p:nvGrpSpPr>
@@ -5247,8 +3809,8 @@
                 <a:solidFill>
                   <a:schemeClr val="accent1"/>
                 </a:solidFill>
-                <a:latin typeface="Arial"/>
-                <a:cs typeface="Arial"/>
+                <a:latin typeface="Arial" panose="020B0604020202020204"/>
+                <a:cs typeface="Arial" panose="020B0604020202020204"/>
               </a:defRPr>
             </a:lvl1pPr>
           </a:lstStyle>
@@ -5258,6 +3820,7 @@
               <a:rPr lang="en-US" sz="9600" dirty="0"/>
               <a:t>”</a:t>
             </a:r>
+            <a:endParaRPr lang="en-US" sz="9600" dirty="0"/>
           </a:p>
         </p:txBody>
       </p:sp>
@@ -5290,8 +3853,8 @@
                 <a:solidFill>
                   <a:schemeClr val="accent1"/>
                 </a:solidFill>
-                <a:latin typeface="Arial"/>
-                <a:cs typeface="Arial"/>
+                <a:latin typeface="Arial" panose="020B0604020202020204"/>
+                <a:cs typeface="Arial" panose="020B0604020202020204"/>
               </a:defRPr>
             </a:lvl1pPr>
           </a:lstStyle>
@@ -5301,6 +3864,7 @@
               <a:rPr lang="en-US" sz="9600" dirty="0"/>
               <a:t>“</a:t>
             </a:r>
+            <a:endParaRPr lang="en-US" sz="9600" dirty="0"/>
           </a:p>
         </p:txBody>
       </p:sp>
@@ -5332,6 +3896,7 @@
               <a:rPr lang="en-US" dirty="0"/>
               <a:t>Click to edit Master title style</a:t>
             </a:r>
+            <a:endParaRPr lang="en-US" dirty="0"/>
           </a:p>
         </p:txBody>
       </p:sp>
@@ -5405,6 +3970,7 @@
               <a:rPr lang="en-US" dirty="0"/>
               <a:t>Click to edit Master text styles</a:t>
             </a:r>
+            <a:endParaRPr lang="en-US" dirty="0"/>
           </a:p>
         </p:txBody>
       </p:sp>
@@ -5472,6 +4038,7 @@
               <a:rPr lang="en-US" dirty="0"/>
               <a:t>Click to edit Master text styles</a:t>
             </a:r>
+            <a:endParaRPr lang="en-US" dirty="0"/>
           </a:p>
         </p:txBody>
       </p:sp>
@@ -5492,7 +4059,6 @@
           <a:p>
             <a:fld id="{C873B183-A821-4095-A363-9EC968635539}" type="datetimeFigureOut">
               <a:rPr lang="en-US" dirty="0"/>
-              <a:t>2/26/2024</a:t>
             </a:fld>
             <a:endParaRPr lang="en-US" dirty="0"/>
           </a:p>
@@ -5518,6 +4084,7 @@
               <a:t>
               </a:t>
             </a:r>
+            <a:endParaRPr lang="en-US" dirty="0"/>
           </a:p>
         </p:txBody>
       </p:sp>
@@ -5574,19 +4141,12 @@
           <a:p>
             <a:fld id="{D57F1E4F-1CFF-5643-939E-217C01CDF565}" type="slidenum">
               <a:rPr lang="en-US" dirty="0"/>
-              <a:pPr/>
-              <a:t>‹Nº›</a:t>
             </a:fld>
             <a:endParaRPr lang="en-US" dirty="0"/>
           </a:p>
         </p:txBody>
       </p:sp>
     </p:spTree>
-    <p:extLst>
-      <p:ext uri="{BB962C8B-B14F-4D97-AF65-F5344CB8AC3E}">
-        <p14:creationId xmlns:p14="http://schemas.microsoft.com/office/powerpoint/2010/main" val="240428917"/>
-      </p:ext>
-    </p:extLst>
   </p:cSld>
   <p:clrMapOvr>
     <a:masterClrMapping/>
@@ -5595,7 +4155,7 @@
 </file>
 
 <file path=ppt/slideLayouts/slideLayout13.xml><?xml version="1.0" encoding="utf-8"?>
-<p:sldLayout xmlns:a="http://schemas.openxmlformats.org/drawingml/2006/main" xmlns:r="http://schemas.openxmlformats.org/officeDocument/2006/relationships" xmlns:p="http://schemas.openxmlformats.org/presentationml/2006/main" showMasterSp="0" preserve="1">
+<p:sldLayout xmlns:a="http://schemas.openxmlformats.org/drawingml/2006/main" xmlns:r="http://schemas.openxmlformats.org/officeDocument/2006/relationships" xmlns:p="http://schemas.openxmlformats.org/presentationml/2006/main" preserve="1" showMasterSp="0">
   <p:cSld name="Name Card">
     <p:spTree>
       <p:nvGrpSpPr>
@@ -6420,6 +4980,7 @@
               <a:rPr lang="en-US" dirty="0"/>
               <a:t>Click to edit Master title style</a:t>
             </a:r>
+            <a:endParaRPr lang="en-US" dirty="0"/>
           </a:p>
         </p:txBody>
       </p:sp>
@@ -6537,6 +5098,7 @@
               <a:rPr lang="en-US" dirty="0"/>
               <a:t>Click to edit Master text styles</a:t>
             </a:r>
+            <a:endParaRPr lang="en-US" dirty="0"/>
           </a:p>
         </p:txBody>
       </p:sp>
@@ -6557,7 +5119,6 @@
           <a:p>
             <a:fld id="{174D01B4-0AA5-45E6-B2E6-5FA4078AEBCF}" type="datetimeFigureOut">
               <a:rPr lang="en-US" dirty="0"/>
-              <a:t>2/26/2024</a:t>
             </a:fld>
             <a:endParaRPr lang="en-US" dirty="0"/>
           </a:p>
@@ -6583,6 +5144,7 @@
               <a:t>
               </a:t>
             </a:r>
+            <a:endParaRPr lang="en-US" dirty="0"/>
           </a:p>
         </p:txBody>
       </p:sp>
@@ -6639,19 +5201,12 @@
           <a:p>
             <a:fld id="{D57F1E4F-1CFF-5643-939E-217C01CDF565}" type="slidenum">
               <a:rPr lang="en-US" dirty="0"/>
-              <a:pPr/>
-              <a:t>‹Nº›</a:t>
             </a:fld>
             <a:endParaRPr lang="en-US" dirty="0"/>
           </a:p>
         </p:txBody>
       </p:sp>
     </p:spTree>
-    <p:extLst>
-      <p:ext uri="{BB962C8B-B14F-4D97-AF65-F5344CB8AC3E}">
-        <p14:creationId xmlns:p14="http://schemas.microsoft.com/office/powerpoint/2010/main" val="3384126117"/>
-      </p:ext>
-    </p:extLst>
   </p:cSld>
   <p:clrMapOvr>
     <a:masterClrMapping/>
@@ -6699,6 +5254,7 @@
               <a:rPr lang="en-US" dirty="0"/>
               <a:t>Click to edit Master title style</a:t>
             </a:r>
+            <a:endParaRPr lang="en-US" dirty="0"/>
           </a:p>
         </p:txBody>
       </p:sp>
@@ -6770,6 +5326,7 @@
               <a:rPr lang="en-US" dirty="0"/>
               <a:t>Click to edit Master text styles</a:t>
             </a:r>
+            <a:endParaRPr lang="en-US" dirty="0"/>
           </a:p>
         </p:txBody>
       </p:sp>
@@ -6837,6 +5394,7 @@
               <a:rPr lang="en-US" dirty="0"/>
               <a:t>Click to edit Master text styles</a:t>
             </a:r>
+            <a:endParaRPr lang="en-US" dirty="0"/>
           </a:p>
         </p:txBody>
       </p:sp>
@@ -6908,6 +5466,7 @@
               <a:rPr lang="en-US" dirty="0"/>
               <a:t>Click to edit Master text styles</a:t>
             </a:r>
+            <a:endParaRPr lang="en-US" dirty="0"/>
           </a:p>
         </p:txBody>
       </p:sp>
@@ -6975,6 +5534,7 @@
               <a:rPr lang="en-US" dirty="0"/>
               <a:t>Click to edit Master text styles</a:t>
             </a:r>
+            <a:endParaRPr lang="en-US" dirty="0"/>
           </a:p>
         </p:txBody>
       </p:sp>
@@ -7046,6 +5606,7 @@
               <a:rPr lang="en-US" dirty="0"/>
               <a:t>Click to edit Master text styles</a:t>
             </a:r>
+            <a:endParaRPr lang="en-US" dirty="0"/>
           </a:p>
         </p:txBody>
       </p:sp>
@@ -7113,6 +5674,7 @@
               <a:rPr lang="en-US" dirty="0"/>
               <a:t>Click to edit Master text styles</a:t>
             </a:r>
+            <a:endParaRPr lang="en-US" dirty="0"/>
           </a:p>
         </p:txBody>
       </p:sp>
@@ -7207,7 +5769,6 @@
           <a:p>
             <a:fld id="{4147335C-0450-40D7-8612-B3203BED4F28}" type="datetimeFigureOut">
               <a:rPr lang="en-US" dirty="0"/>
-              <a:t>2/26/2024</a:t>
             </a:fld>
             <a:endParaRPr lang="en-US" dirty="0"/>
           </a:p>
@@ -7233,6 +5794,7 @@
               <a:t>
               </a:t>
             </a:r>
+            <a:endParaRPr lang="en-US" dirty="0"/>
           </a:p>
         </p:txBody>
       </p:sp>
@@ -7253,19 +5815,12 @@
           <a:p>
             <a:fld id="{D57F1E4F-1CFF-5643-939E-217C01CDF565}" type="slidenum">
               <a:rPr lang="en-US" dirty="0"/>
-              <a:pPr/>
-              <a:t>‹Nº›</a:t>
             </a:fld>
             <a:endParaRPr lang="en-US" dirty="0"/>
           </a:p>
         </p:txBody>
       </p:sp>
     </p:spTree>
-    <p:extLst>
-      <p:ext uri="{BB962C8B-B14F-4D97-AF65-F5344CB8AC3E}">
-        <p14:creationId xmlns:p14="http://schemas.microsoft.com/office/powerpoint/2010/main" val="3350325124"/>
-      </p:ext>
-    </p:extLst>
   </p:cSld>
   <p:clrMapOvr>
     <a:masterClrMapping/>
@@ -7313,6 +5868,7 @@
               <a:rPr lang="en-US" dirty="0"/>
               <a:t>Click to edit Master title style</a:t>
             </a:r>
+            <a:endParaRPr lang="en-US" dirty="0"/>
           </a:p>
         </p:txBody>
       </p:sp>
@@ -7384,6 +5940,7 @@
               <a:rPr lang="en-US" dirty="0"/>
               <a:t>Click to edit Master text styles</a:t>
             </a:r>
+            <a:endParaRPr lang="en-US" dirty="0"/>
           </a:p>
         </p:txBody>
       </p:sp>
@@ -7526,6 +6083,7 @@
               <a:rPr lang="en-US" dirty="0"/>
               <a:t>Click to edit Master text styles</a:t>
             </a:r>
+            <a:endParaRPr lang="en-US" dirty="0"/>
           </a:p>
         </p:txBody>
       </p:sp>
@@ -7597,6 +6155,7 @@
               <a:rPr lang="en-US" dirty="0"/>
               <a:t>Click to edit Master text styles</a:t>
             </a:r>
+            <a:endParaRPr lang="en-US" dirty="0"/>
           </a:p>
         </p:txBody>
       </p:sp>
@@ -7739,6 +6298,7 @@
               <a:rPr lang="en-US" dirty="0"/>
               <a:t>Click to edit Master text styles</a:t>
             </a:r>
+            <a:endParaRPr lang="en-US" dirty="0"/>
           </a:p>
         </p:txBody>
       </p:sp>
@@ -7810,6 +6370,7 @@
               <a:rPr lang="en-US" dirty="0"/>
               <a:t>Click to edit Master text styles</a:t>
             </a:r>
+            <a:endParaRPr lang="en-US" dirty="0"/>
           </a:p>
         </p:txBody>
       </p:sp>
@@ -7952,6 +6513,7 @@
               <a:rPr lang="en-US" dirty="0"/>
               <a:t>Click to edit Master text styles</a:t>
             </a:r>
+            <a:endParaRPr lang="en-US" dirty="0"/>
           </a:p>
         </p:txBody>
       </p:sp>
@@ -8046,7 +6608,6 @@
           <a:p>
             <a:fld id="{D246A105-2A1C-4284-B4EA-07CF89B1A393}" type="datetimeFigureOut">
               <a:rPr lang="en-US" dirty="0"/>
-              <a:t>2/26/2024</a:t>
             </a:fld>
             <a:endParaRPr lang="en-US" dirty="0"/>
           </a:p>
@@ -8072,6 +6633,7 @@
               <a:t>
               </a:t>
             </a:r>
+            <a:endParaRPr lang="en-US" dirty="0"/>
           </a:p>
         </p:txBody>
       </p:sp>
@@ -8092,19 +6654,12 @@
           <a:p>
             <a:fld id="{D57F1E4F-1CFF-5643-939E-217C01CDF565}" type="slidenum">
               <a:rPr lang="en-US" dirty="0"/>
-              <a:pPr/>
-              <a:t>‹Nº›</a:t>
             </a:fld>
             <a:endParaRPr lang="en-US" dirty="0"/>
           </a:p>
         </p:txBody>
       </p:sp>
     </p:spTree>
-    <p:extLst>
-      <p:ext uri="{BB962C8B-B14F-4D97-AF65-F5344CB8AC3E}">
-        <p14:creationId xmlns:p14="http://schemas.microsoft.com/office/powerpoint/2010/main" val="3687683171"/>
-      </p:ext>
-    </p:extLst>
   </p:cSld>
   <p:clrMapOvr>
     <a:masterClrMapping/>
@@ -8153,6 +6708,7 @@
               <a:rPr lang="en-US" dirty="0"/>
               <a:t>Click to edit Master title style</a:t>
             </a:r>
+            <a:endParaRPr lang="en-US" dirty="0"/>
           </a:p>
         </p:txBody>
       </p:sp>
@@ -8176,6 +6732,7 @@
               <a:rPr lang="en-US" dirty="0"/>
               <a:t>Click to edit Master text styles</a:t>
             </a:r>
+            <a:endParaRPr lang="en-US" dirty="0"/>
           </a:p>
           <a:p>
             <a:pPr lvl="1"/>
@@ -8183,6 +6740,7 @@
               <a:rPr lang="en-US" dirty="0"/>
               <a:t>Second level</a:t>
             </a:r>
+            <a:endParaRPr lang="en-US" dirty="0"/>
           </a:p>
           <a:p>
             <a:pPr lvl="2"/>
@@ -8190,6 +6748,7 @@
               <a:rPr lang="en-US" dirty="0"/>
               <a:t>Third level</a:t>
             </a:r>
+            <a:endParaRPr lang="en-US" dirty="0"/>
           </a:p>
           <a:p>
             <a:pPr lvl="3"/>
@@ -8197,6 +6756,7 @@
               <a:rPr lang="en-US" dirty="0"/>
               <a:t>Fourth level</a:t>
             </a:r>
+            <a:endParaRPr lang="en-US" dirty="0"/>
           </a:p>
           <a:p>
             <a:pPr lvl="4"/>
@@ -8204,6 +6764,7 @@
               <a:rPr lang="en-US" dirty="0"/>
               <a:t>Fifth level</a:t>
             </a:r>
+            <a:endParaRPr lang="en-US" dirty="0"/>
           </a:p>
         </p:txBody>
       </p:sp>
@@ -8224,7 +6785,6 @@
           <a:p>
             <a:fld id="{80DBE609-F3F2-45E6-BD6A-E03A8C86C1AE}" type="datetimeFigureOut">
               <a:rPr lang="en-US" dirty="0"/>
-              <a:t>2/26/2024</a:t>
             </a:fld>
             <a:endParaRPr lang="en-US" dirty="0"/>
           </a:p>
@@ -8250,6 +6810,7 @@
               <a:t>
               </a:t>
             </a:r>
+            <a:endParaRPr lang="en-US" dirty="0"/>
           </a:p>
         </p:txBody>
       </p:sp>
@@ -8270,19 +6831,12 @@
           <a:p>
             <a:fld id="{D57F1E4F-1CFF-5643-939E-217C01CDF565}" type="slidenum">
               <a:rPr lang="en-US" dirty="0"/>
-              <a:pPr/>
-              <a:t>‹Nº›</a:t>
             </a:fld>
             <a:endParaRPr lang="en-US" dirty="0"/>
           </a:p>
         </p:txBody>
       </p:sp>
     </p:spTree>
-    <p:extLst>
-      <p:ext uri="{BB962C8B-B14F-4D97-AF65-F5344CB8AC3E}">
-        <p14:creationId xmlns:p14="http://schemas.microsoft.com/office/powerpoint/2010/main" val="3986679929"/>
-      </p:ext>
-    </p:extLst>
   </p:cSld>
   <p:clrMapOvr>
     <a:masterClrMapping/>
@@ -8291,7 +6845,7 @@
 </file>
 
 <file path=ppt/slideLayouts/slideLayout17.xml><?xml version="1.0" encoding="utf-8"?>
-<p:sldLayout xmlns:a="http://schemas.openxmlformats.org/drawingml/2006/main" xmlns:r="http://schemas.openxmlformats.org/officeDocument/2006/relationships" xmlns:p="http://schemas.openxmlformats.org/presentationml/2006/main" showMasterSp="0" type="vertTitleAndTx" preserve="1">
+<p:sldLayout xmlns:a="http://schemas.openxmlformats.org/drawingml/2006/main" xmlns:r="http://schemas.openxmlformats.org/officeDocument/2006/relationships" xmlns:p="http://schemas.openxmlformats.org/presentationml/2006/main" type="vertTitleAndTx" preserve="1" showMasterSp="0">
   <p:cSld name="Vertical Title and Text">
     <p:spTree>
       <p:nvGrpSpPr>
@@ -9149,6 +7703,7 @@
               <a:rPr lang="en-US" dirty="0"/>
               <a:t>Click to edit Master title style</a:t>
             </a:r>
+            <a:endParaRPr lang="en-US" dirty="0"/>
           </a:p>
         </p:txBody>
       </p:sp>
@@ -9177,6 +7732,7 @@
               <a:rPr lang="en-US" dirty="0"/>
               <a:t>Click to edit Master text styles</a:t>
             </a:r>
+            <a:endParaRPr lang="en-US" dirty="0"/>
           </a:p>
           <a:p>
             <a:pPr lvl="1"/>
@@ -9184,6 +7740,7 @@
               <a:rPr lang="en-US" dirty="0"/>
               <a:t>Second level</a:t>
             </a:r>
+            <a:endParaRPr lang="en-US" dirty="0"/>
           </a:p>
           <a:p>
             <a:pPr lvl="2"/>
@@ -9191,6 +7748,7 @@
               <a:rPr lang="en-US" dirty="0"/>
               <a:t>Third level</a:t>
             </a:r>
+            <a:endParaRPr lang="en-US" dirty="0"/>
           </a:p>
           <a:p>
             <a:pPr lvl="3"/>
@@ -9198,6 +7756,7 @@
               <a:rPr lang="en-US" dirty="0"/>
               <a:t>Fourth level</a:t>
             </a:r>
+            <a:endParaRPr lang="en-US" dirty="0"/>
           </a:p>
           <a:p>
             <a:pPr lvl="4"/>
@@ -9205,6 +7764,7 @@
               <a:rPr lang="en-US" dirty="0"/>
               <a:t>Fifth level</a:t>
             </a:r>
+            <a:endParaRPr lang="en-US" dirty="0"/>
           </a:p>
         </p:txBody>
       </p:sp>
@@ -9225,7 +7785,6 @@
           <a:p>
             <a:fld id="{7A24AD68-089C-4467-A8F3-EA2BBCA6B44E}" type="datetimeFigureOut">
               <a:rPr lang="en-US" dirty="0"/>
-              <a:t>2/26/2024</a:t>
             </a:fld>
             <a:endParaRPr lang="en-US" dirty="0"/>
           </a:p>
@@ -9251,6 +7810,7 @@
               <a:t>
               </a:t>
             </a:r>
+            <a:endParaRPr lang="en-US" dirty="0"/>
           </a:p>
         </p:txBody>
       </p:sp>
@@ -9307,19 +7867,12 @@
           <a:p>
             <a:fld id="{D57F1E4F-1CFF-5643-939E-217C01CDF565}" type="slidenum">
               <a:rPr lang="en-US" dirty="0"/>
-              <a:pPr/>
-              <a:t>‹Nº›</a:t>
             </a:fld>
             <a:endParaRPr lang="en-US" dirty="0"/>
           </a:p>
         </p:txBody>
       </p:sp>
     </p:spTree>
-    <p:extLst>
-      <p:ext uri="{BB962C8B-B14F-4D97-AF65-F5344CB8AC3E}">
-        <p14:creationId xmlns:p14="http://schemas.microsoft.com/office/powerpoint/2010/main" val="794537115"/>
-      </p:ext>
-    </p:extLst>
   </p:cSld>
   <p:clrMapOvr>
     <a:masterClrMapping/>
@@ -9363,6 +7916,7 @@
               <a:rPr lang="en-US" dirty="0"/>
               <a:t>Click to edit Master title style</a:t>
             </a:r>
+            <a:endParaRPr lang="en-US" dirty="0"/>
           </a:p>
         </p:txBody>
       </p:sp>
@@ -9386,6 +7940,7 @@
               <a:rPr lang="en-US" dirty="0"/>
               <a:t>Click to edit Master text styles</a:t>
             </a:r>
+            <a:endParaRPr lang="en-US" dirty="0"/>
           </a:p>
           <a:p>
             <a:pPr lvl="1"/>
@@ -9393,6 +7948,7 @@
               <a:rPr lang="en-US" dirty="0"/>
               <a:t>Second level</a:t>
             </a:r>
+            <a:endParaRPr lang="en-US" dirty="0"/>
           </a:p>
           <a:p>
             <a:pPr lvl="2"/>
@@ -9400,6 +7956,7 @@
               <a:rPr lang="en-US" dirty="0"/>
               <a:t>Third level</a:t>
             </a:r>
+            <a:endParaRPr lang="en-US" dirty="0"/>
           </a:p>
           <a:p>
             <a:pPr lvl="3"/>
@@ -9407,6 +7964,7 @@
               <a:rPr lang="en-US" dirty="0"/>
               <a:t>Fourth level</a:t>
             </a:r>
+            <a:endParaRPr lang="en-US" dirty="0"/>
           </a:p>
           <a:p>
             <a:pPr lvl="4"/>
@@ -9414,6 +7972,7 @@
               <a:rPr lang="en-US" dirty="0"/>
               <a:t>Fifth level</a:t>
             </a:r>
+            <a:endParaRPr lang="en-US" dirty="0"/>
           </a:p>
         </p:txBody>
       </p:sp>
@@ -9434,7 +7993,6 @@
           <a:p>
             <a:fld id="{75C51FCE-E4BB-4680-8E50-3C0E348D2609}" type="datetimeFigureOut">
               <a:rPr lang="en-US" dirty="0"/>
-              <a:t>2/26/2024</a:t>
             </a:fld>
             <a:endParaRPr lang="en-US" dirty="0"/>
           </a:p>
@@ -9460,6 +8018,7 @@
               <a:t>
               </a:t>
             </a:r>
+            <a:endParaRPr lang="en-US" dirty="0"/>
           </a:p>
         </p:txBody>
       </p:sp>
@@ -9480,19 +8039,12 @@
           <a:p>
             <a:fld id="{D57F1E4F-1CFF-5643-939E-217C01CDF565}" type="slidenum">
               <a:rPr lang="en-US" dirty="0"/>
-              <a:pPr/>
-              <a:t>‹Nº›</a:t>
             </a:fld>
             <a:endParaRPr lang="en-US" dirty="0"/>
           </a:p>
         </p:txBody>
       </p:sp>
     </p:spTree>
-    <p:extLst>
-      <p:ext uri="{BB962C8B-B14F-4D97-AF65-F5344CB8AC3E}">
-        <p14:creationId xmlns:p14="http://schemas.microsoft.com/office/powerpoint/2010/main" val="1769237584"/>
-      </p:ext>
-    </p:extLst>
   </p:cSld>
   <p:clrMapOvr>
     <a:masterClrMapping/>
@@ -9501,7 +8053,7 @@
 </file>
 
 <file path=ppt/slideLayouts/slideLayout3.xml><?xml version="1.0" encoding="utf-8"?>
-<p:sldLayout xmlns:a="http://schemas.openxmlformats.org/drawingml/2006/main" xmlns:r="http://schemas.openxmlformats.org/officeDocument/2006/relationships" xmlns:p="http://schemas.openxmlformats.org/presentationml/2006/main" showMasterSp="0" type="secHead" preserve="1">
+<p:sldLayout xmlns:a="http://schemas.openxmlformats.org/drawingml/2006/main" xmlns:r="http://schemas.openxmlformats.org/officeDocument/2006/relationships" xmlns:p="http://schemas.openxmlformats.org/presentationml/2006/main" type="secHead" preserve="1" showMasterSp="0">
   <p:cSld name="Section Header">
     <p:spTree>
       <p:nvGrpSpPr>
@@ -10363,6 +8915,7 @@
               <a:rPr lang="en-US" dirty="0"/>
               <a:t>Click to edit Master title style</a:t>
             </a:r>
+            <a:endParaRPr lang="en-US" dirty="0"/>
           </a:p>
         </p:txBody>
       </p:sp>
@@ -10480,6 +9033,7 @@
               <a:rPr lang="en-US" dirty="0"/>
               <a:t>Click to edit Master text styles</a:t>
             </a:r>
+            <a:endParaRPr lang="en-US" dirty="0"/>
           </a:p>
         </p:txBody>
       </p:sp>
@@ -10500,7 +9054,6 @@
           <a:p>
             <a:fld id="{8AAA073D-A903-47F8-8D16-77642FB0DF1F}" type="datetimeFigureOut">
               <a:rPr lang="en-US" dirty="0"/>
-              <a:t>2/26/2024</a:t>
             </a:fld>
             <a:endParaRPr lang="en-US" dirty="0"/>
           </a:p>
@@ -10526,6 +9079,7 @@
               <a:t>
               </a:t>
             </a:r>
+            <a:endParaRPr lang="en-US" dirty="0"/>
           </a:p>
         </p:txBody>
       </p:sp>
@@ -10582,19 +9136,12 @@
           <a:p>
             <a:fld id="{D57F1E4F-1CFF-5643-939E-217C01CDF565}" type="slidenum">
               <a:rPr lang="en-US" dirty="0"/>
-              <a:pPr/>
-              <a:t>‹Nº›</a:t>
             </a:fld>
             <a:endParaRPr lang="en-US" dirty="0"/>
           </a:p>
         </p:txBody>
       </p:sp>
     </p:spTree>
-    <p:extLst>
-      <p:ext uri="{BB962C8B-B14F-4D97-AF65-F5344CB8AC3E}">
-        <p14:creationId xmlns:p14="http://schemas.microsoft.com/office/powerpoint/2010/main" val="3967885434"/>
-      </p:ext>
-    </p:extLst>
   </p:cSld>
   <p:clrMapOvr>
     <a:masterClrMapping/>
@@ -10638,6 +9185,7 @@
               <a:rPr lang="en-US" dirty="0"/>
               <a:t>Click to edit Master title style</a:t>
             </a:r>
+            <a:endParaRPr lang="en-US" dirty="0"/>
           </a:p>
         </p:txBody>
       </p:sp>
@@ -10668,6 +9216,7 @@
               <a:rPr lang="en-US" dirty="0"/>
               <a:t>Click to edit Master text styles</a:t>
             </a:r>
+            <a:endParaRPr lang="en-US" dirty="0"/>
           </a:p>
           <a:p>
             <a:pPr lvl="1"/>
@@ -10675,6 +9224,7 @@
               <a:rPr lang="en-US" dirty="0"/>
               <a:t>Second level</a:t>
             </a:r>
+            <a:endParaRPr lang="en-US" dirty="0"/>
           </a:p>
           <a:p>
             <a:pPr lvl="2"/>
@@ -10682,6 +9232,7 @@
               <a:rPr lang="en-US" dirty="0"/>
               <a:t>Third level</a:t>
             </a:r>
+            <a:endParaRPr lang="en-US" dirty="0"/>
           </a:p>
           <a:p>
             <a:pPr lvl="3"/>
@@ -10689,6 +9240,7 @@
               <a:rPr lang="en-US" dirty="0"/>
               <a:t>Fourth level</a:t>
             </a:r>
+            <a:endParaRPr lang="en-US" dirty="0"/>
           </a:p>
           <a:p>
             <a:pPr lvl="4"/>
@@ -10696,6 +9248,7 @@
               <a:rPr lang="en-US" dirty="0"/>
               <a:t>Fifth level</a:t>
             </a:r>
+            <a:endParaRPr lang="en-US" dirty="0"/>
           </a:p>
         </p:txBody>
       </p:sp>
@@ -10726,6 +9279,7 @@
               <a:rPr lang="en-US" dirty="0"/>
               <a:t>Click to edit Master text styles</a:t>
             </a:r>
+            <a:endParaRPr lang="en-US" dirty="0"/>
           </a:p>
           <a:p>
             <a:pPr lvl="1"/>
@@ -10733,6 +9287,7 @@
               <a:rPr lang="en-US" dirty="0"/>
               <a:t>Second level</a:t>
             </a:r>
+            <a:endParaRPr lang="en-US" dirty="0"/>
           </a:p>
           <a:p>
             <a:pPr lvl="2"/>
@@ -10740,6 +9295,7 @@
               <a:rPr lang="en-US" dirty="0"/>
               <a:t>Third level</a:t>
             </a:r>
+            <a:endParaRPr lang="en-US" dirty="0"/>
           </a:p>
           <a:p>
             <a:pPr lvl="3"/>
@@ -10747,6 +9303,7 @@
               <a:rPr lang="en-US" dirty="0"/>
               <a:t>Fourth level</a:t>
             </a:r>
+            <a:endParaRPr lang="en-US" dirty="0"/>
           </a:p>
           <a:p>
             <a:pPr lvl="4"/>
@@ -10754,6 +9311,7 @@
               <a:rPr lang="en-US" dirty="0"/>
               <a:t>Fifth level</a:t>
             </a:r>
+            <a:endParaRPr lang="en-US" dirty="0"/>
           </a:p>
         </p:txBody>
       </p:sp>
@@ -10774,7 +9332,6 @@
           <a:p>
             <a:fld id="{AB91FA40-626B-4CA1-85D0-7A9016E395BA}" type="datetimeFigureOut">
               <a:rPr lang="en-US" dirty="0"/>
-              <a:t>2/26/2024</a:t>
             </a:fld>
             <a:endParaRPr lang="en-US" dirty="0"/>
           </a:p>
@@ -10800,6 +9357,7 @@
               <a:t>
               </a:t>
             </a:r>
+            <a:endParaRPr lang="en-US" dirty="0"/>
           </a:p>
         </p:txBody>
       </p:sp>
@@ -10820,19 +9378,12 @@
           <a:p>
             <a:fld id="{D57F1E4F-1CFF-5643-939E-217C01CDF565}" type="slidenum">
               <a:rPr lang="en-US" dirty="0"/>
-              <a:pPr/>
-              <a:t>‹Nº›</a:t>
             </a:fld>
             <a:endParaRPr lang="en-US" dirty="0"/>
           </a:p>
         </p:txBody>
       </p:sp>
     </p:spTree>
-    <p:extLst>
-      <p:ext uri="{BB962C8B-B14F-4D97-AF65-F5344CB8AC3E}">
-        <p14:creationId xmlns:p14="http://schemas.microsoft.com/office/powerpoint/2010/main" val="1023526086"/>
-      </p:ext>
-    </p:extLst>
   </p:cSld>
   <p:clrMapOvr>
     <a:masterClrMapping/>
@@ -10880,6 +9431,7 @@
               <a:rPr lang="en-US" dirty="0"/>
               <a:t>Click to edit Master title style</a:t>
             </a:r>
+            <a:endParaRPr lang="en-US" dirty="0"/>
           </a:p>
         </p:txBody>
       </p:sp>
@@ -10951,6 +9503,7 @@
               <a:rPr lang="en-US" dirty="0"/>
               <a:t>Click to edit Master text styles</a:t>
             </a:r>
+            <a:endParaRPr lang="en-US" dirty="0"/>
           </a:p>
         </p:txBody>
       </p:sp>
@@ -10981,6 +9534,7 @@
               <a:rPr lang="en-US" dirty="0"/>
               <a:t>Click to edit Master text styles</a:t>
             </a:r>
+            <a:endParaRPr lang="en-US" dirty="0"/>
           </a:p>
           <a:p>
             <a:pPr lvl="1"/>
@@ -10988,6 +9542,7 @@
               <a:rPr lang="en-US" dirty="0"/>
               <a:t>Second level</a:t>
             </a:r>
+            <a:endParaRPr lang="en-US" dirty="0"/>
           </a:p>
           <a:p>
             <a:pPr lvl="2"/>
@@ -10995,6 +9550,7 @@
               <a:rPr lang="en-US" dirty="0"/>
               <a:t>Third level</a:t>
             </a:r>
+            <a:endParaRPr lang="en-US" dirty="0"/>
           </a:p>
           <a:p>
             <a:pPr lvl="3"/>
@@ -11002,6 +9558,7 @@
               <a:rPr lang="en-US" dirty="0"/>
               <a:t>Fourth level</a:t>
             </a:r>
+            <a:endParaRPr lang="en-US" dirty="0"/>
           </a:p>
           <a:p>
             <a:pPr lvl="4"/>
@@ -11009,6 +9566,7 @@
               <a:rPr lang="en-US" dirty="0"/>
               <a:t>Fifth level</a:t>
             </a:r>
+            <a:endParaRPr lang="en-US" dirty="0"/>
           </a:p>
         </p:txBody>
       </p:sp>
@@ -11080,6 +9638,7 @@
               <a:rPr lang="en-US" dirty="0"/>
               <a:t>Click to edit Master text styles</a:t>
             </a:r>
+            <a:endParaRPr lang="en-US" dirty="0"/>
           </a:p>
         </p:txBody>
       </p:sp>
@@ -11110,6 +9669,7 @@
               <a:rPr lang="en-US" dirty="0"/>
               <a:t>Click to edit Master text styles</a:t>
             </a:r>
+            <a:endParaRPr lang="en-US" dirty="0"/>
           </a:p>
           <a:p>
             <a:pPr lvl="1"/>
@@ -11117,6 +9677,7 @@
               <a:rPr lang="en-US" dirty="0"/>
               <a:t>Second level</a:t>
             </a:r>
+            <a:endParaRPr lang="en-US" dirty="0"/>
           </a:p>
           <a:p>
             <a:pPr lvl="2"/>
@@ -11124,6 +9685,7 @@
               <a:rPr lang="en-US" dirty="0"/>
               <a:t>Third level</a:t>
             </a:r>
+            <a:endParaRPr lang="en-US" dirty="0"/>
           </a:p>
           <a:p>
             <a:pPr lvl="3"/>
@@ -11131,6 +9693,7 @@
               <a:rPr lang="en-US" dirty="0"/>
               <a:t>Fourth level</a:t>
             </a:r>
+            <a:endParaRPr lang="en-US" dirty="0"/>
           </a:p>
           <a:p>
             <a:pPr lvl="4"/>
@@ -11138,6 +9701,7 @@
               <a:rPr lang="en-US" dirty="0"/>
               <a:t>Fifth level</a:t>
             </a:r>
+            <a:endParaRPr lang="en-US" dirty="0"/>
           </a:p>
         </p:txBody>
       </p:sp>
@@ -11158,7 +9722,6 @@
           <a:p>
             <a:fld id="{C3F425EA-B9DC-48A7-991E-9A82573B1B21}" type="datetimeFigureOut">
               <a:rPr lang="en-US" dirty="0"/>
-              <a:t>2/26/2024</a:t>
             </a:fld>
             <a:endParaRPr lang="en-US" dirty="0"/>
           </a:p>
@@ -11184,6 +9747,7 @@
               <a:t>
               </a:t>
             </a:r>
+            <a:endParaRPr lang="en-US" dirty="0"/>
           </a:p>
         </p:txBody>
       </p:sp>
@@ -11204,19 +9768,12 @@
           <a:p>
             <a:fld id="{D57F1E4F-1CFF-5643-939E-217C01CDF565}" type="slidenum">
               <a:rPr lang="en-US" dirty="0"/>
-              <a:pPr/>
-              <a:t>‹Nº›</a:t>
             </a:fld>
             <a:endParaRPr lang="en-US" dirty="0"/>
           </a:p>
         </p:txBody>
       </p:sp>
     </p:spTree>
-    <p:extLst>
-      <p:ext uri="{BB962C8B-B14F-4D97-AF65-F5344CB8AC3E}">
-        <p14:creationId xmlns:p14="http://schemas.microsoft.com/office/powerpoint/2010/main" val="1608711262"/>
-      </p:ext>
-    </p:extLst>
   </p:cSld>
   <p:clrMapOvr>
     <a:masterClrMapping/>
@@ -11260,6 +9817,7 @@
               <a:rPr lang="en-US" dirty="0"/>
               <a:t>Click to edit Master title style</a:t>
             </a:r>
+            <a:endParaRPr lang="en-US" dirty="0"/>
           </a:p>
         </p:txBody>
       </p:sp>
@@ -11280,7 +9838,6 @@
           <a:p>
             <a:fld id="{66CB97F8-6CEB-469B-AFCC-889F2A2B1D5A}" type="datetimeFigureOut">
               <a:rPr lang="en-US" dirty="0"/>
-              <a:t>2/26/2024</a:t>
             </a:fld>
             <a:endParaRPr lang="en-US" dirty="0"/>
           </a:p>
@@ -11306,6 +9863,7 @@
               <a:t>
               </a:t>
             </a:r>
+            <a:endParaRPr lang="en-US" dirty="0"/>
           </a:p>
         </p:txBody>
       </p:sp>
@@ -11326,19 +9884,12 @@
           <a:p>
             <a:fld id="{D57F1E4F-1CFF-5643-939E-217C01CDF565}" type="slidenum">
               <a:rPr lang="en-US" dirty="0"/>
-              <a:pPr/>
-              <a:t>‹Nº›</a:t>
             </a:fld>
             <a:endParaRPr lang="en-US" dirty="0"/>
           </a:p>
         </p:txBody>
       </p:sp>
     </p:spTree>
-    <p:extLst>
-      <p:ext uri="{BB962C8B-B14F-4D97-AF65-F5344CB8AC3E}">
-        <p14:creationId xmlns:p14="http://schemas.microsoft.com/office/powerpoint/2010/main" val="327605847"/>
-      </p:ext>
-    </p:extLst>
   </p:cSld>
   <p:clrMapOvr>
     <a:masterClrMapping/>
@@ -11347,7 +9898,7 @@
 </file>
 
 <file path=ppt/slideLayouts/slideLayout7.xml><?xml version="1.0" encoding="utf-8"?>
-<p:sldLayout xmlns:a="http://schemas.openxmlformats.org/drawingml/2006/main" xmlns:r="http://schemas.openxmlformats.org/officeDocument/2006/relationships" xmlns:p="http://schemas.openxmlformats.org/presentationml/2006/main" showMasterSp="0" type="blank" preserve="1">
+<p:sldLayout xmlns:a="http://schemas.openxmlformats.org/drawingml/2006/main" xmlns:r="http://schemas.openxmlformats.org/officeDocument/2006/relationships" xmlns:p="http://schemas.openxmlformats.org/presentationml/2006/main" type="blank" preserve="1" showMasterSp="0">
   <p:cSld name="Blank">
     <p:spTree>
       <p:nvGrpSpPr>
@@ -11380,7 +9931,6 @@
           <a:p>
             <a:fld id="{8FA9179F-009E-4FA5-B091-7EBB82A185BD}" type="datetimeFigureOut">
               <a:rPr lang="en-US" dirty="0"/>
-              <a:t>2/26/2024</a:t>
             </a:fld>
             <a:endParaRPr lang="en-US" dirty="0"/>
           </a:p>
@@ -11406,6 +9956,7 @@
               <a:t>
               </a:t>
             </a:r>
+            <a:endParaRPr lang="en-US" dirty="0"/>
           </a:p>
         </p:txBody>
       </p:sp>
@@ -11462,19 +10013,12 @@
           <a:p>
             <a:fld id="{D57F1E4F-1CFF-5643-939E-217C01CDF565}" type="slidenum">
               <a:rPr lang="en-US" dirty="0"/>
-              <a:pPr/>
-              <a:t>‹Nº›</a:t>
             </a:fld>
             <a:endParaRPr lang="en-US" dirty="0"/>
           </a:p>
         </p:txBody>
       </p:sp>
     </p:spTree>
-    <p:extLst>
-      <p:ext uri="{BB962C8B-B14F-4D97-AF65-F5344CB8AC3E}">
-        <p14:creationId xmlns:p14="http://schemas.microsoft.com/office/powerpoint/2010/main" val="1340810071"/>
-      </p:ext>
-    </p:extLst>
   </p:cSld>
   <p:clrMapOvr>
     <a:masterClrMapping/>
@@ -11483,7 +10027,7 @@
 </file>
 
 <file path=ppt/slideLayouts/slideLayout8.xml><?xml version="1.0" encoding="utf-8"?>
-<p:sldLayout xmlns:a="http://schemas.openxmlformats.org/drawingml/2006/main" xmlns:r="http://schemas.openxmlformats.org/officeDocument/2006/relationships" xmlns:p="http://schemas.openxmlformats.org/presentationml/2006/main" showMasterSp="0" type="objTx" preserve="1">
+<p:sldLayout xmlns:a="http://schemas.openxmlformats.org/drawingml/2006/main" xmlns:r="http://schemas.openxmlformats.org/officeDocument/2006/relationships" xmlns:p="http://schemas.openxmlformats.org/presentationml/2006/main" type="objTx" preserve="1" showMasterSp="0">
   <p:cSld name="Content with Caption">
     <p:spTree>
       <p:nvGrpSpPr>
@@ -12345,6 +10889,7 @@
               <a:rPr lang="en-US" dirty="0"/>
               <a:t>Click to edit Master title style</a:t>
             </a:r>
+            <a:endParaRPr lang="en-US" dirty="0"/>
           </a:p>
         </p:txBody>
       </p:sp>
@@ -12375,6 +10920,7 @@
               <a:rPr lang="en-US" dirty="0"/>
               <a:t>Click to edit Master text styles</a:t>
             </a:r>
+            <a:endParaRPr lang="en-US" dirty="0"/>
           </a:p>
           <a:p>
             <a:pPr lvl="1"/>
@@ -12382,6 +10928,7 @@
               <a:rPr lang="en-US" dirty="0"/>
               <a:t>Second level</a:t>
             </a:r>
+            <a:endParaRPr lang="en-US" dirty="0"/>
           </a:p>
           <a:p>
             <a:pPr lvl="2"/>
@@ -12389,6 +10936,7 @@
               <a:rPr lang="en-US" dirty="0"/>
               <a:t>Third level</a:t>
             </a:r>
+            <a:endParaRPr lang="en-US" dirty="0"/>
           </a:p>
           <a:p>
             <a:pPr lvl="3"/>
@@ -12396,6 +10944,7 @@
               <a:rPr lang="en-US" dirty="0"/>
               <a:t>Fourth level</a:t>
             </a:r>
+            <a:endParaRPr lang="en-US" dirty="0"/>
           </a:p>
           <a:p>
             <a:pPr lvl="4"/>
@@ -12403,6 +10952,7 @@
               <a:rPr lang="en-US" dirty="0"/>
               <a:t>Fifth level</a:t>
             </a:r>
+            <a:endParaRPr lang="en-US" dirty="0"/>
           </a:p>
         </p:txBody>
       </p:sp>
@@ -12472,6 +11022,7 @@
               <a:rPr lang="en-US" dirty="0"/>
               <a:t>Click to edit Master text styles</a:t>
             </a:r>
+            <a:endParaRPr lang="en-US" dirty="0"/>
           </a:p>
         </p:txBody>
       </p:sp>
@@ -12492,7 +11043,6 @@
           <a:p>
             <a:fld id="{8E665CEB-0076-4E37-B880-BCEA9784DE0A}" type="datetimeFigureOut">
               <a:rPr lang="en-US" dirty="0"/>
-              <a:t>2/26/2024</a:t>
             </a:fld>
             <a:endParaRPr lang="en-US" dirty="0"/>
           </a:p>
@@ -12518,6 +11068,7 @@
               <a:t>
               </a:t>
             </a:r>
+            <a:endParaRPr lang="en-US" dirty="0"/>
           </a:p>
         </p:txBody>
       </p:sp>
@@ -12574,19 +11125,12 @@
           <a:p>
             <a:fld id="{D57F1E4F-1CFF-5643-939E-217C01CDF565}" type="slidenum">
               <a:rPr lang="en-US" dirty="0"/>
-              <a:pPr/>
-              <a:t>‹Nº›</a:t>
             </a:fld>
             <a:endParaRPr lang="en-US" dirty="0"/>
           </a:p>
         </p:txBody>
       </p:sp>
     </p:spTree>
-    <p:extLst>
-      <p:ext uri="{BB962C8B-B14F-4D97-AF65-F5344CB8AC3E}">
-        <p14:creationId xmlns:p14="http://schemas.microsoft.com/office/powerpoint/2010/main" val="1454383100"/>
-      </p:ext>
-    </p:extLst>
   </p:cSld>
   <p:clrMapOvr>
     <a:masterClrMapping/>
@@ -12595,7 +11139,7 @@
 </file>
 
 <file path=ppt/slideLayouts/slideLayout9.xml><?xml version="1.0" encoding="utf-8"?>
-<p:sldLayout xmlns:a="http://schemas.openxmlformats.org/drawingml/2006/main" xmlns:r="http://schemas.openxmlformats.org/officeDocument/2006/relationships" xmlns:p="http://schemas.openxmlformats.org/presentationml/2006/main" showMasterSp="0" type="picTx" preserve="1">
+<p:sldLayout xmlns:a="http://schemas.openxmlformats.org/drawingml/2006/main" xmlns:r="http://schemas.openxmlformats.org/officeDocument/2006/relationships" xmlns:p="http://schemas.openxmlformats.org/presentationml/2006/main" type="picTx" preserve="1" showMasterSp="0">
   <p:cSld name="Picture with Caption">
     <p:spTree>
       <p:nvGrpSpPr>
@@ -13459,6 +12003,7 @@
               <a:rPr lang="en-US" dirty="0"/>
               <a:t>Click to edit Master title style</a:t>
             </a:r>
+            <a:endParaRPr lang="en-US" dirty="0"/>
           </a:p>
         </p:txBody>
       </p:sp>
@@ -13605,6 +12150,7 @@
               <a:rPr lang="en-US" dirty="0"/>
               <a:t>Click to edit Master text styles</a:t>
             </a:r>
+            <a:endParaRPr lang="en-US" dirty="0"/>
           </a:p>
         </p:txBody>
       </p:sp>
@@ -13625,7 +12171,6 @@
           <a:p>
             <a:fld id="{A6149E5E-3896-4118-99A7-7B85668F1C5E}" type="datetimeFigureOut">
               <a:rPr lang="en-US" dirty="0"/>
-              <a:t>2/26/2024</a:t>
             </a:fld>
             <a:endParaRPr lang="en-US" dirty="0"/>
           </a:p>
@@ -13651,6 +12196,7 @@
               <a:t>
               </a:t>
             </a:r>
+            <a:endParaRPr lang="en-US" dirty="0"/>
           </a:p>
         </p:txBody>
       </p:sp>
@@ -13707,19 +12253,12 @@
           <a:p>
             <a:fld id="{D57F1E4F-1CFF-5643-939E-217C01CDF565}" type="slidenum">
               <a:rPr lang="en-US" dirty="0"/>
-              <a:pPr/>
-              <a:t>‹Nº›</a:t>
             </a:fld>
             <a:endParaRPr lang="en-US" dirty="0"/>
           </a:p>
         </p:txBody>
       </p:sp>
     </p:spTree>
-    <p:extLst>
-      <p:ext uri="{BB962C8B-B14F-4D97-AF65-F5344CB8AC3E}">
-        <p14:creationId xmlns:p14="http://schemas.microsoft.com/office/powerpoint/2010/main" val="658385471"/>
-      </p:ext>
-    </p:extLst>
   </p:cSld>
   <p:clrMapOvr>
     <a:masterClrMapping/>
@@ -13778,7 +12317,7 @@
               <a:avLst/>
             </a:prstGeom>
             <a:blipFill>
-              <a:blip r:embed="rId19">
+              <a:blip r:embed="rId18">
                 <a:duotone>
                   <a:schemeClr val="dk2">
                     <a:shade val="62000"/>
@@ -14559,6 +13098,7 @@
               <a:rPr lang="en-US" dirty="0"/>
               <a:t>Click to edit Master title style</a:t>
             </a:r>
+            <a:endParaRPr lang="en-US" dirty="0"/>
           </a:p>
         </p:txBody>
       </p:sp>
@@ -14592,6 +13132,7 @@
               <a:rPr lang="en-US" dirty="0"/>
               <a:t>Click to edit Master text styles</a:t>
             </a:r>
+            <a:endParaRPr lang="en-US" dirty="0"/>
           </a:p>
           <a:p>
             <a:pPr lvl="1"/>
@@ -14599,6 +13140,7 @@
               <a:rPr lang="en-US" dirty="0"/>
               <a:t>Second level</a:t>
             </a:r>
+            <a:endParaRPr lang="en-US" dirty="0"/>
           </a:p>
           <a:p>
             <a:pPr lvl="2"/>
@@ -14606,6 +13148,7 @@
               <a:rPr lang="en-US" dirty="0"/>
               <a:t>Third level</a:t>
             </a:r>
+            <a:endParaRPr lang="en-US" dirty="0"/>
           </a:p>
           <a:p>
             <a:pPr lvl="3"/>
@@ -14613,6 +13156,7 @@
               <a:rPr lang="en-US" dirty="0"/>
               <a:t>Fourth level</a:t>
             </a:r>
+            <a:endParaRPr lang="en-US" dirty="0"/>
           </a:p>
           <a:p>
             <a:pPr lvl="4"/>
@@ -14620,6 +13164,7 @@
               <a:rPr lang="en-US" dirty="0"/>
               <a:t>Fifth level</a:t>
             </a:r>
+            <a:endParaRPr lang="en-US" dirty="0"/>
           </a:p>
         </p:txBody>
       </p:sp>
@@ -14656,7 +13201,6 @@
           <a:p>
             <a:fld id="{7E0D914D-B099-4142-A885-11F276715148}" type="datetimeFigureOut">
               <a:rPr lang="en-US" dirty="0"/>
-              <a:t>2/26/2024</a:t>
             </a:fld>
             <a:endParaRPr lang="en-US" dirty="0"/>
           </a:p>
@@ -14699,6 +13243,7 @@
               <a:t>
               </a:t>
             </a:r>
+            <a:endParaRPr lang="en-US" dirty="0"/>
           </a:p>
         </p:txBody>
       </p:sp>
@@ -14772,39 +13317,32 @@
           <a:p>
             <a:fld id="{D57F1E4F-1CFF-5643-939E-217C01CDF565}" type="slidenum">
               <a:rPr lang="en-US" dirty="0"/>
-              <a:pPr/>
-              <a:t>‹Nº›</a:t>
             </a:fld>
             <a:endParaRPr lang="en-US" dirty="0"/>
           </a:p>
         </p:txBody>
       </p:sp>
     </p:spTree>
-    <p:extLst>
-      <p:ext uri="{BB962C8B-B14F-4D97-AF65-F5344CB8AC3E}">
-        <p14:creationId xmlns:p14="http://schemas.microsoft.com/office/powerpoint/2010/main" val="2637347305"/>
-      </p:ext>
-    </p:extLst>
   </p:cSld>
   <p:clrMap bg1="lt1" tx1="dk1" bg2="lt2" tx2="dk2" accent1="accent1" accent2="accent2" accent3="accent3" accent4="accent4" accent5="accent5" accent6="accent6" hlink="hlink" folHlink="folHlink"/>
   <p:sldLayoutIdLst>
-    <p:sldLayoutId id="2147483729" r:id="rId1"/>
-    <p:sldLayoutId id="2147483730" r:id="rId2"/>
-    <p:sldLayoutId id="2147483731" r:id="rId3"/>
-    <p:sldLayoutId id="2147483732" r:id="rId4"/>
-    <p:sldLayoutId id="2147483733" r:id="rId5"/>
-    <p:sldLayoutId id="2147483734" r:id="rId6"/>
-    <p:sldLayoutId id="2147483735" r:id="rId7"/>
-    <p:sldLayoutId id="2147483736" r:id="rId8"/>
-    <p:sldLayoutId id="2147483737" r:id="rId9"/>
-    <p:sldLayoutId id="2147483738" r:id="rId10"/>
-    <p:sldLayoutId id="2147483739" r:id="rId11"/>
-    <p:sldLayoutId id="2147483740" r:id="rId12"/>
-    <p:sldLayoutId id="2147483741" r:id="rId13"/>
-    <p:sldLayoutId id="2147483742" r:id="rId14"/>
-    <p:sldLayoutId id="2147483743" r:id="rId15"/>
-    <p:sldLayoutId id="2147483744" r:id="rId16"/>
-    <p:sldLayoutId id="2147483745" r:id="rId17"/>
+    <p:sldLayoutId id="2147483649" r:id="rId1"/>
+    <p:sldLayoutId id="2147483650" r:id="rId2"/>
+    <p:sldLayoutId id="2147483651" r:id="rId3"/>
+    <p:sldLayoutId id="2147483652" r:id="rId4"/>
+    <p:sldLayoutId id="2147483653" r:id="rId5"/>
+    <p:sldLayoutId id="2147483654" r:id="rId6"/>
+    <p:sldLayoutId id="2147483655" r:id="rId7"/>
+    <p:sldLayoutId id="2147483656" r:id="rId8"/>
+    <p:sldLayoutId id="2147483657" r:id="rId9"/>
+    <p:sldLayoutId id="2147483658" r:id="rId10"/>
+    <p:sldLayoutId id="2147483659" r:id="rId11"/>
+    <p:sldLayoutId id="2147483660" r:id="rId12"/>
+    <p:sldLayoutId id="2147483661" r:id="rId13"/>
+    <p:sldLayoutId id="2147483662" r:id="rId14"/>
+    <p:sldLayoutId id="2147483663" r:id="rId15"/>
+    <p:sldLayoutId id="2147483664" r:id="rId16"/>
+    <p:sldLayoutId id="2147483665" r:id="rId17"/>
   </p:sldLayoutIdLst>
   <p:hf sldNum="0" hdr="0" ftr="0" dt="0"/>
   <p:txStyles>
@@ -14892,7 +13430,7 @@
           <a:schemeClr val="accent1"/>
         </a:buClr>
         <a:buSzPct val="80000"/>
-        <a:buFont typeface="Wingdings 3" charset="2"/>
+        <a:buFont typeface="Wingdings 3" panose="05040102010807070707" charset="2"/>
         <a:buChar char=""/>
         <a:defRPr sz="1800" b="0" i="0" kern="1200">
           <a:solidFill>
@@ -14917,7 +13455,7 @@
           <a:schemeClr val="accent1"/>
         </a:buClr>
         <a:buSzPct val="80000"/>
-        <a:buFont typeface="Wingdings 3" charset="2"/>
+        <a:buFont typeface="Wingdings 3" panose="05040102010807070707" charset="2"/>
         <a:buChar char=""/>
         <a:defRPr sz="1600" b="0" i="0" kern="1200">
           <a:solidFill>
@@ -14942,7 +13480,7 @@
           <a:schemeClr val="accent1"/>
         </a:buClr>
         <a:buSzPct val="80000"/>
-        <a:buFont typeface="Wingdings 3" charset="2"/>
+        <a:buFont typeface="Wingdings 3" panose="05040102010807070707" charset="2"/>
         <a:buChar char=""/>
         <a:defRPr sz="1400" b="0" i="0" kern="1200">
           <a:solidFill>
@@ -14967,7 +13505,7 @@
           <a:schemeClr val="accent1"/>
         </a:buClr>
         <a:buSzPct val="80000"/>
-        <a:buFont typeface="Wingdings 3" charset="2"/>
+        <a:buFont typeface="Wingdings 3" panose="05040102010807070707" charset="2"/>
         <a:buChar char=""/>
         <a:defRPr sz="1200" b="0" i="0" kern="1200">
           <a:solidFill>
@@ -14992,7 +13530,7 @@
           <a:schemeClr val="accent1"/>
         </a:buClr>
         <a:buSzPct val="80000"/>
-        <a:buFont typeface="Wingdings 3" charset="2"/>
+        <a:buFont typeface="Wingdings 3" panose="05040102010807070707" charset="2"/>
         <a:buChar char=""/>
         <a:defRPr sz="1200" b="0" i="0" kern="1200">
           <a:solidFill>
@@ -15017,7 +13555,7 @@
           <a:schemeClr val="accent1"/>
         </a:buClr>
         <a:buSzPct val="80000"/>
-        <a:buFont typeface="Wingdings 3" charset="2"/>
+        <a:buFont typeface="Wingdings 3" panose="05040102010807070707" charset="2"/>
         <a:buChar char=""/>
         <a:defRPr sz="1200" b="0" i="0" kern="1200">
           <a:solidFill>
@@ -15042,7 +13580,7 @@
           <a:schemeClr val="accent1"/>
         </a:buClr>
         <a:buSzPct val="80000"/>
-        <a:buFont typeface="Wingdings 3" charset="2"/>
+        <a:buFont typeface="Wingdings 3" panose="05040102010807070707" charset="2"/>
         <a:buChar char=""/>
         <a:defRPr sz="1200" b="0" i="0" kern="1200">
           <a:solidFill>
@@ -15067,7 +13605,7 @@
           <a:schemeClr val="accent1"/>
         </a:buClr>
         <a:buSzPct val="80000"/>
-        <a:buFont typeface="Wingdings 3" charset="2"/>
+        <a:buFont typeface="Wingdings 3" panose="05040102010807070707" charset="2"/>
         <a:buChar char=""/>
         <a:defRPr sz="1200" b="0" i="0" kern="1200">
           <a:solidFill>
@@ -15092,7 +13630,7 @@
           <a:schemeClr val="accent1"/>
         </a:buClr>
         <a:buSzPct val="80000"/>
-        <a:buFont typeface="Wingdings 3" charset="2"/>
+        <a:buFont typeface="Wingdings 3" panose="05040102010807070707" charset="2"/>
         <a:buChar char=""/>
         <a:defRPr sz="1200" b="0" i="0" kern="1200">
           <a:solidFill>
@@ -15282,31 +13820,66 @@
         </p:nvSpPr>
         <p:spPr>
           <a:xfrm>
-            <a:off x="1683171" y="5240851"/>
-            <a:ext cx="8825658" cy="828932"/>
+            <a:off x="1683385" y="4404360"/>
+            <a:ext cx="8825865" cy="1664970"/>
           </a:xfrm>
         </p:spPr>
         <p:txBody>
           <a:bodyPr>
-            <a:normAutofit/>
+            <a:normAutofit fontScale="90000"/>
           </a:bodyPr>
           <a:lstStyle/>
           <a:p>
             <a:pPr algn="ctr"/>
-            <a:endParaRPr lang="en-US" sz="2400">
+            <a:r>
+              <a:rPr lang="es-MX" altLang="en-US" sz="2400">
+                <a:solidFill>
+                  <a:schemeClr val="bg1"/>
+                </a:solidFill>
+              </a:rPr>
+              <a:t>Por Jahaziel Aarón aguilera castillo</a:t>
+            </a:r>
+            <a:endParaRPr lang="es-MX" altLang="en-US" sz="2400">
               <a:solidFill>
-                <a:schemeClr val="tx2"/>
+                <a:schemeClr val="bg1"/>
+              </a:solidFill>
+            </a:endParaRPr>
+          </a:p>
+          <a:p>
+            <a:pPr algn="ctr"/>
+            <a:r>
+              <a:rPr lang="es-MX" altLang="en-US" sz="2400">
+                <a:solidFill>
+                  <a:schemeClr val="bg1"/>
+                </a:solidFill>
+              </a:rPr>
+              <a:t>Departamento de tecnologías de la información (DTI)</a:t>
+            </a:r>
+            <a:endParaRPr lang="es-MX" altLang="en-US" sz="2400">
+              <a:solidFill>
+                <a:schemeClr val="bg1"/>
+              </a:solidFill>
+            </a:endParaRPr>
+          </a:p>
+          <a:p>
+            <a:pPr algn="ctr"/>
+            <a:r>
+              <a:rPr lang="es-MX" altLang="en-US" sz="2400">
+                <a:solidFill>
+                  <a:schemeClr val="bg1"/>
+                </a:solidFill>
+              </a:rPr>
+              <a:t>2020</a:t>
+            </a:r>
+            <a:endParaRPr lang="es-MX" altLang="en-US" sz="2400">
+              <a:solidFill>
+                <a:schemeClr val="bg1"/>
               </a:solidFill>
             </a:endParaRPr>
           </a:p>
         </p:txBody>
       </p:sp>
     </p:spTree>
-    <p:extLst>
-      <p:ext uri="{BB962C8B-B14F-4D97-AF65-F5344CB8AC3E}">
-        <p14:creationId xmlns:p14="http://schemas.microsoft.com/office/powerpoint/2010/main" val="356326839"/>
-      </p:ext>
-    </p:extLst>
   </p:cSld>
   <p:clrMapOvr>
     <a:masterClrMapping/>
@@ -15333,13 +13906,7 @@
       </p:grpSpPr>
       <p:sp>
         <p:nvSpPr>
-          <p:cNvPr id="2" name="Título 1">
-            <a:extLst>
-              <a:ext uri="{FF2B5EF4-FFF2-40B4-BE49-F238E27FC236}">
-                <a16:creationId xmlns:a16="http://schemas.microsoft.com/office/drawing/2014/main" id="{45173033-FEFF-4734-96E9-ACCF54786294}"/>
-              </a:ext>
-            </a:extLst>
-          </p:cNvPr>
+          <p:cNvPr id="2" name="Título 1"/>
           <p:cNvSpPr>
             <a:spLocks noGrp="1"/>
           </p:cNvSpPr>
@@ -15358,20 +13925,14 @@
       </p:sp>
       <p:pic>
         <p:nvPicPr>
-          <p:cNvPr id="4" name="Imagen 3" descr="Gráfico, Gráfico de embudo&#10;&#10;Descripción generada automáticamente">
-            <a:extLst>
-              <a:ext uri="{FF2B5EF4-FFF2-40B4-BE49-F238E27FC236}">
-                <a16:creationId xmlns:a16="http://schemas.microsoft.com/office/drawing/2014/main" id="{3B510973-A11E-F6A3-713A-78AF5DECC448}"/>
-              </a:ext>
-            </a:extLst>
-          </p:cNvPr>
+          <p:cNvPr id="4" name="Imagen 3" descr="Gráfico, Gráfico de embudo&#10;&#10;Descripción generada automáticamente"/>
           <p:cNvPicPr>
             <a:picLocks noChangeAspect="1"/>
           </p:cNvPicPr>
           <p:nvPr/>
         </p:nvPicPr>
         <p:blipFill>
-          <a:blip r:embed="rId2"/>
+          <a:blip r:embed="rId1"/>
           <a:stretch>
             <a:fillRect/>
           </a:stretch>
@@ -15388,13 +13949,7 @@
       </p:pic>
       <p:sp>
         <p:nvSpPr>
-          <p:cNvPr id="3" name="Marcador de contenido 2">
-            <a:extLst>
-              <a:ext uri="{FF2B5EF4-FFF2-40B4-BE49-F238E27FC236}">
-                <a16:creationId xmlns:a16="http://schemas.microsoft.com/office/drawing/2014/main" id="{A3288B78-9083-4EB0-B953-6B90C2A1446A}"/>
-              </a:ext>
-            </a:extLst>
-          </p:cNvPr>
+          <p:cNvPr id="3" name="Marcador de contenido 2"/>
           <p:cNvSpPr>
             <a:spLocks noGrp="1"/>
           </p:cNvSpPr>
@@ -15427,11 +13982,6 @@
         </p:txBody>
       </p:sp>
     </p:spTree>
-    <p:extLst>
-      <p:ext uri="{BB962C8B-B14F-4D97-AF65-F5344CB8AC3E}">
-        <p14:creationId xmlns:p14="http://schemas.microsoft.com/office/powerpoint/2010/main" val="3153387729"/>
-      </p:ext>
-    </p:extLst>
   </p:cSld>
   <p:clrMapOvr>
     <a:masterClrMapping/>
@@ -15458,13 +14008,7 @@
       </p:grpSpPr>
       <p:sp>
         <p:nvSpPr>
-          <p:cNvPr id="3" name="Marcador de contenido 2">
-            <a:extLst>
-              <a:ext uri="{FF2B5EF4-FFF2-40B4-BE49-F238E27FC236}">
-                <a16:creationId xmlns:a16="http://schemas.microsoft.com/office/drawing/2014/main" id="{DB50855E-B059-4F66-B5FD-E366D44CD63F}"/>
-              </a:ext>
-            </a:extLst>
-          </p:cNvPr>
+          <p:cNvPr id="3" name="Marcador de contenido 2"/>
           <p:cNvSpPr>
             <a:spLocks noGrp="1"/>
           </p:cNvSpPr>
@@ -15485,9 +14029,14 @@
           <a:lstStyle/>
           <a:p>
             <a:r>
+              <a:rPr lang="es-MX" altLang="es-ES" dirty="0"/>
+              <a:t>Ante las nuevas ofertas de viaje, p</a:t>
+            </a:r>
+            <a:r>
               <a:rPr lang="es-ES" dirty="0"/>
-              <a:t>Proponemos un nuevo proyecto, para la creación de un sistema con el propósito de ofrecer los viajes en la modalidad chárter.</a:t>
+              <a:t>roponemos un nuevo proyecto, para la creación de un sistema con el propósito de ofrecer los viajes en la modalidad chárter.</a:t>
             </a:r>
+            <a:endParaRPr lang="es-ES" dirty="0"/>
           </a:p>
           <a:p>
             <a:endParaRPr lang="es-ES" dirty="0"/>
@@ -15495,11 +14044,6 @@
         </p:txBody>
       </p:sp>
     </p:spTree>
-    <p:extLst>
-      <p:ext uri="{BB962C8B-B14F-4D97-AF65-F5344CB8AC3E}">
-        <p14:creationId xmlns:p14="http://schemas.microsoft.com/office/powerpoint/2010/main" val="3441195643"/>
-      </p:ext>
-    </p:extLst>
   </p:cSld>
   <p:clrMapOvr>
     <a:masterClrMapping/>
@@ -15526,28 +14070,22 @@
       </p:grpSpPr>
       <p:pic>
         <p:nvPicPr>
-          <p:cNvPr id="4" name="Imagen 3" descr="Logotipo, nombre de la empresa&#10;&#10;Descripción generada automáticamente">
-            <a:extLst>
-              <a:ext uri="{FF2B5EF4-FFF2-40B4-BE49-F238E27FC236}">
-                <a16:creationId xmlns:a16="http://schemas.microsoft.com/office/drawing/2014/main" id="{F22849DD-52D6-5125-76D6-782B9B10C26C}"/>
-              </a:ext>
-            </a:extLst>
-          </p:cNvPr>
+          <p:cNvPr id="4" name="Imagen 3" descr="Logotipo, nombre de la empresa&#10;&#10;Descripción generada automáticamente"/>
           <p:cNvPicPr>
             <a:picLocks noChangeAspect="1"/>
           </p:cNvPicPr>
           <p:nvPr/>
         </p:nvPicPr>
         <p:blipFill>
-          <a:blip r:embed="rId2"/>
+          <a:blip r:embed="rId1"/>
           <a:stretch>
             <a:fillRect/>
           </a:stretch>
         </p:blipFill>
         <p:spPr>
           <a:xfrm>
-            <a:off x="0" y="121646"/>
-            <a:ext cx="12192000" cy="6614707"/>
+            <a:off x="0" y="635"/>
+            <a:ext cx="12192000" cy="6857365"/>
           </a:xfrm>
           <a:prstGeom prst="rect">
             <a:avLst/>
@@ -15556,13 +14094,7 @@
       </p:pic>
       <p:sp>
         <p:nvSpPr>
-          <p:cNvPr id="2" name="Título 1">
-            <a:extLst>
-              <a:ext uri="{FF2B5EF4-FFF2-40B4-BE49-F238E27FC236}">
-                <a16:creationId xmlns:a16="http://schemas.microsoft.com/office/drawing/2014/main" id="{B34BF297-5025-4B62-B082-733724A41D19}"/>
-              </a:ext>
-            </a:extLst>
-          </p:cNvPr>
+          <p:cNvPr id="2" name="Título 1"/>
           <p:cNvSpPr>
             <a:spLocks noGrp="1"/>
           </p:cNvSpPr>
@@ -15583,18 +14115,17 @@
               </a:rPr>
               <a:t>VIA</a:t>
             </a:r>
+            <a:endParaRPr lang="es-ES" dirty="0">
+              <a:solidFill>
+                <a:schemeClr val="tx1"/>
+              </a:solidFill>
+            </a:endParaRPr>
           </a:p>
         </p:txBody>
       </p:sp>
       <p:sp>
         <p:nvSpPr>
-          <p:cNvPr id="3" name="Marcador de contenido 2">
-            <a:extLst>
-              <a:ext uri="{FF2B5EF4-FFF2-40B4-BE49-F238E27FC236}">
-                <a16:creationId xmlns:a16="http://schemas.microsoft.com/office/drawing/2014/main" id="{E8D393E4-8CC7-46A9-9296-2C838278ADAC}"/>
-              </a:ext>
-            </a:extLst>
-          </p:cNvPr>
+          <p:cNvPr id="3" name="Marcador de contenido 2"/>
           <p:cNvSpPr>
             <a:spLocks noGrp="1"/>
           </p:cNvSpPr>
@@ -15618,6 +14149,7 @@
               <a:rPr lang="es-ES" dirty="0"/>
               <a:t>El nombre propuesto es "VIA" elegido por</a:t>
             </a:r>
+            <a:endParaRPr lang="es-ES" dirty="0"/>
           </a:p>
           <a:p>
             <a:pPr lvl="1"/>
@@ -15625,6 +14157,7 @@
               <a:rPr lang="es-ES" dirty="0"/>
               <a:t>Su significado, nosotros somos el camino o la manera para viajar.</a:t>
             </a:r>
+            <a:endParaRPr lang="es-ES" dirty="0"/>
           </a:p>
           <a:p>
             <a:pPr lvl="1"/>
@@ -15632,6 +14165,7 @@
               <a:rPr lang="es-ES" dirty="0"/>
               <a:t>Es un palabra corta y fácil de recordar</a:t>
             </a:r>
+            <a:endParaRPr lang="es-ES" dirty="0"/>
           </a:p>
           <a:p>
             <a:pPr lvl="1"/>
@@ -15639,21 +14173,18 @@
               <a:rPr lang="es-ES" dirty="0"/>
               <a:t>Se presta para simplificar el logotipo y darle distintas formas.</a:t>
             </a:r>
+            <a:endParaRPr lang="es-ES" dirty="0"/>
           </a:p>
           <a:p>
             <a:r>
               <a:rPr lang="es-ES" dirty="0"/>
               <a:t>Sitio web via-jes.com</a:t>
             </a:r>
+            <a:endParaRPr lang="es-ES" dirty="0"/>
           </a:p>
         </p:txBody>
       </p:sp>
     </p:spTree>
-    <p:extLst>
-      <p:ext uri="{BB962C8B-B14F-4D97-AF65-F5344CB8AC3E}">
-        <p14:creationId xmlns:p14="http://schemas.microsoft.com/office/powerpoint/2010/main" val="1320597448"/>
-      </p:ext>
-    </p:extLst>
   </p:cSld>
   <p:clrMapOvr>
     <a:masterClrMapping/>
@@ -15680,13 +14211,7 @@
       </p:grpSpPr>
       <p:sp>
         <p:nvSpPr>
-          <p:cNvPr id="2" name="Título 1">
-            <a:extLst>
-              <a:ext uri="{FF2B5EF4-FFF2-40B4-BE49-F238E27FC236}">
-                <a16:creationId xmlns:a16="http://schemas.microsoft.com/office/drawing/2014/main" id="{FB206CEA-7134-4718-95BE-C84733C8593E}"/>
-              </a:ext>
-            </a:extLst>
-          </p:cNvPr>
+          <p:cNvPr id="2" name="Título 1"/>
           <p:cNvSpPr>
             <a:spLocks noGrp="1"/>
           </p:cNvSpPr>
@@ -15703,18 +14228,13 @@
               <a:rPr lang="es-ES"/>
               <a:t>Logotipo y colores</a:t>
             </a:r>
+            <a:endParaRPr lang="es-ES"/>
           </a:p>
         </p:txBody>
       </p:sp>
       <p:pic>
         <p:nvPicPr>
-          <p:cNvPr id="4" name="Imagen 4" descr="Imagen que contiene Logotipo&#10;&#10;Descripción generada automáticamente">
-            <a:extLst>
-              <a:ext uri="{FF2B5EF4-FFF2-40B4-BE49-F238E27FC236}">
-                <a16:creationId xmlns:a16="http://schemas.microsoft.com/office/drawing/2014/main" id="{ABC473B9-0441-423F-A7F2-E308BCB094AC}"/>
-              </a:ext>
-            </a:extLst>
-          </p:cNvPr>
+          <p:cNvPr id="4" name="Imagen 4" descr="Imagen que contiene Logotipo&#10;&#10;Descripción generada automáticamente"/>
           <p:cNvPicPr>
             <a:picLocks noGrp="1" noChangeAspect="1"/>
           </p:cNvPicPr>
@@ -15723,7 +14243,7 @@
           </p:nvPr>
         </p:nvPicPr>
         <p:blipFill>
-          <a:blip r:embed="rId2"/>
+          <a:blip r:embed="rId1"/>
           <a:stretch>
             <a:fillRect/>
           </a:stretch>
@@ -15737,20 +14257,14 @@
       </p:pic>
       <p:pic>
         <p:nvPicPr>
-          <p:cNvPr id="5" name="Imagen 5" descr="Logotipo, Icono&#10;&#10;Descripción generada automáticamente">
-            <a:extLst>
-              <a:ext uri="{FF2B5EF4-FFF2-40B4-BE49-F238E27FC236}">
-                <a16:creationId xmlns:a16="http://schemas.microsoft.com/office/drawing/2014/main" id="{B957269E-1D41-4758-8C08-FED9F8259437}"/>
-              </a:ext>
-            </a:extLst>
-          </p:cNvPr>
+          <p:cNvPr id="5" name="Imagen 5" descr="Logotipo, Icono&#10;&#10;Descripción generada automáticamente"/>
           <p:cNvPicPr>
             <a:picLocks noChangeAspect="1"/>
           </p:cNvPicPr>
           <p:nvPr/>
         </p:nvPicPr>
         <p:blipFill>
-          <a:blip r:embed="rId3"/>
+          <a:blip r:embed="rId2"/>
           <a:stretch>
             <a:fillRect/>
           </a:stretch>
@@ -15766,11 +14280,6 @@
         </p:spPr>
       </p:pic>
     </p:spTree>
-    <p:extLst>
-      <p:ext uri="{BB962C8B-B14F-4D97-AF65-F5344CB8AC3E}">
-        <p14:creationId xmlns:p14="http://schemas.microsoft.com/office/powerpoint/2010/main" val="3932652614"/>
-      </p:ext>
-    </p:extLst>
   </p:cSld>
   <p:clrMapOvr>
     <a:masterClrMapping/>
@@ -15797,13 +14306,7 @@
       </p:grpSpPr>
       <p:sp>
         <p:nvSpPr>
-          <p:cNvPr id="2" name="Título 1">
-            <a:extLst>
-              <a:ext uri="{FF2B5EF4-FFF2-40B4-BE49-F238E27FC236}">
-                <a16:creationId xmlns:a16="http://schemas.microsoft.com/office/drawing/2014/main" id="{5CF97DC1-BA96-498A-9AD5-E80C11E512FE}"/>
-              </a:ext>
-            </a:extLst>
-          </p:cNvPr>
+          <p:cNvPr id="2" name="Título 1"/>
           <p:cNvSpPr>
             <a:spLocks noGrp="1"/>
           </p:cNvSpPr>
@@ -15820,18 +14323,13 @@
               <a:rPr lang="es-ES" dirty="0"/>
               <a:t>Operación</a:t>
             </a:r>
+            <a:endParaRPr lang="es-ES" dirty="0"/>
           </a:p>
         </p:txBody>
       </p:sp>
       <p:sp>
         <p:nvSpPr>
-          <p:cNvPr id="3" name="Marcador de contenido 2">
-            <a:extLst>
-              <a:ext uri="{FF2B5EF4-FFF2-40B4-BE49-F238E27FC236}">
-                <a16:creationId xmlns:a16="http://schemas.microsoft.com/office/drawing/2014/main" id="{51906DBC-0CFA-44C8-B8D1-933F5C0650D1}"/>
-              </a:ext>
-            </a:extLst>
-          </p:cNvPr>
+          <p:cNvPr id="3" name="Marcador de contenido 2"/>
           <p:cNvSpPr>
             <a:spLocks noGrp="1"/>
           </p:cNvSpPr>
@@ -15855,6 +14353,7 @@
               <a:rPr lang="es-ES" dirty="0"/>
               <a:t>Los viajes son programados por personal de turismo para ser ofrecidos al público general, a través de:</a:t>
             </a:r>
+            <a:endParaRPr lang="es-ES" dirty="0"/>
           </a:p>
           <a:p>
             <a:pPr lvl="1"/>
@@ -15862,6 +14361,7 @@
               <a:rPr lang="es-ES" dirty="0"/>
               <a:t> Las agencias de viaje asociadas</a:t>
             </a:r>
+            <a:endParaRPr lang="es-ES" dirty="0"/>
           </a:p>
           <a:p>
             <a:pPr lvl="1"/>
@@ -15881,6 +14381,7 @@
               <a:rPr lang="es-ES" dirty="0"/>
               <a:t>Oficina de turismo</a:t>
             </a:r>
+            <a:endParaRPr lang="es-ES" dirty="0"/>
           </a:p>
           <a:p>
             <a:pPr lvl="1"/>
@@ -15888,12 +14389,14 @@
               <a:rPr lang="es-ES" dirty="0"/>
               <a:t>por el mismo sistema, en su sitio web.</a:t>
             </a:r>
+            <a:endParaRPr lang="es-ES" dirty="0"/>
           </a:p>
           <a:p>
             <a:r>
               <a:rPr lang="es-ES" dirty="0"/>
               <a:t>Las salidas podrán ser programadas de manera permanente o por un tiempo determinado para salir a los destinos turísticos más visitados.</a:t>
             </a:r>
+            <a:endParaRPr lang="es-ES" dirty="0"/>
           </a:p>
           <a:p>
             <a:r>
@@ -15909,20 +14412,14 @@
       </p:sp>
       <p:pic>
         <p:nvPicPr>
-          <p:cNvPr id="4" name="Imagen 3" descr="Imagen que contiene Escala de tiempo&#10;&#10;Descripción generada automáticamente">
-            <a:extLst>
-              <a:ext uri="{FF2B5EF4-FFF2-40B4-BE49-F238E27FC236}">
-                <a16:creationId xmlns:a16="http://schemas.microsoft.com/office/drawing/2014/main" id="{C33C46D6-09DF-2AB5-0BBD-153B447EDED0}"/>
-              </a:ext>
-            </a:extLst>
-          </p:cNvPr>
+          <p:cNvPr id="4" name="Imagen 3" descr="Imagen que contiene Escala de tiempo&#10;&#10;Descripción generada automáticamente"/>
           <p:cNvPicPr>
             <a:picLocks noChangeAspect="1"/>
           </p:cNvPicPr>
           <p:nvPr/>
         </p:nvPicPr>
         <p:blipFill>
-          <a:blip r:embed="rId2"/>
+          <a:blip r:embed="rId1"/>
           <a:stretch>
             <a:fillRect/>
           </a:stretch>
@@ -15938,11 +14435,6 @@
         </p:spPr>
       </p:pic>
     </p:spTree>
-    <p:extLst>
-      <p:ext uri="{BB962C8B-B14F-4D97-AF65-F5344CB8AC3E}">
-        <p14:creationId xmlns:p14="http://schemas.microsoft.com/office/powerpoint/2010/main" val="2526847329"/>
-      </p:ext>
-    </p:extLst>
   </p:cSld>
   <p:clrMapOvr>
     <a:masterClrMapping/>
@@ -15969,13 +14461,7 @@
       </p:grpSpPr>
       <p:sp>
         <p:nvSpPr>
-          <p:cNvPr id="2" name="Título 1">
-            <a:extLst>
-              <a:ext uri="{FF2B5EF4-FFF2-40B4-BE49-F238E27FC236}">
-                <a16:creationId xmlns:a16="http://schemas.microsoft.com/office/drawing/2014/main" id="{785E63F7-9FD8-4911-97B7-8127A22E2FCB}"/>
-              </a:ext>
-            </a:extLst>
-          </p:cNvPr>
+          <p:cNvPr id="2" name="Título 1"/>
           <p:cNvSpPr>
             <a:spLocks noGrp="1"/>
           </p:cNvSpPr>
@@ -15992,18 +14478,13 @@
               <a:rPr lang="es-ES" dirty="0"/>
               <a:t>Operación</a:t>
             </a:r>
+            <a:endParaRPr lang="es-ES" dirty="0"/>
           </a:p>
         </p:txBody>
       </p:sp>
       <p:sp>
         <p:nvSpPr>
-          <p:cNvPr id="3" name="Marcador de contenido 2">
-            <a:extLst>
-              <a:ext uri="{FF2B5EF4-FFF2-40B4-BE49-F238E27FC236}">
-                <a16:creationId xmlns:a16="http://schemas.microsoft.com/office/drawing/2014/main" id="{EF23D928-0060-4D3D-A304-6C5BF0CB7B6B}"/>
-              </a:ext>
-            </a:extLst>
-          </p:cNvPr>
+          <p:cNvPr id="3" name="Marcador de contenido 2"/>
           <p:cNvSpPr>
             <a:spLocks noGrp="1"/>
           </p:cNvSpPr>
@@ -16030,6 +14511,10 @@
               </a:rPr>
               <a:t>Podrán elegir de la lista de viajes programados o buscar su origen-destino.</a:t>
             </a:r>
+            <a:endParaRPr lang="es-ES" dirty="0">
+              <a:ea typeface="+mn-lt"/>
+              <a:cs typeface="+mn-lt"/>
+            </a:endParaRPr>
           </a:p>
           <a:p>
             <a:r>
@@ -16039,6 +14524,10 @@
               </a:rPr>
               <a:t>El cliente podrá comprar el viaje redondo.</a:t>
             </a:r>
+            <a:endParaRPr lang="es-ES">
+              <a:ea typeface="+mn-lt"/>
+              <a:cs typeface="+mn-lt"/>
+            </a:endParaRPr>
           </a:p>
           <a:p>
             <a:r>
@@ -16055,6 +14544,10 @@
               </a:rPr>
               <a:t>los pasajeros.</a:t>
             </a:r>
+            <a:endParaRPr lang="es-ES" dirty="0">
+              <a:ea typeface="+mn-lt"/>
+              <a:cs typeface="+mn-lt"/>
+            </a:endParaRPr>
           </a:p>
           <a:p>
             <a:r>
@@ -16064,6 +14557,10 @@
               </a:rPr>
               <a:t>Si el viaje cuenta con esta modalidad, se le solicitará al pasajero un lugar donde hará su descenso, el cual podrá ser su hotel, por ejemplo.</a:t>
             </a:r>
+            <a:endParaRPr lang="es-ES" dirty="0">
+              <a:ea typeface="+mn-lt"/>
+              <a:cs typeface="+mn-lt"/>
+            </a:endParaRPr>
           </a:p>
           <a:p>
             <a:r>
@@ -16080,6 +14577,10 @@
               </a:rPr>
               <a:t>turismo.</a:t>
             </a:r>
+            <a:endParaRPr lang="es-ES">
+              <a:ea typeface="+mn-lt"/>
+              <a:cs typeface="+mn-lt"/>
+            </a:endParaRPr>
           </a:p>
           <a:p>
             <a:r>
@@ -16089,6 +14590,10 @@
               </a:rPr>
               <a:t>Se emiten y/o se envían los pases de abordar a los pasajeros.</a:t>
             </a:r>
+            <a:endParaRPr lang="es-ES" dirty="0">
+              <a:ea typeface="+mn-lt"/>
+              <a:cs typeface="+mn-lt"/>
+            </a:endParaRPr>
           </a:p>
           <a:p>
             <a:r>
@@ -16107,20 +14612,14 @@
       </p:sp>
       <p:pic>
         <p:nvPicPr>
-          <p:cNvPr id="4" name="Imagen 3" descr="Interfaz de usuario gráfica, Aplicación&#10;&#10;Descripción generada automáticamente">
-            <a:extLst>
-              <a:ext uri="{FF2B5EF4-FFF2-40B4-BE49-F238E27FC236}">
-                <a16:creationId xmlns:a16="http://schemas.microsoft.com/office/drawing/2014/main" id="{C7EE4E84-FE5A-8999-48E3-37A9EEED35A7}"/>
-              </a:ext>
-            </a:extLst>
-          </p:cNvPr>
+          <p:cNvPr id="4" name="Imagen 3" descr="Interfaz de usuario gráfica, Aplicación&#10;&#10;Descripción generada automáticamente"/>
           <p:cNvPicPr>
             <a:picLocks noChangeAspect="1"/>
           </p:cNvPicPr>
           <p:nvPr/>
         </p:nvPicPr>
         <p:blipFill>
-          <a:blip r:embed="rId2"/>
+          <a:blip r:embed="rId1"/>
           <a:stretch>
             <a:fillRect/>
           </a:stretch>
@@ -16136,11 +14635,6 @@
         </p:spPr>
       </p:pic>
     </p:spTree>
-    <p:extLst>
-      <p:ext uri="{BB962C8B-B14F-4D97-AF65-F5344CB8AC3E}">
-        <p14:creationId xmlns:p14="http://schemas.microsoft.com/office/powerpoint/2010/main" val="3548563040"/>
-      </p:ext>
-    </p:extLst>
   </p:cSld>
   <p:clrMapOvr>
     <a:masterClrMapping/>
@@ -16167,13 +14661,7 @@
       </p:grpSpPr>
       <p:sp>
         <p:nvSpPr>
-          <p:cNvPr id="2" name="Título 1">
-            <a:extLst>
-              <a:ext uri="{FF2B5EF4-FFF2-40B4-BE49-F238E27FC236}">
-                <a16:creationId xmlns:a16="http://schemas.microsoft.com/office/drawing/2014/main" id="{6699CD62-6C7A-4F5B-9E0C-1F20C86B5DE7}"/>
-              </a:ext>
-            </a:extLst>
-          </p:cNvPr>
+          <p:cNvPr id="2" name="Título 1"/>
           <p:cNvSpPr>
             <a:spLocks noGrp="1"/>
           </p:cNvSpPr>
@@ -16190,18 +14678,13 @@
               <a:rPr lang="es-ES" dirty="0"/>
               <a:t>Venta: agencias de viajes y taquillas.</a:t>
             </a:r>
+            <a:endParaRPr lang="es-ES" dirty="0"/>
           </a:p>
         </p:txBody>
       </p:sp>
       <p:sp>
         <p:nvSpPr>
-          <p:cNvPr id="3" name="Marcador de contenido 2">
-            <a:extLst>
-              <a:ext uri="{FF2B5EF4-FFF2-40B4-BE49-F238E27FC236}">
-                <a16:creationId xmlns:a16="http://schemas.microsoft.com/office/drawing/2014/main" id="{20AB9BF8-3D3D-457A-AD77-FEC84A5910C6}"/>
-              </a:ext>
-            </a:extLst>
-          </p:cNvPr>
+          <p:cNvPr id="3" name="Marcador de contenido 2"/>
           <p:cNvSpPr>
             <a:spLocks noGrp="1"/>
           </p:cNvSpPr>
@@ -16220,6 +14703,7 @@
               <a:rPr lang="es-ES" dirty="0"/>
               <a:t>Se le asignará un usuario a cada agencia de venta, con este ingresará al sistema y podrá ver  todos los viajes programados.</a:t>
             </a:r>
+            <a:endParaRPr lang="es-ES" dirty="0"/>
           </a:p>
           <a:p>
             <a:endParaRPr lang="es-ES" dirty="0"/>
@@ -16229,27 +14713,24 @@
               <a:rPr lang="es-ES" dirty="0"/>
               <a:t>Se llevará el control de cuentas por cobrar.</a:t>
             </a:r>
+            <a:endParaRPr lang="es-ES" dirty="0"/>
           </a:p>
         </p:txBody>
       </p:sp>
       <p:pic>
         <p:nvPicPr>
-          <p:cNvPr id="4" name="Imagen 3" descr="Icono&#10;&#10;Descripción generada automáticamente">
-            <a:extLst>
-              <a:ext uri="{FF2B5EF4-FFF2-40B4-BE49-F238E27FC236}">
-                <a16:creationId xmlns:a16="http://schemas.microsoft.com/office/drawing/2014/main" id="{79039E11-D169-E0CF-47D9-B4E77DDC3AD3}"/>
-              </a:ext>
-            </a:extLst>
-          </p:cNvPr>
+          <p:cNvPr id="4" name="Imagen 3" descr="Icono&#10;&#10;Descripción generada automáticamente"/>
           <p:cNvPicPr>
             <a:picLocks noChangeAspect="1"/>
           </p:cNvPicPr>
           <p:nvPr/>
         </p:nvPicPr>
         <p:blipFill rotWithShape="1">
-          <a:blip r:embed="rId2"/>
+          <a:blip r:embed="rId1"/>
           <a:srcRect r="-457" b="3968"/>
-          <a:stretch/>
+          <a:stretch>
+            <a:fillRect/>
+          </a:stretch>
         </p:blipFill>
         <p:spPr>
           <a:xfrm>
@@ -16262,11 +14743,6 @@
         </p:spPr>
       </p:pic>
     </p:spTree>
-    <p:extLst>
-      <p:ext uri="{BB962C8B-B14F-4D97-AF65-F5344CB8AC3E}">
-        <p14:creationId xmlns:p14="http://schemas.microsoft.com/office/powerpoint/2010/main" val="2328844233"/>
-      </p:ext>
-    </p:extLst>
   </p:cSld>
   <p:clrMapOvr>
     <a:masterClrMapping/>
@@ -16293,13 +14769,7 @@
       </p:grpSpPr>
       <p:sp>
         <p:nvSpPr>
-          <p:cNvPr id="2" name="Título 1">
-            <a:extLst>
-              <a:ext uri="{FF2B5EF4-FFF2-40B4-BE49-F238E27FC236}">
-                <a16:creationId xmlns:a16="http://schemas.microsoft.com/office/drawing/2014/main" id="{F94C6B46-63AB-49CF-A525-B5920537714C}"/>
-              </a:ext>
-            </a:extLst>
-          </p:cNvPr>
+          <p:cNvPr id="2" name="Título 1"/>
           <p:cNvSpPr>
             <a:spLocks noGrp="1"/>
           </p:cNvSpPr>
@@ -16316,18 +14786,13 @@
               <a:rPr lang="es-ES" dirty="0"/>
               <a:t>Venta: público general</a:t>
             </a:r>
+            <a:endParaRPr lang="es-ES" dirty="0"/>
           </a:p>
         </p:txBody>
       </p:sp>
       <p:sp>
         <p:nvSpPr>
-          <p:cNvPr id="3" name="Marcador de contenido 2">
-            <a:extLst>
-              <a:ext uri="{FF2B5EF4-FFF2-40B4-BE49-F238E27FC236}">
-                <a16:creationId xmlns:a16="http://schemas.microsoft.com/office/drawing/2014/main" id="{C145D010-3502-44AC-BEAC-703DA6DD488D}"/>
-              </a:ext>
-            </a:extLst>
-          </p:cNvPr>
+          <p:cNvPr id="3" name="Marcador de contenido 2"/>
           <p:cNvSpPr>
             <a:spLocks noGrp="1"/>
           </p:cNvSpPr>
@@ -16352,6 +14817,10 @@
               </a:rPr>
               <a:t>Se solicitará un número de teléfono al seleccionar su viaje</a:t>
             </a:r>
+            <a:endParaRPr lang="es-ES">
+              <a:ea typeface="+mn-lt"/>
+              <a:cs typeface="+mn-lt"/>
+            </a:endParaRPr>
           </a:p>
           <a:p>
             <a:r>
@@ -16370,11 +14839,6 @@
         </p:txBody>
       </p:sp>
     </p:spTree>
-    <p:extLst>
-      <p:ext uri="{BB962C8B-B14F-4D97-AF65-F5344CB8AC3E}">
-        <p14:creationId xmlns:p14="http://schemas.microsoft.com/office/powerpoint/2010/main" val="3471136250"/>
-      </p:ext>
-    </p:extLst>
   </p:cSld>
   <p:clrMapOvr>
     <a:masterClrMapping/>
@@ -16401,13 +14865,7 @@
       </p:grpSpPr>
       <p:sp>
         <p:nvSpPr>
-          <p:cNvPr id="2" name="Título 1">
-            <a:extLst>
-              <a:ext uri="{FF2B5EF4-FFF2-40B4-BE49-F238E27FC236}">
-                <a16:creationId xmlns:a16="http://schemas.microsoft.com/office/drawing/2014/main" id="{21BFF263-59E7-4205-86DA-FCF4CF09B960}"/>
-              </a:ext>
-            </a:extLst>
-          </p:cNvPr>
+          <p:cNvPr id="2" name="Título 1"/>
           <p:cNvSpPr>
             <a:spLocks noGrp="1"/>
           </p:cNvSpPr>
@@ -16424,18 +14882,13 @@
               <a:rPr lang="es-ES" dirty="0"/>
               <a:t>Turismo</a:t>
             </a:r>
+            <a:endParaRPr lang="es-ES" dirty="0"/>
           </a:p>
         </p:txBody>
       </p:sp>
       <p:sp>
         <p:nvSpPr>
-          <p:cNvPr id="3" name="Marcador de contenido 2">
-            <a:extLst>
-              <a:ext uri="{FF2B5EF4-FFF2-40B4-BE49-F238E27FC236}">
-                <a16:creationId xmlns:a16="http://schemas.microsoft.com/office/drawing/2014/main" id="{AFE5EBA7-A210-4903-B104-8AE44FC810BC}"/>
-              </a:ext>
-            </a:extLst>
-          </p:cNvPr>
+          <p:cNvPr id="3" name="Marcador de contenido 2"/>
           <p:cNvSpPr>
             <a:spLocks noGrp="1"/>
           </p:cNvSpPr>
@@ -16464,12 +14917,14 @@
               <a:rPr lang="es-ES" dirty="0"/>
               <a:t>Se asignará la camioneta o autobús y conductor al viaje de acuerdo a sus políticas.</a:t>
             </a:r>
+            <a:endParaRPr lang="es-ES" dirty="0"/>
           </a:p>
           <a:p>
             <a:r>
               <a:rPr lang="es-ES" dirty="0"/>
               <a:t>Al final del viaje emitirá una autorización de pago para liquidaciones.</a:t>
             </a:r>
+            <a:endParaRPr lang="es-ES" dirty="0"/>
           </a:p>
           <a:p>
             <a:endParaRPr lang="es-ES" dirty="0"/>
@@ -16477,11 +14932,6 @@
         </p:txBody>
       </p:sp>
     </p:spTree>
-    <p:extLst>
-      <p:ext uri="{BB962C8B-B14F-4D97-AF65-F5344CB8AC3E}">
-        <p14:creationId xmlns:p14="http://schemas.microsoft.com/office/powerpoint/2010/main" val="3605043281"/>
-      </p:ext>
-    </p:extLst>
   </p:cSld>
   <p:clrMapOvr>
     <a:masterClrMapping/>
@@ -16532,7 +14982,7 @@
     </a:clrScheme>
     <a:fontScheme name="Ion Boardroom">
       <a:majorFont>
-        <a:latin typeface="Century Gothic" panose="020B0502020202020204"/>
+        <a:latin typeface="Century Gothic"/>
         <a:ea typeface=""/>
         <a:cs typeface=""/>
         <a:font script="Jpan" typeface="メイリオ"/>
@@ -16567,7 +15017,7 @@
         <a:font script="Geor" typeface="Sylfaen"/>
       </a:majorFont>
       <a:minorFont>
-        <a:latin typeface="Century Gothic" panose="020B0502020202020204"/>
+        <a:latin typeface="Century Gothic"/>
         <a:ea typeface=""/>
         <a:cs typeface=""/>
         <a:font script="Jpan" typeface="メイリオ"/>
@@ -16739,16 +15189,16 @@
               </a:schemeClr>
             </a:duotone>
           </a:blip>
-          <a:stretch/>
+          <a:stretch>
+            <a:fillRect/>
+          </a:stretch>
         </a:blipFill>
       </a:bgFillStyleLst>
     </a:fmtScheme>
   </a:themeElements>
-  <a:objectDefaults/>
-  <a:extraClrSchemeLst/>
   <a:extLst>
     <a:ext uri="{05A4C25C-085E-4340-85A3-A5531E510DB2}">
-      <thm15:themeFamily xmlns:thm15="http://schemas.microsoft.com/office/thememl/2012/main" name="Ion Boardroom" id="{FC33163D-4339-46B1-8EED-24C834239D99}" vid="{A3AB87EF-B655-4FFF-8D05-F333AD7F2789}"/>
+      <thm15:themeFamily xmlns:thm15="http://schemas.microsoft.com/office/thememl/2012/main" name="Office Theme" id="{62F939B6-93AF-4DB8-9C6B-D6C7DFDC589F}" vid="{4A3C46E8-61CC-4603-A589-7422A47A8E4A}"/>
     </a:ext>
   </a:extLst>
 </a:theme>
